--- a/docs/10_Training_Deck.pptx
+++ b/docs/10_Training_Deck.pptx
@@ -4792,988 +4792,33 @@
           </a:p>
         </p:txBody>
       </p:sp>
-      <p:sp>
-        <p:nvSpPr>
-          <p:cNvPr id="5" name="Shape 3"/>
-          <p:cNvSpPr/>
-          <p:nvPr/>
-        </p:nvSpPr>
+      <p:pic>
+        <p:nvPicPr>
+          <p:cNvPr id="5" name="Image 0" descr="/sessions/brave-peaceful-lovelace/mockups/mobile_home.png">    </p:cNvPr>
+          <p:cNvPicPr>
+            <a:picLocks noChangeAspect="1"/>
+          </p:cNvPicPr>
+          <p:nvPr/>
+        </p:nvPicPr>
+        <p:blipFill>
+          <a:blip r:embed="rId1"/>
+          <a:stretch>
+            <a:fillRect/>
+          </a:stretch>
+        </p:blipFill>
         <p:spPr>
           <a:xfrm>
             <a:off x="457200" y="822960"/>
-            <a:ext cx="2560320" cy="3840480"/>
-          </a:xfrm>
-          <a:prstGeom prst="roundRect">
-            <a:avLst>
-              <a:gd name="adj" fmla="val 5357"/>
-            </a:avLst>
-          </a:prstGeom>
-          <a:solidFill>
-            <a:srgbClr val="1A1A1A"/>
-          </a:solidFill>
-          <a:ln w="19050">
-            <a:solidFill>
-              <a:srgbClr val="444444"/>
-            </a:solidFill>
-            <a:prstDash val="solid"/>
-          </a:ln>
-          <a:effectLst>
-            <a:outerShdw sx="100000" sy="100000" kx="0" ky="0" algn="bl" rotWithShape="0" blurRad="76200" dist="25400" dir="8100000">
-              <a:srgbClr val="000000">
-                <a:alpha val="40000"/>
-              </a:srgbClr>
-            </a:outerShdw>
-          </a:effectLst>
-        </p:spPr>
-      </p:sp>
-      <p:sp>
-        <p:nvSpPr>
-          <p:cNvPr id="6" name="Shape 4"/>
-          <p:cNvSpPr/>
-          <p:nvPr/>
-        </p:nvSpPr>
-        <p:spPr>
-          <a:xfrm>
-            <a:off x="502920" y="868680"/>
-            <a:ext cx="2468880" cy="182880"/>
-          </a:xfrm>
-          <a:prstGeom prst="rect">
-            <a:avLst/>
-          </a:prstGeom>
-          <a:solidFill>
-            <a:srgbClr val="111111"/>
-          </a:solidFill>
-          <a:ln/>
-        </p:spPr>
-      </p:sp>
-      <p:sp>
-        <p:nvSpPr>
-          <p:cNvPr id="7" name="Text 5"/>
-          <p:cNvSpPr/>
-          <p:nvPr/>
-        </p:nvSpPr>
-        <p:spPr>
-          <a:xfrm>
-            <a:off x="548640" y="868680"/>
-            <a:ext cx="457200" cy="182880"/>
-          </a:xfrm>
-          <a:prstGeom prst="rect">
-            <a:avLst/>
-          </a:prstGeom>
-          <a:noFill/>
-          <a:ln/>
-        </p:spPr>
-        <p:txBody>
-          <a:bodyPr wrap="square" rtlCol="0" anchor="ctr"/>
-          <a:lstStyle/>
-          <a:p>
-            <a:pPr indent="0" marL="0">
-              <a:buNone/>
-            </a:pPr>
-            <a:r>
-              <a:rPr lang="en-US" sz="700" b="1" dirty="0">
-                <a:solidFill>
-                  <a:srgbClr val="FFFFFF"/>
-                </a:solidFill>
-                <a:latin typeface="Arial" pitchFamily="34" charset="0"/>
-                <a:ea typeface="Arial" pitchFamily="34" charset="-122"/>
-                <a:cs typeface="Arial" pitchFamily="34" charset="-120"/>
-              </a:rPr>
-              <a:t>9:41</a:t>
-            </a:r>
-            <a:endParaRPr lang="en-US" sz="700" dirty="0"/>
-          </a:p>
-        </p:txBody>
-      </p:sp>
-      <p:sp>
-        <p:nvSpPr>
-          <p:cNvPr id="8" name="Shape 6"/>
-          <p:cNvSpPr/>
-          <p:nvPr/>
-        </p:nvSpPr>
-        <p:spPr>
-          <a:xfrm>
-            <a:off x="502920" y="1051560"/>
-            <a:ext cx="2468880" cy="3337560"/>
-          </a:xfrm>
-          <a:prstGeom prst="rect">
-            <a:avLst/>
-          </a:prstGeom>
-          <a:solidFill>
-            <a:srgbClr val="000000"/>
-          </a:solidFill>
-          <a:ln/>
-        </p:spPr>
-      </p:sp>
-      <p:sp>
-        <p:nvSpPr>
-          <p:cNvPr id="9" name="Shape 7"/>
-          <p:cNvSpPr/>
-          <p:nvPr/>
-        </p:nvSpPr>
-        <p:spPr>
-          <a:xfrm>
-            <a:off x="1417320" y="4480560"/>
-            <a:ext cx="640080" cy="36576"/>
-          </a:xfrm>
-          <a:prstGeom prst="roundRect">
-            <a:avLst>
-              <a:gd name="adj" fmla="val 50000"/>
-            </a:avLst>
-          </a:prstGeom>
-          <a:solidFill>
-            <a:srgbClr val="444444"/>
-          </a:solidFill>
-          <a:ln/>
-        </p:spPr>
-      </p:sp>
-      <p:sp>
-        <p:nvSpPr>
-          <p:cNvPr id="10" name="Shape 8"/>
-          <p:cNvSpPr/>
-          <p:nvPr/>
-        </p:nvSpPr>
-        <p:spPr>
-          <a:xfrm>
-            <a:off x="502920" y="1051560"/>
-            <a:ext cx="2468880" cy="274320"/>
-          </a:xfrm>
-          <a:prstGeom prst="rect">
-            <a:avLst/>
-          </a:prstGeom>
-          <a:solidFill>
-            <a:srgbClr val="C30A14"/>
-          </a:solidFill>
-          <a:ln/>
-        </p:spPr>
-      </p:sp>
-      <p:sp>
-        <p:nvSpPr>
-          <p:cNvPr id="11" name="Text 9"/>
-          <p:cNvSpPr/>
-          <p:nvPr/>
-        </p:nvSpPr>
-        <p:spPr>
-          <a:xfrm>
-            <a:off x="594360" y="1051560"/>
-            <a:ext cx="2286000" cy="274320"/>
-          </a:xfrm>
-          <a:prstGeom prst="rect">
-            <a:avLst/>
-          </a:prstGeom>
-          <a:noFill/>
-          <a:ln/>
-        </p:spPr>
-        <p:txBody>
-          <a:bodyPr wrap="square" rtlCol="0" anchor="ctr"/>
-          <a:lstStyle/>
-          <a:p>
-            <a:pPr indent="0" marL="0">
-              <a:buNone/>
-            </a:pPr>
-            <a:r>
-              <a:rPr lang="en-US" sz="900" b="1" dirty="0">
-                <a:solidFill>
-                  <a:srgbClr val="FFFFFF"/>
-                </a:solidFill>
-                <a:latin typeface="Arial" pitchFamily="34" charset="0"/>
-                <a:ea typeface="Arial" pitchFamily="34" charset="-122"/>
-                <a:cs typeface="Arial" pitchFamily="34" charset="-120"/>
-              </a:rPr>
-              <a:t>SYNTONIQA</a:t>
-            </a:r>
-            <a:endParaRPr lang="en-US" sz="900" dirty="0"/>
-          </a:p>
-        </p:txBody>
-      </p:sp>
-      <p:sp>
-        <p:nvSpPr>
-          <p:cNvPr id="12" name="Shape 10"/>
-          <p:cNvSpPr/>
-          <p:nvPr/>
-        </p:nvSpPr>
-        <p:spPr>
-          <a:xfrm>
-            <a:off x="530352" y="1417320"/>
-            <a:ext cx="768096" cy="502920"/>
-          </a:xfrm>
-          <a:prstGeom prst="rect">
-            <a:avLst/>
-          </a:prstGeom>
-          <a:solidFill>
-            <a:srgbClr val="222222"/>
-          </a:solidFill>
-          <a:ln/>
-        </p:spPr>
-      </p:sp>
-      <p:sp>
-        <p:nvSpPr>
-          <p:cNvPr id="13" name="Text 11"/>
-          <p:cNvSpPr/>
-          <p:nvPr/>
-        </p:nvSpPr>
-        <p:spPr>
-          <a:xfrm>
-            <a:off x="530352" y="1435608"/>
-            <a:ext cx="768096" cy="274320"/>
-          </a:xfrm>
-          <a:prstGeom prst="rect">
-            <a:avLst/>
-          </a:prstGeom>
-          <a:noFill/>
-          <a:ln/>
-        </p:spPr>
-        <p:txBody>
-          <a:bodyPr wrap="square" rtlCol="0" anchor="ctr"/>
-          <a:lstStyle/>
-          <a:p>
-            <a:pPr algn="ctr" indent="0" marL="0">
-              <a:buNone/>
-            </a:pPr>
-            <a:r>
-              <a:rPr lang="en-US" sz="1600" b="1" dirty="0">
-                <a:solidFill>
-                  <a:srgbClr val="C30A14"/>
-                </a:solidFill>
-                <a:latin typeface="Arial Black" pitchFamily="34" charset="0"/>
-                <a:ea typeface="Arial Black" pitchFamily="34" charset="-122"/>
-                <a:cs typeface="Arial Black" pitchFamily="34" charset="-120"/>
-              </a:rPr>
-              <a:t>3</a:t>
-            </a:r>
-            <a:endParaRPr lang="en-US" sz="1600" dirty="0"/>
-          </a:p>
-        </p:txBody>
-      </p:sp>
-      <p:sp>
-        <p:nvSpPr>
-          <p:cNvPr id="14" name="Text 12"/>
-          <p:cNvSpPr/>
-          <p:nvPr/>
-        </p:nvSpPr>
-        <p:spPr>
-          <a:xfrm>
-            <a:off x="530352" y="1709928"/>
-            <a:ext cx="768096" cy="182880"/>
-          </a:xfrm>
-          <a:prstGeom prst="rect">
-            <a:avLst/>
-          </a:prstGeom>
-          <a:noFill/>
-          <a:ln/>
-        </p:spPr>
-        <p:txBody>
-          <a:bodyPr wrap="square" rtlCol="0" anchor="ctr"/>
-          <a:lstStyle/>
-          <a:p>
-            <a:pPr algn="ctr" indent="0" marL="0">
-              <a:buNone/>
-            </a:pPr>
-            <a:r>
-              <a:rPr lang="en-US" sz="550" dirty="0">
-                <a:solidFill>
-                  <a:srgbClr val="888888"/>
-                </a:solidFill>
-                <a:latin typeface="Arial" pitchFamily="34" charset="0"/>
-                <a:ea typeface="Arial" pitchFamily="34" charset="-122"/>
-                <a:cs typeface="Arial" pitchFamily="34" charset="-120"/>
-              </a:rPr>
-              <a:t>Urgenze</a:t>
-            </a:r>
-            <a:endParaRPr lang="en-US" sz="550" dirty="0"/>
-          </a:p>
-        </p:txBody>
-      </p:sp>
-      <p:sp>
-        <p:nvSpPr>
-          <p:cNvPr id="15" name="Shape 13"/>
-          <p:cNvSpPr/>
-          <p:nvPr/>
-        </p:nvSpPr>
-        <p:spPr>
-          <a:xfrm>
-            <a:off x="1353312" y="1417320"/>
-            <a:ext cx="768096" cy="502920"/>
-          </a:xfrm>
-          <a:prstGeom prst="rect">
-            <a:avLst/>
-          </a:prstGeom>
-          <a:solidFill>
-            <a:srgbClr val="222222"/>
-          </a:solidFill>
-          <a:ln/>
-        </p:spPr>
-      </p:sp>
-      <p:sp>
-        <p:nvSpPr>
-          <p:cNvPr id="16" name="Text 14"/>
-          <p:cNvSpPr/>
-          <p:nvPr/>
-        </p:nvSpPr>
-        <p:spPr>
-          <a:xfrm>
-            <a:off x="1353312" y="1435608"/>
-            <a:ext cx="768096" cy="274320"/>
-          </a:xfrm>
-          <a:prstGeom prst="rect">
-            <a:avLst/>
-          </a:prstGeom>
-          <a:noFill/>
-          <a:ln/>
-        </p:spPr>
-        <p:txBody>
-          <a:bodyPr wrap="square" rtlCol="0" anchor="ctr"/>
-          <a:lstStyle/>
-          <a:p>
-            <a:pPr algn="ctr" indent="0" marL="0">
-              <a:buNone/>
-            </a:pPr>
-            <a:r>
-              <a:rPr lang="en-US" sz="1600" b="1" dirty="0">
-                <a:solidFill>
-                  <a:srgbClr val="3B7EF7"/>
-                </a:solidFill>
-                <a:latin typeface="Arial Black" pitchFamily="34" charset="0"/>
-                <a:ea typeface="Arial Black" pitchFamily="34" charset="-122"/>
-                <a:cs typeface="Arial Black" pitchFamily="34" charset="-120"/>
-              </a:rPr>
-              <a:t>2</a:t>
-            </a:r>
-            <a:endParaRPr lang="en-US" sz="1600" dirty="0"/>
-          </a:p>
-        </p:txBody>
-      </p:sp>
-      <p:sp>
-        <p:nvSpPr>
-          <p:cNvPr id="17" name="Text 15"/>
-          <p:cNvSpPr/>
-          <p:nvPr/>
-        </p:nvSpPr>
-        <p:spPr>
-          <a:xfrm>
-            <a:off x="1353312" y="1709928"/>
-            <a:ext cx="768096" cy="182880"/>
-          </a:xfrm>
-          <a:prstGeom prst="rect">
-            <a:avLst/>
-          </a:prstGeom>
-          <a:noFill/>
-          <a:ln/>
-        </p:spPr>
-        <p:txBody>
-          <a:bodyPr wrap="square" rtlCol="0" anchor="ctr"/>
-          <a:lstStyle/>
-          <a:p>
-            <a:pPr algn="ctr" indent="0" marL="0">
-              <a:buNone/>
-            </a:pPr>
-            <a:r>
-              <a:rPr lang="en-US" sz="550" dirty="0">
-                <a:solidFill>
-                  <a:srgbClr val="888888"/>
-                </a:solidFill>
-                <a:latin typeface="Arial" pitchFamily="34" charset="0"/>
-                <a:ea typeface="Arial" pitchFamily="34" charset="-122"/>
-                <a:cs typeface="Arial" pitchFamily="34" charset="-120"/>
-              </a:rPr>
-              <a:t>Interventi Oggi</a:t>
-            </a:r>
-            <a:endParaRPr lang="en-US" sz="550" dirty="0"/>
-          </a:p>
-        </p:txBody>
-      </p:sp>
-      <p:sp>
-        <p:nvSpPr>
-          <p:cNvPr id="18" name="Shape 16"/>
-          <p:cNvSpPr/>
-          <p:nvPr/>
-        </p:nvSpPr>
-        <p:spPr>
-          <a:xfrm>
-            <a:off x="2176272" y="1417320"/>
-            <a:ext cx="768096" cy="502920"/>
-          </a:xfrm>
-          <a:prstGeom prst="rect">
-            <a:avLst/>
-          </a:prstGeom>
-          <a:solidFill>
-            <a:srgbClr val="222222"/>
-          </a:solidFill>
-          <a:ln/>
-        </p:spPr>
-      </p:sp>
-      <p:sp>
-        <p:nvSpPr>
-          <p:cNvPr id="19" name="Text 17"/>
-          <p:cNvSpPr/>
-          <p:nvPr/>
-        </p:nvSpPr>
-        <p:spPr>
-          <a:xfrm>
-            <a:off x="2176272" y="1435608"/>
-            <a:ext cx="768096" cy="274320"/>
-          </a:xfrm>
-          <a:prstGeom prst="rect">
-            <a:avLst/>
-          </a:prstGeom>
-          <a:noFill/>
-          <a:ln/>
-        </p:spPr>
-        <p:txBody>
-          <a:bodyPr wrap="square" rtlCol="0" anchor="ctr"/>
-          <a:lstStyle/>
-          <a:p>
-            <a:pPr algn="ctr" indent="0" marL="0">
-              <a:buNone/>
-            </a:pPr>
-            <a:r>
-              <a:rPr lang="en-US" sz="1600" b="1" dirty="0">
-                <a:solidFill>
-                  <a:srgbClr val="F7B731"/>
-                </a:solidFill>
-                <a:latin typeface="Arial Black" pitchFamily="34" charset="0"/>
-                <a:ea typeface="Arial Black" pitchFamily="34" charset="-122"/>
-                <a:cs typeface="Arial Black" pitchFamily="34" charset="-120"/>
-              </a:rPr>
-              <a:t>1</a:t>
-            </a:r>
-            <a:endParaRPr lang="en-US" sz="1600" dirty="0"/>
-          </a:p>
-        </p:txBody>
-      </p:sp>
-      <p:sp>
-        <p:nvSpPr>
-          <p:cNvPr id="20" name="Text 18"/>
-          <p:cNvSpPr/>
-          <p:nvPr/>
-        </p:nvSpPr>
-        <p:spPr>
-          <a:xfrm>
-            <a:off x="2176272" y="1709928"/>
-            <a:ext cx="768096" cy="182880"/>
-          </a:xfrm>
-          <a:prstGeom prst="rect">
-            <a:avLst/>
-          </a:prstGeom>
-          <a:noFill/>
-          <a:ln/>
-        </p:spPr>
-        <p:txBody>
-          <a:bodyPr wrap="square" rtlCol="0" anchor="ctr"/>
-          <a:lstStyle/>
-          <a:p>
-            <a:pPr algn="ctr" indent="0" marL="0">
-              <a:buNone/>
-            </a:pPr>
-            <a:r>
-              <a:rPr lang="en-US" sz="550" dirty="0">
-                <a:solidFill>
-                  <a:srgbClr val="888888"/>
-                </a:solidFill>
-                <a:latin typeface="Arial" pitchFamily="34" charset="0"/>
-                <a:ea typeface="Arial" pitchFamily="34" charset="-122"/>
-                <a:cs typeface="Arial" pitchFamily="34" charset="-120"/>
-              </a:rPr>
-              <a:t>Ordini</a:t>
-            </a:r>
-            <a:endParaRPr lang="en-US" sz="550" dirty="0"/>
-          </a:p>
-        </p:txBody>
-      </p:sp>
-      <p:sp>
-        <p:nvSpPr>
-          <p:cNvPr id="21" name="Text 19"/>
-          <p:cNvSpPr/>
-          <p:nvPr/>
-        </p:nvSpPr>
-        <p:spPr>
-          <a:xfrm>
-            <a:off x="594360" y="2057400"/>
-            <a:ext cx="2286000" cy="182880"/>
-          </a:xfrm>
-          <a:prstGeom prst="rect">
-            <a:avLst/>
-          </a:prstGeom>
-          <a:noFill/>
-          <a:ln/>
-        </p:spPr>
-        <p:txBody>
-          <a:bodyPr wrap="square" rtlCol="0" anchor="ctr"/>
-          <a:lstStyle/>
-          <a:p>
-            <a:pPr indent="0" marL="0">
-              <a:buNone/>
-            </a:pPr>
-            <a:r>
-              <a:rPr lang="en-US" sz="800" b="1" dirty="0">
-                <a:solidFill>
-                  <a:srgbClr val="FFFFFF"/>
-                </a:solidFill>
-                <a:latin typeface="Arial" pitchFamily="34" charset="0"/>
-                <a:ea typeface="Arial" pitchFamily="34" charset="-122"/>
-                <a:cs typeface="Arial" pitchFamily="34" charset="-120"/>
-              </a:rPr>
-              <a:t>Urgenze Aperte</a:t>
-            </a:r>
-            <a:endParaRPr lang="en-US" sz="800" dirty="0"/>
-          </a:p>
-        </p:txBody>
-      </p:sp>
-      <p:sp>
-        <p:nvSpPr>
-          <p:cNvPr id="22" name="Shape 20"/>
-          <p:cNvSpPr/>
-          <p:nvPr/>
-        </p:nvSpPr>
-        <p:spPr>
-          <a:xfrm>
-            <a:off x="548640" y="2286000"/>
-            <a:ext cx="2377440" cy="274320"/>
-          </a:xfrm>
-          <a:prstGeom prst="rect">
-            <a:avLst/>
-          </a:prstGeom>
-          <a:solidFill>
-            <a:srgbClr val="222222"/>
-          </a:solidFill>
-          <a:ln/>
-        </p:spPr>
-      </p:sp>
-      <p:sp>
-        <p:nvSpPr>
-          <p:cNvPr id="23" name="Shape 21"/>
-          <p:cNvSpPr/>
-          <p:nvPr/>
-        </p:nvSpPr>
-        <p:spPr>
-          <a:xfrm>
-            <a:off x="548640" y="2286000"/>
-            <a:ext cx="27432" cy="274320"/>
-          </a:xfrm>
-          <a:prstGeom prst="rect">
-            <a:avLst/>
-          </a:prstGeom>
-          <a:solidFill>
-            <a:srgbClr val="C30A14"/>
-          </a:solidFill>
-          <a:ln/>
-        </p:spPr>
-      </p:sp>
-      <p:sp>
-        <p:nvSpPr>
-          <p:cNvPr id="24" name="Text 22"/>
-          <p:cNvSpPr/>
-          <p:nvPr/>
-        </p:nvSpPr>
-        <p:spPr>
-          <a:xfrm>
-            <a:off x="640080" y="2286000"/>
-            <a:ext cx="2194560" cy="274320"/>
-          </a:xfrm>
-          <a:prstGeom prst="rect">
-            <a:avLst/>
-          </a:prstGeom>
-          <a:noFill/>
-          <a:ln/>
-        </p:spPr>
-        <p:txBody>
-          <a:bodyPr wrap="square" rtlCol="0" anchor="ctr"/>
-          <a:lstStyle/>
-          <a:p>
-            <a:pPr indent="0" marL="0">
-              <a:buNone/>
-            </a:pPr>
-            <a:r>
-              <a:rPr lang="en-US" sz="550" dirty="0">
-                <a:solidFill>
-                  <a:srgbClr val="CCCCCC"/>
-                </a:solidFill>
-                <a:latin typeface="Arial" pitchFamily="34" charset="0"/>
-                <a:ea typeface="Arial" pitchFamily="34" charset="-122"/>
-                <a:cs typeface="Arial" pitchFamily="34" charset="-120"/>
-              </a:rPr>
-              <a:t>URG_042 · Az. Rossi · Robot A5</a:t>
-            </a:r>
-            <a:endParaRPr lang="en-US" sz="550" dirty="0"/>
-          </a:p>
-        </p:txBody>
-      </p:sp>
-      <p:sp>
-        <p:nvSpPr>
-          <p:cNvPr id="25" name="Shape 23"/>
-          <p:cNvSpPr/>
-          <p:nvPr/>
-        </p:nvSpPr>
-        <p:spPr>
-          <a:xfrm>
-            <a:off x="548640" y="2606040"/>
-            <a:ext cx="2377440" cy="274320"/>
-          </a:xfrm>
-          <a:prstGeom prst="rect">
-            <a:avLst/>
-          </a:prstGeom>
-          <a:solidFill>
-            <a:srgbClr val="222222"/>
-          </a:solidFill>
-          <a:ln/>
-        </p:spPr>
-      </p:sp>
-      <p:sp>
-        <p:nvSpPr>
-          <p:cNvPr id="26" name="Shape 24"/>
-          <p:cNvSpPr/>
-          <p:nvPr/>
-        </p:nvSpPr>
-        <p:spPr>
-          <a:xfrm>
-            <a:off x="548640" y="2606040"/>
-            <a:ext cx="27432" cy="274320"/>
-          </a:xfrm>
-          <a:prstGeom prst="rect">
-            <a:avLst/>
-          </a:prstGeom>
-          <a:solidFill>
-            <a:srgbClr val="C30A14"/>
-          </a:solidFill>
-          <a:ln/>
-        </p:spPr>
-      </p:sp>
-      <p:sp>
-        <p:nvSpPr>
-          <p:cNvPr id="27" name="Text 25"/>
-          <p:cNvSpPr/>
-          <p:nvPr/>
-        </p:nvSpPr>
-        <p:spPr>
-          <a:xfrm>
-            <a:off x="640080" y="2606040"/>
-            <a:ext cx="2194560" cy="274320"/>
-          </a:xfrm>
-          <a:prstGeom prst="rect">
-            <a:avLst/>
-          </a:prstGeom>
-          <a:noFill/>
-          <a:ln/>
-        </p:spPr>
-        <p:txBody>
-          <a:bodyPr wrap="square" rtlCol="0" anchor="ctr"/>
-          <a:lstStyle/>
-          <a:p>
-            <a:pPr indent="0" marL="0">
-              <a:buNone/>
-            </a:pPr>
-            <a:r>
-              <a:rPr lang="en-US" sz="550" dirty="0">
-                <a:solidFill>
-                  <a:srgbClr val="CCCCCC"/>
-                </a:solidFill>
-                <a:latin typeface="Arial" pitchFamily="34" charset="0"/>
-                <a:ea typeface="Arial" pitchFamily="34" charset="-122"/>
-                <a:cs typeface="Arial" pitchFamily="34" charset="-120"/>
-              </a:rPr>
-              <a:t>URG_041 · Coop Verdi · Sensore</a:t>
-            </a:r>
-            <a:endParaRPr lang="en-US" sz="550" dirty="0"/>
-          </a:p>
-        </p:txBody>
-      </p:sp>
-      <p:sp>
-        <p:nvSpPr>
-          <p:cNvPr id="28" name="Shape 26"/>
-          <p:cNvSpPr/>
-          <p:nvPr/>
-        </p:nvSpPr>
-        <p:spPr>
-          <a:xfrm>
-            <a:off x="548640" y="2926080"/>
-            <a:ext cx="2377440" cy="274320"/>
-          </a:xfrm>
-          <a:prstGeom prst="rect">
-            <a:avLst/>
-          </a:prstGeom>
-          <a:solidFill>
-            <a:srgbClr val="222222"/>
-          </a:solidFill>
-          <a:ln/>
-        </p:spPr>
-      </p:sp>
-      <p:sp>
-        <p:nvSpPr>
-          <p:cNvPr id="29" name="Shape 27"/>
-          <p:cNvSpPr/>
-          <p:nvPr/>
-        </p:nvSpPr>
-        <p:spPr>
-          <a:xfrm>
-            <a:off x="548640" y="2926080"/>
-            <a:ext cx="27432" cy="274320"/>
-          </a:xfrm>
-          <a:prstGeom prst="rect">
-            <a:avLst/>
-          </a:prstGeom>
-          <a:solidFill>
-            <a:srgbClr val="C30A14"/>
-          </a:solidFill>
-          <a:ln/>
-        </p:spPr>
-      </p:sp>
-      <p:sp>
-        <p:nvSpPr>
-          <p:cNvPr id="30" name="Text 28"/>
-          <p:cNvSpPr/>
-          <p:nvPr/>
-        </p:nvSpPr>
-        <p:spPr>
-          <a:xfrm>
-            <a:off x="640080" y="2926080"/>
-            <a:ext cx="2194560" cy="274320"/>
-          </a:xfrm>
-          <a:prstGeom prst="rect">
-            <a:avLst/>
-          </a:prstGeom>
-          <a:noFill/>
-          <a:ln/>
-        </p:spPr>
-        <p:txBody>
-          <a:bodyPr wrap="square" rtlCol="0" anchor="ctr"/>
-          <a:lstStyle/>
-          <a:p>
-            <a:pPr indent="0" marL="0">
-              <a:buNone/>
-            </a:pPr>
-            <a:r>
-              <a:rPr lang="en-US" sz="550" dirty="0">
-                <a:solidFill>
-                  <a:srgbClr val="CCCCCC"/>
-                </a:solidFill>
-                <a:latin typeface="Arial" pitchFamily="34" charset="0"/>
-                <a:ea typeface="Arial" pitchFamily="34" charset="-122"/>
-                <a:cs typeface="Arial" pitchFamily="34" charset="-120"/>
-              </a:rPr>
-              <a:t>URG_040 · Latteria B. · PM Q1</a:t>
-            </a:r>
-            <a:endParaRPr lang="en-US" sz="550" dirty="0"/>
-          </a:p>
-        </p:txBody>
-      </p:sp>
-      <p:sp>
-        <p:nvSpPr>
-          <p:cNvPr id="31" name="Shape 29"/>
-          <p:cNvSpPr/>
-          <p:nvPr/>
-        </p:nvSpPr>
-        <p:spPr>
-          <a:xfrm>
-            <a:off x="502920" y="4069080"/>
-            <a:ext cx="2468880" cy="320040"/>
-          </a:xfrm>
-          <a:prstGeom prst="rect">
-            <a:avLst/>
-          </a:prstGeom>
-          <a:solidFill>
-            <a:srgbClr val="151515"/>
-          </a:solidFill>
-          <a:ln/>
-        </p:spPr>
-      </p:sp>
-      <p:sp>
-        <p:nvSpPr>
-          <p:cNvPr id="32" name="Text 30"/>
-          <p:cNvSpPr/>
-          <p:nvPr/>
-        </p:nvSpPr>
-        <p:spPr>
-          <a:xfrm>
-            <a:off x="502920" y="4069080"/>
-            <a:ext cx="493776" cy="320040"/>
-          </a:xfrm>
-          <a:prstGeom prst="rect">
-            <a:avLst/>
-          </a:prstGeom>
-          <a:noFill/>
-          <a:ln/>
-        </p:spPr>
-        <p:txBody>
-          <a:bodyPr wrap="square" rtlCol="0" anchor="ctr"/>
-          <a:lstStyle/>
-          <a:p>
-            <a:pPr algn="ctr" indent="0" marL="0">
-              <a:buNone/>
-            </a:pPr>
-            <a:r>
-              <a:rPr lang="en-US" sz="450" dirty="0">
-                <a:solidFill>
-                  <a:srgbClr val="C30A14"/>
-                </a:solidFill>
-                <a:latin typeface="Arial" pitchFamily="34" charset="0"/>
-                <a:ea typeface="Arial" pitchFamily="34" charset="-122"/>
-                <a:cs typeface="Arial" pitchFamily="34" charset="-120"/>
-              </a:rPr>
-              <a:t>🏠 Home</a:t>
-            </a:r>
-            <a:endParaRPr lang="en-US" sz="450" dirty="0"/>
-          </a:p>
-        </p:txBody>
-      </p:sp>
-      <p:sp>
-        <p:nvSpPr>
-          <p:cNvPr id="33" name="Text 31"/>
-          <p:cNvSpPr/>
-          <p:nvPr/>
-        </p:nvSpPr>
-        <p:spPr>
-          <a:xfrm>
-            <a:off x="996696" y="4069080"/>
-            <a:ext cx="493776" cy="320040"/>
-          </a:xfrm>
-          <a:prstGeom prst="rect">
-            <a:avLst/>
-          </a:prstGeom>
-          <a:noFill/>
-          <a:ln/>
-        </p:spPr>
-        <p:txBody>
-          <a:bodyPr wrap="square" rtlCol="0" anchor="ctr"/>
-          <a:lstStyle/>
-          <a:p>
-            <a:pPr algn="ctr" indent="0" marL="0">
-              <a:buNone/>
-            </a:pPr>
-            <a:r>
-              <a:rPr lang="en-US" sz="450" dirty="0">
-                <a:solidFill>
-                  <a:srgbClr val="888888"/>
-                </a:solidFill>
-                <a:latin typeface="Arial" pitchFamily="34" charset="0"/>
-                <a:ea typeface="Arial" pitchFamily="34" charset="-122"/>
-                <a:cs typeface="Arial" pitchFamily="34" charset="-120"/>
-              </a:rPr>
-              <a:t>🔴 Urgenze</a:t>
-            </a:r>
-            <a:endParaRPr lang="en-US" sz="450" dirty="0"/>
-          </a:p>
-        </p:txBody>
-      </p:sp>
-      <p:sp>
-        <p:nvSpPr>
-          <p:cNvPr id="34" name="Text 32"/>
-          <p:cNvSpPr/>
-          <p:nvPr/>
-        </p:nvSpPr>
-        <p:spPr>
-          <a:xfrm>
-            <a:off x="1490472" y="4069080"/>
-            <a:ext cx="493776" cy="320040"/>
-          </a:xfrm>
-          <a:prstGeom prst="rect">
-            <a:avLst/>
-          </a:prstGeom>
-          <a:noFill/>
-          <a:ln/>
-        </p:spPr>
-        <p:txBody>
-          <a:bodyPr wrap="square" rtlCol="0" anchor="ctr"/>
-          <a:lstStyle/>
-          <a:p>
-            <a:pPr algn="ctr" indent="0" marL="0">
-              <a:buNone/>
-            </a:pPr>
-            <a:r>
-              <a:rPr lang="en-US" sz="450" dirty="0">
-                <a:solidFill>
-                  <a:srgbClr val="888888"/>
-                </a:solidFill>
-                <a:latin typeface="Arial" pitchFamily="34" charset="0"/>
-                <a:ea typeface="Arial" pitchFamily="34" charset="-122"/>
-                <a:cs typeface="Arial" pitchFamily="34" charset="-120"/>
-              </a:rPr>
-              <a:t>📋 Piano</a:t>
-            </a:r>
-            <a:endParaRPr lang="en-US" sz="450" dirty="0"/>
-          </a:p>
-        </p:txBody>
-      </p:sp>
-      <p:sp>
-        <p:nvSpPr>
-          <p:cNvPr id="35" name="Text 33"/>
-          <p:cNvSpPr/>
-          <p:nvPr/>
-        </p:nvSpPr>
-        <p:spPr>
-          <a:xfrm>
-            <a:off x="1984248" y="4069080"/>
-            <a:ext cx="493776" cy="320040"/>
-          </a:xfrm>
-          <a:prstGeom prst="rect">
-            <a:avLst/>
-          </a:prstGeom>
-          <a:noFill/>
-          <a:ln/>
-        </p:spPr>
-        <p:txBody>
-          <a:bodyPr wrap="square" rtlCol="0" anchor="ctr"/>
-          <a:lstStyle/>
-          <a:p>
-            <a:pPr algn="ctr" indent="0" marL="0">
-              <a:buNone/>
-            </a:pPr>
-            <a:r>
-              <a:rPr lang="en-US" sz="450" dirty="0">
-                <a:solidFill>
-                  <a:srgbClr val="888888"/>
-                </a:solidFill>
-                <a:latin typeface="Arial" pitchFamily="34" charset="0"/>
-                <a:ea typeface="Arial" pitchFamily="34" charset="-122"/>
-                <a:cs typeface="Arial" pitchFamily="34" charset="-120"/>
-              </a:rPr>
-              <a:t>💬 Chat</a:t>
-            </a:r>
-            <a:endParaRPr lang="en-US" sz="450" dirty="0"/>
-          </a:p>
-        </p:txBody>
-      </p:sp>
-      <p:sp>
-        <p:nvSpPr>
-          <p:cNvPr id="36" name="Text 34"/>
-          <p:cNvSpPr/>
-          <p:nvPr/>
-        </p:nvSpPr>
-        <p:spPr>
-          <a:xfrm>
-            <a:off x="2478024" y="4069080"/>
-            <a:ext cx="493776" cy="320040"/>
-          </a:xfrm>
-          <a:prstGeom prst="rect">
-            <a:avLst/>
-          </a:prstGeom>
-          <a:noFill/>
-          <a:ln/>
-        </p:spPr>
-        <p:txBody>
-          <a:bodyPr wrap="square" rtlCol="0" anchor="ctr"/>
-          <a:lstStyle/>
-          <a:p>
-            <a:pPr algn="ctr" indent="0" marL="0">
-              <a:buNone/>
-            </a:pPr>
-            <a:r>
-              <a:rPr lang="en-US" sz="450" dirty="0">
-                <a:solidFill>
-                  <a:srgbClr val="888888"/>
-                </a:solidFill>
-                <a:latin typeface="Arial" pitchFamily="34" charset="0"/>
-                <a:ea typeface="Arial" pitchFamily="34" charset="-122"/>
-                <a:cs typeface="Arial" pitchFamily="34" charset="-120"/>
-              </a:rPr>
-              <a:t>👤 Profilo</a:t>
-            </a:r>
-            <a:endParaRPr lang="en-US" sz="450" dirty="0"/>
-          </a:p>
-        </p:txBody>
-      </p:sp>
-      <p:sp>
-        <p:nvSpPr>
-          <p:cNvPr id="37" name="Text 35"/>
+            <a:ext cx="1645920" cy="3557016"/>
+          </a:xfrm>
+          <a:prstGeom prst="rect">
+            <a:avLst/>
+          </a:prstGeom>
+        </p:spPr>
+      </p:pic>
+      <p:sp>
+        <p:nvSpPr>
+          <p:cNvPr id="6" name="Text 3"/>
           <p:cNvSpPr/>
           <p:nvPr/>
         </p:nvSpPr>
@@ -5812,7 +4857,7 @@
       </p:sp>
       <p:sp>
         <p:nvSpPr>
-          <p:cNvPr id="38" name="Shape 36"/>
+          <p:cNvPr id="7" name="Shape 4"/>
           <p:cNvSpPr/>
           <p:nvPr/>
         </p:nvSpPr>
@@ -5832,7 +4877,7 @@
       </p:sp>
       <p:sp>
         <p:nvSpPr>
-          <p:cNvPr id="39" name="Text 37"/>
+          <p:cNvPr id="8" name="Text 5"/>
           <p:cNvSpPr/>
           <p:nvPr/>
         </p:nvSpPr>
@@ -5871,7 +4916,7 @@
       </p:sp>
       <p:sp>
         <p:nvSpPr>
-          <p:cNvPr id="40" name="Text 38"/>
+          <p:cNvPr id="9" name="Text 6"/>
           <p:cNvSpPr/>
           <p:nvPr/>
         </p:nvSpPr>
@@ -5910,7 +4955,7 @@
       </p:sp>
       <p:sp>
         <p:nvSpPr>
-          <p:cNvPr id="41" name="Text 39"/>
+          <p:cNvPr id="10" name="Text 7"/>
           <p:cNvSpPr/>
           <p:nvPr/>
         </p:nvSpPr>
@@ -5949,7 +4994,7 @@
       </p:sp>
       <p:sp>
         <p:nvSpPr>
-          <p:cNvPr id="42" name="Shape 40"/>
+          <p:cNvPr id="11" name="Shape 8"/>
           <p:cNvSpPr/>
           <p:nvPr/>
         </p:nvSpPr>
@@ -5969,7 +5014,7 @@
       </p:sp>
       <p:sp>
         <p:nvSpPr>
-          <p:cNvPr id="43" name="Text 41"/>
+          <p:cNvPr id="12" name="Text 9"/>
           <p:cNvSpPr/>
           <p:nvPr/>
         </p:nvSpPr>
@@ -6008,7 +5053,7 @@
       </p:sp>
       <p:sp>
         <p:nvSpPr>
-          <p:cNvPr id="44" name="Text 42"/>
+          <p:cNvPr id="13" name="Text 10"/>
           <p:cNvSpPr/>
           <p:nvPr/>
         </p:nvSpPr>
@@ -6047,7 +5092,7 @@
       </p:sp>
       <p:sp>
         <p:nvSpPr>
-          <p:cNvPr id="45" name="Text 43"/>
+          <p:cNvPr id="14" name="Text 11"/>
           <p:cNvSpPr/>
           <p:nvPr/>
         </p:nvSpPr>
@@ -6086,7 +5131,7 @@
       </p:sp>
       <p:sp>
         <p:nvSpPr>
-          <p:cNvPr id="46" name="Shape 44"/>
+          <p:cNvPr id="15" name="Shape 12"/>
           <p:cNvSpPr/>
           <p:nvPr/>
         </p:nvSpPr>
@@ -6106,7 +5151,7 @@
       </p:sp>
       <p:sp>
         <p:nvSpPr>
-          <p:cNvPr id="47" name="Text 45"/>
+          <p:cNvPr id="16" name="Text 13"/>
           <p:cNvSpPr/>
           <p:nvPr/>
         </p:nvSpPr>
@@ -6145,7 +5190,7 @@
       </p:sp>
       <p:sp>
         <p:nvSpPr>
-          <p:cNvPr id="48" name="Text 46"/>
+          <p:cNvPr id="17" name="Text 14"/>
           <p:cNvSpPr/>
           <p:nvPr/>
         </p:nvSpPr>
@@ -6184,7 +5229,7 @@
       </p:sp>
       <p:sp>
         <p:nvSpPr>
-          <p:cNvPr id="49" name="Text 47"/>
+          <p:cNvPr id="18" name="Text 15"/>
           <p:cNvSpPr/>
           <p:nvPr/>
         </p:nvSpPr>
@@ -6223,7 +5268,7 @@
       </p:sp>
       <p:sp>
         <p:nvSpPr>
-          <p:cNvPr id="50" name="Shape 48"/>
+          <p:cNvPr id="19" name="Shape 16"/>
           <p:cNvSpPr/>
           <p:nvPr/>
         </p:nvSpPr>
@@ -6243,7 +5288,7 @@
       </p:sp>
       <p:sp>
         <p:nvSpPr>
-          <p:cNvPr id="51" name="Text 49"/>
+          <p:cNvPr id="20" name="Text 17"/>
           <p:cNvSpPr/>
           <p:nvPr/>
         </p:nvSpPr>
@@ -6282,7 +5327,7 @@
       </p:sp>
       <p:sp>
         <p:nvSpPr>
-          <p:cNvPr id="52" name="Text 50"/>
+          <p:cNvPr id="21" name="Text 18"/>
           <p:cNvSpPr/>
           <p:nvPr/>
         </p:nvSpPr>
@@ -6321,7 +5366,7 @@
       </p:sp>
       <p:sp>
         <p:nvSpPr>
-          <p:cNvPr id="53" name="Text 51"/>
+          <p:cNvPr id="22" name="Text 19"/>
           <p:cNvSpPr/>
           <p:nvPr/>
         </p:nvSpPr>
@@ -6360,7 +5405,7 @@
       </p:sp>
       <p:sp>
         <p:nvSpPr>
-          <p:cNvPr id="54" name="Shape 52"/>
+          <p:cNvPr id="23" name="Shape 20"/>
           <p:cNvSpPr/>
           <p:nvPr/>
         </p:nvSpPr>
@@ -6380,7 +5425,7 @@
       </p:sp>
       <p:sp>
         <p:nvSpPr>
-          <p:cNvPr id="55" name="Text 53"/>
+          <p:cNvPr id="24" name="Text 21"/>
           <p:cNvSpPr/>
           <p:nvPr/>
         </p:nvSpPr>
@@ -6419,7 +5464,7 @@
       </p:sp>
       <p:sp>
         <p:nvSpPr>
-          <p:cNvPr id="56" name="Text 54"/>
+          <p:cNvPr id="25" name="Text 22"/>
           <p:cNvSpPr/>
           <p:nvPr/>
         </p:nvSpPr>
@@ -6458,7 +5503,7 @@
       </p:sp>
       <p:sp>
         <p:nvSpPr>
-          <p:cNvPr id="57" name="Text 55"/>
+          <p:cNvPr id="26" name="Text 23"/>
           <p:cNvSpPr/>
           <p:nvPr/>
         </p:nvSpPr>
@@ -6497,7 +5542,7 @@
       </p:sp>
       <p:sp>
         <p:nvSpPr>
-          <p:cNvPr id="58" name="Shape 56"/>
+          <p:cNvPr id="27" name="Shape 24"/>
           <p:cNvSpPr/>
           <p:nvPr/>
         </p:nvSpPr>
@@ -6517,7 +5562,7 @@
       </p:sp>
       <p:sp>
         <p:nvSpPr>
-          <p:cNvPr id="59" name="Text 57"/>
+          <p:cNvPr id="28" name="Text 25"/>
           <p:cNvSpPr/>
           <p:nvPr/>
         </p:nvSpPr>
@@ -6556,7 +5601,7 @@
       </p:sp>
       <p:sp>
         <p:nvSpPr>
-          <p:cNvPr id="60" name="Text 58"/>
+          <p:cNvPr id="29" name="Text 26"/>
           <p:cNvSpPr/>
           <p:nvPr/>
         </p:nvSpPr>
@@ -6595,7 +5640,7 @@
       </p:sp>
       <p:sp>
         <p:nvSpPr>
-          <p:cNvPr id="61" name="Text 59"/>
+          <p:cNvPr id="30" name="Text 27"/>
           <p:cNvSpPr/>
           <p:nvPr/>
         </p:nvSpPr>
@@ -6634,7 +5679,7 @@
       </p:sp>
       <p:sp>
         <p:nvSpPr>
-          <p:cNvPr id="62" name="Shape 60"/>
+          <p:cNvPr id="31" name="Shape 28"/>
           <p:cNvSpPr/>
           <p:nvPr/>
         </p:nvSpPr>
@@ -6654,7 +5699,7 @@
       </p:sp>
       <p:sp>
         <p:nvSpPr>
-          <p:cNvPr id="63" name="Text 61"/>
+          <p:cNvPr id="32" name="Text 29"/>
           <p:cNvSpPr/>
           <p:nvPr/>
         </p:nvSpPr>
@@ -6693,7 +5738,7 @@
       </p:sp>
       <p:sp>
         <p:nvSpPr>
-          <p:cNvPr id="64" name="Text 62"/>
+          <p:cNvPr id="33" name="Text 30"/>
           <p:cNvSpPr/>
           <p:nvPr/>
         </p:nvSpPr>
@@ -6732,7 +5777,7 @@
       </p:sp>
       <p:sp>
         <p:nvSpPr>
-          <p:cNvPr id="65" name="Text 63"/>
+          <p:cNvPr id="34" name="Text 31"/>
           <p:cNvSpPr/>
           <p:nvPr/>
         </p:nvSpPr>
@@ -6771,7 +5816,7 @@
       </p:sp>
       <p:sp>
         <p:nvSpPr>
-          <p:cNvPr id="66" name="Shape 64"/>
+          <p:cNvPr id="35" name="Shape 32"/>
           <p:cNvSpPr/>
           <p:nvPr/>
         </p:nvSpPr>
@@ -6791,7 +5836,7 @@
       </p:sp>
       <p:sp>
         <p:nvSpPr>
-          <p:cNvPr id="67" name="Text 65"/>
+          <p:cNvPr id="36" name="Text 33"/>
           <p:cNvSpPr/>
           <p:nvPr/>
         </p:nvSpPr>
@@ -6830,7 +5875,7 @@
       </p:sp>
       <p:sp>
         <p:nvSpPr>
-          <p:cNvPr id="68" name="Text 66"/>
+          <p:cNvPr id="37" name="Text 34"/>
           <p:cNvSpPr/>
           <p:nvPr/>
         </p:nvSpPr>
@@ -6869,7 +5914,7 @@
       </p:sp>
       <p:sp>
         <p:nvSpPr>
-          <p:cNvPr id="69" name="Text 67"/>
+          <p:cNvPr id="38" name="Text 35"/>
           <p:cNvSpPr/>
           <p:nvPr/>
         </p:nvSpPr>
@@ -6908,7 +5953,7 @@
       </p:sp>
       <p:sp>
         <p:nvSpPr>
-          <p:cNvPr id="70" name="Text 68"/>
+          <p:cNvPr id="39" name="Text 36"/>
           <p:cNvSpPr/>
           <p:nvPr/>
         </p:nvSpPr>
@@ -9117,22 +8162,709 @@
           </a:p>
         </p:txBody>
       </p:sp>
-      <p:sp>
-        <p:nvSpPr>
-          <p:cNvPr id="5" name="Shape 3"/>
-          <p:cNvSpPr/>
-          <p:nvPr/>
-        </p:nvSpPr>
+      <p:pic>
+        <p:nvPicPr>
+          <p:cNvPr id="5" name="Image 0" descr="/sessions/brave-peaceful-lovelace/mockups/telegram_chat.png">    </p:cNvPr>
+          <p:cNvPicPr>
+            <a:picLocks noChangeAspect="1"/>
+          </p:cNvPicPr>
+          <p:nvPr/>
+        </p:nvPicPr>
+        <p:blipFill>
+          <a:blip r:embed="rId1"/>
+          <a:stretch>
+            <a:fillRect/>
+          </a:stretch>
+        </p:blipFill>
         <p:spPr>
           <a:xfrm>
             <a:off x="274320" y="822960"/>
-            <a:ext cx="4572000" cy="3200400"/>
-          </a:xfrm>
-          <a:prstGeom prst="rect">
-            <a:avLst/>
-          </a:prstGeom>
-          <a:solidFill>
-            <a:srgbClr val="0E1621"/>
+            <a:ext cx="1828800" cy="3200400"/>
+          </a:xfrm>
+          <a:prstGeom prst="rect">
+            <a:avLst/>
+          </a:prstGeom>
+        </p:spPr>
+      </p:pic>
+      <p:sp>
+        <p:nvSpPr>
+          <p:cNvPr id="6" name="Text 3"/>
+          <p:cNvSpPr/>
+          <p:nvPr/>
+        </p:nvSpPr>
+        <p:spPr>
+          <a:xfrm>
+            <a:off x="2377440" y="822960"/>
+            <a:ext cx="6400800" cy="320040"/>
+          </a:xfrm>
+          <a:prstGeom prst="rect">
+            <a:avLst/>
+          </a:prstGeom>
+          <a:noFill/>
+          <a:ln/>
+        </p:spPr>
+        <p:txBody>
+          <a:bodyPr wrap="square" lIns="0" tIns="0" rIns="0" bIns="0" rtlCol="0" anchor="ctr"/>
+          <a:lstStyle/>
+          <a:p>
+            <a:pPr indent="0" marL="0">
+              <a:buNone/>
+            </a:pPr>
+            <a:r>
+              <a:rPr lang="en-US" sz="1400" b="1" dirty="0">
+                <a:solidFill>
+                  <a:srgbClr val="FFFFFF"/>
+                </a:solidFill>
+                <a:latin typeface="Arial" pitchFamily="34" charset="0"/>
+                <a:ea typeface="Arial" pitchFamily="34" charset="-122"/>
+                <a:cs typeface="Arial" pitchFamily="34" charset="-120"/>
+              </a:rPr>
+              <a:t>Comandi</a:t>
+            </a:r>
+            <a:endParaRPr lang="en-US" sz="1400" dirty="0"/>
+          </a:p>
+        </p:txBody>
+      </p:sp>
+      <p:sp>
+        <p:nvSpPr>
+          <p:cNvPr id="7" name="Text 4"/>
+          <p:cNvSpPr/>
+          <p:nvPr/>
+        </p:nvSpPr>
+        <p:spPr>
+          <a:xfrm>
+            <a:off x="2377440" y="1234440"/>
+            <a:ext cx="1371600" cy="246888"/>
+          </a:xfrm>
+          <a:prstGeom prst="rect">
+            <a:avLst/>
+          </a:prstGeom>
+          <a:noFill/>
+          <a:ln/>
+        </p:spPr>
+        <p:txBody>
+          <a:bodyPr wrap="square" lIns="0" tIns="0" rIns="0" bIns="0" rtlCol="0" anchor="ctr"/>
+          <a:lstStyle/>
+          <a:p>
+            <a:pPr indent="0" marL="0">
+              <a:buNone/>
+            </a:pPr>
+            <a:r>
+              <a:rPr lang="en-US" sz="900" b="1" dirty="0">
+                <a:solidFill>
+                  <a:srgbClr val="C30A14"/>
+                </a:solidFill>
+                <a:latin typeface="Courier New" pitchFamily="34" charset="0"/>
+                <a:ea typeface="Courier New" pitchFamily="34" charset="-122"/>
+                <a:cs typeface="Courier New" pitchFamily="34" charset="-120"/>
+              </a:rPr>
+              <a:t>/vado</a:t>
+            </a:r>
+            <a:endParaRPr lang="en-US" sz="900" dirty="0"/>
+          </a:p>
+        </p:txBody>
+      </p:sp>
+      <p:sp>
+        <p:nvSpPr>
+          <p:cNvPr id="8" name="Text 5"/>
+          <p:cNvSpPr/>
+          <p:nvPr/>
+        </p:nvSpPr>
+        <p:spPr>
+          <a:xfrm>
+            <a:off x="3931920" y="1234440"/>
+            <a:ext cx="4663440" cy="246888"/>
+          </a:xfrm>
+          <a:prstGeom prst="rect">
+            <a:avLst/>
+          </a:prstGeom>
+          <a:noFill/>
+          <a:ln/>
+        </p:spPr>
+        <p:txBody>
+          <a:bodyPr wrap="square" lIns="0" tIns="0" rIns="0" bIns="0" rtlCol="0" anchor="ctr"/>
+          <a:lstStyle/>
+          <a:p>
+            <a:pPr indent="0" marL="0">
+              <a:buNone/>
+            </a:pPr>
+            <a:r>
+              <a:rPr lang="en-US" sz="800" dirty="0">
+                <a:solidFill>
+                  <a:srgbClr val="CCCCCC"/>
+                </a:solidFill>
+                <a:latin typeface="Arial" pitchFamily="34" charset="0"/>
+                <a:ea typeface="Arial" pitchFamily="34" charset="-122"/>
+                <a:cs typeface="Arial" pitchFamily="34" charset="-120"/>
+              </a:rPr>
+              <a:t>Mostra urgenze, prendi con /vado N</a:t>
+            </a:r>
+            <a:endParaRPr lang="en-US" sz="800" dirty="0"/>
+          </a:p>
+        </p:txBody>
+      </p:sp>
+      <p:sp>
+        <p:nvSpPr>
+          <p:cNvPr id="9" name="Text 6"/>
+          <p:cNvSpPr/>
+          <p:nvPr/>
+        </p:nvSpPr>
+        <p:spPr>
+          <a:xfrm>
+            <a:off x="2377440" y="1508760"/>
+            <a:ext cx="1371600" cy="246888"/>
+          </a:xfrm>
+          <a:prstGeom prst="rect">
+            <a:avLst/>
+          </a:prstGeom>
+          <a:noFill/>
+          <a:ln/>
+        </p:spPr>
+        <p:txBody>
+          <a:bodyPr wrap="square" lIns="0" tIns="0" rIns="0" bIns="0" rtlCol="0" anchor="ctr"/>
+          <a:lstStyle/>
+          <a:p>
+            <a:pPr indent="0" marL="0">
+              <a:buNone/>
+            </a:pPr>
+            <a:r>
+              <a:rPr lang="en-US" sz="900" b="1" dirty="0">
+                <a:solidFill>
+                  <a:srgbClr val="F7B731"/>
+                </a:solidFill>
+                <a:latin typeface="Courier New" pitchFamily="34" charset="0"/>
+                <a:ea typeface="Courier New" pitchFamily="34" charset="-122"/>
+                <a:cs typeface="Courier New" pitchFamily="34" charset="-120"/>
+              </a:rPr>
+              <a:t>/incorso</a:t>
+            </a:r>
+            <a:endParaRPr lang="en-US" sz="900" dirty="0"/>
+          </a:p>
+        </p:txBody>
+      </p:sp>
+      <p:sp>
+        <p:nvSpPr>
+          <p:cNvPr id="10" name="Text 7"/>
+          <p:cNvSpPr/>
+          <p:nvPr/>
+        </p:nvSpPr>
+        <p:spPr>
+          <a:xfrm>
+            <a:off x="3931920" y="1508760"/>
+            <a:ext cx="4663440" cy="246888"/>
+          </a:xfrm>
+          <a:prstGeom prst="rect">
+            <a:avLst/>
+          </a:prstGeom>
+          <a:noFill/>
+          <a:ln/>
+        </p:spPr>
+        <p:txBody>
+          <a:bodyPr wrap="square" lIns="0" tIns="0" rIns="0" bIns="0" rtlCol="0" anchor="ctr"/>
+          <a:lstStyle/>
+          <a:p>
+            <a:pPr indent="0" marL="0">
+              <a:buNone/>
+            </a:pPr>
+            <a:r>
+              <a:rPr lang="en-US" sz="800" dirty="0">
+                <a:solidFill>
+                  <a:srgbClr val="CCCCCC"/>
+                </a:solidFill>
+                <a:latin typeface="Arial" pitchFamily="34" charset="0"/>
+                <a:ea typeface="Arial" pitchFamily="34" charset="-122"/>
+                <a:cs typeface="Arial" pitchFamily="34" charset="-120"/>
+              </a:rPr>
+              <a:t>Segna urgenza in corso</a:t>
+            </a:r>
+            <a:endParaRPr lang="en-US" sz="800" dirty="0"/>
+          </a:p>
+        </p:txBody>
+      </p:sp>
+      <p:sp>
+        <p:nvSpPr>
+          <p:cNvPr id="11" name="Text 8"/>
+          <p:cNvSpPr/>
+          <p:nvPr/>
+        </p:nvSpPr>
+        <p:spPr>
+          <a:xfrm>
+            <a:off x="2377440" y="1783080"/>
+            <a:ext cx="1371600" cy="246888"/>
+          </a:xfrm>
+          <a:prstGeom prst="rect">
+            <a:avLst/>
+          </a:prstGeom>
+          <a:noFill/>
+          <a:ln/>
+        </p:spPr>
+        <p:txBody>
+          <a:bodyPr wrap="square" lIns="0" tIns="0" rIns="0" bIns="0" rtlCol="0" anchor="ctr"/>
+          <a:lstStyle/>
+          <a:p>
+            <a:pPr indent="0" marL="0">
+              <a:buNone/>
+            </a:pPr>
+            <a:r>
+              <a:rPr lang="en-US" sz="900" b="1" dirty="0">
+                <a:solidFill>
+                  <a:srgbClr val="34D058"/>
+                </a:solidFill>
+                <a:latin typeface="Courier New" pitchFamily="34" charset="0"/>
+                <a:ea typeface="Courier New" pitchFamily="34" charset="-122"/>
+                <a:cs typeface="Courier New" pitchFamily="34" charset="-120"/>
+              </a:rPr>
+              <a:t>/risolto</a:t>
+            </a:r>
+            <a:endParaRPr lang="en-US" sz="900" dirty="0"/>
+          </a:p>
+        </p:txBody>
+      </p:sp>
+      <p:sp>
+        <p:nvSpPr>
+          <p:cNvPr id="12" name="Text 9"/>
+          <p:cNvSpPr/>
+          <p:nvPr/>
+        </p:nvSpPr>
+        <p:spPr>
+          <a:xfrm>
+            <a:off x="3931920" y="1783080"/>
+            <a:ext cx="4663440" cy="246888"/>
+          </a:xfrm>
+          <a:prstGeom prst="rect">
+            <a:avLst/>
+          </a:prstGeom>
+          <a:noFill/>
+          <a:ln/>
+        </p:spPr>
+        <p:txBody>
+          <a:bodyPr wrap="square" lIns="0" tIns="0" rIns="0" bIns="0" rtlCol="0" anchor="ctr"/>
+          <a:lstStyle/>
+          <a:p>
+            <a:pPr indent="0" marL="0">
+              <a:buNone/>
+            </a:pPr>
+            <a:r>
+              <a:rPr lang="en-US" sz="800" dirty="0">
+                <a:solidFill>
+                  <a:srgbClr val="CCCCCC"/>
+                </a:solidFill>
+                <a:latin typeface="Arial" pitchFamily="34" charset="0"/>
+                <a:ea typeface="Arial" pitchFamily="34" charset="-122"/>
+                <a:cs typeface="Arial" pitchFamily="34" charset="-120"/>
+              </a:rPr>
+              <a:t>Chiudi urgenza con note</a:t>
+            </a:r>
+            <a:endParaRPr lang="en-US" sz="800" dirty="0"/>
+          </a:p>
+        </p:txBody>
+      </p:sp>
+      <p:sp>
+        <p:nvSpPr>
+          <p:cNvPr id="13" name="Text 10"/>
+          <p:cNvSpPr/>
+          <p:nvPr/>
+        </p:nvSpPr>
+        <p:spPr>
+          <a:xfrm>
+            <a:off x="2377440" y="2057400"/>
+            <a:ext cx="1371600" cy="246888"/>
+          </a:xfrm>
+          <a:prstGeom prst="rect">
+            <a:avLst/>
+          </a:prstGeom>
+          <a:noFill/>
+          <a:ln/>
+        </p:spPr>
+        <p:txBody>
+          <a:bodyPr wrap="square" lIns="0" tIns="0" rIns="0" bIns="0" rtlCol="0" anchor="ctr"/>
+          <a:lstStyle/>
+          <a:p>
+            <a:pPr indent="0" marL="0">
+              <a:buNone/>
+            </a:pPr>
+            <a:r>
+              <a:rPr lang="en-US" sz="900" b="1" dirty="0">
+                <a:solidFill>
+                  <a:srgbClr val="3B7EF7"/>
+                </a:solidFill>
+                <a:latin typeface="Courier New" pitchFamily="34" charset="0"/>
+                <a:ea typeface="Courier New" pitchFamily="34" charset="-122"/>
+                <a:cs typeface="Courier New" pitchFamily="34" charset="-120"/>
+              </a:rPr>
+              <a:t>/stato</a:t>
+            </a:r>
+            <a:endParaRPr lang="en-US" sz="900" dirty="0"/>
+          </a:p>
+        </p:txBody>
+      </p:sp>
+      <p:sp>
+        <p:nvSpPr>
+          <p:cNvPr id="14" name="Text 11"/>
+          <p:cNvSpPr/>
+          <p:nvPr/>
+        </p:nvSpPr>
+        <p:spPr>
+          <a:xfrm>
+            <a:off x="3931920" y="2057400"/>
+            <a:ext cx="4663440" cy="246888"/>
+          </a:xfrm>
+          <a:prstGeom prst="rect">
+            <a:avLst/>
+          </a:prstGeom>
+          <a:noFill/>
+          <a:ln/>
+        </p:spPr>
+        <p:txBody>
+          <a:bodyPr wrap="square" lIns="0" tIns="0" rIns="0" bIns="0" rtlCol="0" anchor="ctr"/>
+          <a:lstStyle/>
+          <a:p>
+            <a:pPr indent="0" marL="0">
+              <a:buNone/>
+            </a:pPr>
+            <a:r>
+              <a:rPr lang="en-US" sz="800" dirty="0">
+                <a:solidFill>
+                  <a:srgbClr val="CCCCCC"/>
+                </a:solidFill>
+                <a:latin typeface="Arial" pitchFamily="34" charset="0"/>
+                <a:ea typeface="Arial" pitchFamily="34" charset="-122"/>
+                <a:cs typeface="Arial" pitchFamily="34" charset="-120"/>
+              </a:rPr>
+              <a:t>Stato urgenze attive</a:t>
+            </a:r>
+            <a:endParaRPr lang="en-US" sz="800" dirty="0"/>
+          </a:p>
+        </p:txBody>
+      </p:sp>
+      <p:sp>
+        <p:nvSpPr>
+          <p:cNvPr id="15" name="Text 12"/>
+          <p:cNvSpPr/>
+          <p:nvPr/>
+        </p:nvSpPr>
+        <p:spPr>
+          <a:xfrm>
+            <a:off x="2377440" y="2331720"/>
+            <a:ext cx="1371600" cy="246888"/>
+          </a:xfrm>
+          <a:prstGeom prst="rect">
+            <a:avLst/>
+          </a:prstGeom>
+          <a:noFill/>
+          <a:ln/>
+        </p:spPr>
+        <p:txBody>
+          <a:bodyPr wrap="square" lIns="0" tIns="0" rIns="0" bIns="0" rtlCol="0" anchor="ctr"/>
+          <a:lstStyle/>
+          <a:p>
+            <a:pPr indent="0" marL="0">
+              <a:buNone/>
+            </a:pPr>
+            <a:r>
+              <a:rPr lang="en-US" sz="900" b="1" dirty="0">
+                <a:solidFill>
+                  <a:srgbClr val="17C0EB"/>
+                </a:solidFill>
+                <a:latin typeface="Courier New" pitchFamily="34" charset="0"/>
+                <a:ea typeface="Courier New" pitchFamily="34" charset="-122"/>
+                <a:cs typeface="Courier New" pitchFamily="34" charset="-120"/>
+              </a:rPr>
+              <a:t>/oggi</a:t>
+            </a:r>
+            <a:endParaRPr lang="en-US" sz="900" dirty="0"/>
+          </a:p>
+        </p:txBody>
+      </p:sp>
+      <p:sp>
+        <p:nvSpPr>
+          <p:cNvPr id="16" name="Text 13"/>
+          <p:cNvSpPr/>
+          <p:nvPr/>
+        </p:nvSpPr>
+        <p:spPr>
+          <a:xfrm>
+            <a:off x="3931920" y="2331720"/>
+            <a:ext cx="4663440" cy="246888"/>
+          </a:xfrm>
+          <a:prstGeom prst="rect">
+            <a:avLst/>
+          </a:prstGeom>
+          <a:noFill/>
+          <a:ln/>
+        </p:spPr>
+        <p:txBody>
+          <a:bodyPr wrap="square" lIns="0" tIns="0" rIns="0" bIns="0" rtlCol="0" anchor="ctr"/>
+          <a:lstStyle/>
+          <a:p>
+            <a:pPr indent="0" marL="0">
+              <a:buNone/>
+            </a:pPr>
+            <a:r>
+              <a:rPr lang="en-US" sz="800" dirty="0">
+                <a:solidFill>
+                  <a:srgbClr val="CCCCCC"/>
+                </a:solidFill>
+                <a:latin typeface="Arial" pitchFamily="34" charset="0"/>
+                <a:ea typeface="Arial" pitchFamily="34" charset="-122"/>
+                <a:cs typeface="Arial" pitchFamily="34" charset="-120"/>
+              </a:rPr>
+              <a:t>Piano interventi di oggi</a:t>
+            </a:r>
+            <a:endParaRPr lang="en-US" sz="800" dirty="0"/>
+          </a:p>
+        </p:txBody>
+      </p:sp>
+      <p:sp>
+        <p:nvSpPr>
+          <p:cNvPr id="17" name="Text 14"/>
+          <p:cNvSpPr/>
+          <p:nvPr/>
+        </p:nvSpPr>
+        <p:spPr>
+          <a:xfrm>
+            <a:off x="2377440" y="2606040"/>
+            <a:ext cx="1371600" cy="246888"/>
+          </a:xfrm>
+          <a:prstGeom prst="rect">
+            <a:avLst/>
+          </a:prstGeom>
+          <a:noFill/>
+          <a:ln/>
+        </p:spPr>
+        <p:txBody>
+          <a:bodyPr wrap="square" lIns="0" tIns="0" rIns="0" bIns="0" rtlCol="0" anchor="ctr"/>
+          <a:lstStyle/>
+          <a:p>
+            <a:pPr indent="0" marL="0">
+              <a:buNone/>
+            </a:pPr>
+            <a:r>
+              <a:rPr lang="en-US" sz="900" b="1" dirty="0">
+                <a:solidFill>
+                  <a:srgbClr val="8854D0"/>
+                </a:solidFill>
+                <a:latin typeface="Courier New" pitchFamily="34" charset="0"/>
+                <a:ea typeface="Courier New" pitchFamily="34" charset="-122"/>
+                <a:cs typeface="Courier New" pitchFamily="34" charset="-120"/>
+              </a:rPr>
+              <a:t>/settimana</a:t>
+            </a:r>
+            <a:endParaRPr lang="en-US" sz="900" dirty="0"/>
+          </a:p>
+        </p:txBody>
+      </p:sp>
+      <p:sp>
+        <p:nvSpPr>
+          <p:cNvPr id="18" name="Text 15"/>
+          <p:cNvSpPr/>
+          <p:nvPr/>
+        </p:nvSpPr>
+        <p:spPr>
+          <a:xfrm>
+            <a:off x="3931920" y="2606040"/>
+            <a:ext cx="4663440" cy="246888"/>
+          </a:xfrm>
+          <a:prstGeom prst="rect">
+            <a:avLst/>
+          </a:prstGeom>
+          <a:noFill/>
+          <a:ln/>
+        </p:spPr>
+        <p:txBody>
+          <a:bodyPr wrap="square" lIns="0" tIns="0" rIns="0" bIns="0" rtlCol="0" anchor="ctr"/>
+          <a:lstStyle/>
+          <a:p>
+            <a:pPr indent="0" marL="0">
+              <a:buNone/>
+            </a:pPr>
+            <a:r>
+              <a:rPr lang="en-US" sz="800" dirty="0">
+                <a:solidFill>
+                  <a:srgbClr val="CCCCCC"/>
+                </a:solidFill>
+                <a:latin typeface="Arial" pitchFamily="34" charset="0"/>
+                <a:ea typeface="Arial" pitchFamily="34" charset="-122"/>
+                <a:cs typeface="Arial" pitchFamily="34" charset="-120"/>
+              </a:rPr>
+              <a:t>Piano settimanale</a:t>
+            </a:r>
+            <a:endParaRPr lang="en-US" sz="800" dirty="0"/>
+          </a:p>
+        </p:txBody>
+      </p:sp>
+      <p:sp>
+        <p:nvSpPr>
+          <p:cNvPr id="19" name="Text 16"/>
+          <p:cNvSpPr/>
+          <p:nvPr/>
+        </p:nvSpPr>
+        <p:spPr>
+          <a:xfrm>
+            <a:off x="2377440" y="2880360"/>
+            <a:ext cx="1371600" cy="246888"/>
+          </a:xfrm>
+          <a:prstGeom prst="rect">
+            <a:avLst/>
+          </a:prstGeom>
+          <a:noFill/>
+          <a:ln/>
+        </p:spPr>
+        <p:txBody>
+          <a:bodyPr wrap="square" lIns="0" tIns="0" rIns="0" bIns="0" rtlCol="0" anchor="ctr"/>
+          <a:lstStyle/>
+          <a:p>
+            <a:pPr indent="0" marL="0">
+              <a:buNone/>
+            </a:pPr>
+            <a:r>
+              <a:rPr lang="en-US" sz="900" b="1" dirty="0">
+                <a:solidFill>
+                  <a:srgbClr val="F7B731"/>
+                </a:solidFill>
+                <a:latin typeface="Courier New" pitchFamily="34" charset="0"/>
+                <a:ea typeface="Courier New" pitchFamily="34" charset="-122"/>
+                <a:cs typeface="Courier New" pitchFamily="34" charset="-120"/>
+              </a:rPr>
+              <a:t>/ordine</a:t>
+            </a:r>
+            <a:endParaRPr lang="en-US" sz="900" dirty="0"/>
+          </a:p>
+        </p:txBody>
+      </p:sp>
+      <p:sp>
+        <p:nvSpPr>
+          <p:cNvPr id="20" name="Text 17"/>
+          <p:cNvSpPr/>
+          <p:nvPr/>
+        </p:nvSpPr>
+        <p:spPr>
+          <a:xfrm>
+            <a:off x="3931920" y="2880360"/>
+            <a:ext cx="4663440" cy="246888"/>
+          </a:xfrm>
+          <a:prstGeom prst="rect">
+            <a:avLst/>
+          </a:prstGeom>
+          <a:noFill/>
+          <a:ln/>
+        </p:spPr>
+        <p:txBody>
+          <a:bodyPr wrap="square" lIns="0" tIns="0" rIns="0" bIns="0" rtlCol="0" anchor="ctr"/>
+          <a:lstStyle/>
+          <a:p>
+            <a:pPr indent="0" marL="0">
+              <a:buNone/>
+            </a:pPr>
+            <a:r>
+              <a:rPr lang="en-US" sz="800" dirty="0">
+                <a:solidFill>
+                  <a:srgbClr val="CCCCCC"/>
+                </a:solidFill>
+                <a:latin typeface="Arial" pitchFamily="34" charset="0"/>
+                <a:ea typeface="Arial" pitchFamily="34" charset="-122"/>
+                <a:cs typeface="Arial" pitchFamily="34" charset="-120"/>
+              </a:rPr>
+              <a:t>Crea ordine: /ordine cod qt cli</a:t>
+            </a:r>
+            <a:endParaRPr lang="en-US" sz="800" dirty="0"/>
+          </a:p>
+        </p:txBody>
+      </p:sp>
+      <p:sp>
+        <p:nvSpPr>
+          <p:cNvPr id="21" name="Text 18"/>
+          <p:cNvSpPr/>
+          <p:nvPr/>
+        </p:nvSpPr>
+        <p:spPr>
+          <a:xfrm>
+            <a:off x="2377440" y="3154680"/>
+            <a:ext cx="1371600" cy="246888"/>
+          </a:xfrm>
+          <a:prstGeom prst="rect">
+            <a:avLst/>
+          </a:prstGeom>
+          <a:noFill/>
+          <a:ln/>
+        </p:spPr>
+        <p:txBody>
+          <a:bodyPr wrap="square" lIns="0" tIns="0" rIns="0" bIns="0" rtlCol="0" anchor="ctr"/>
+          <a:lstStyle/>
+          <a:p>
+            <a:pPr indent="0" marL="0">
+              <a:buNone/>
+            </a:pPr>
+            <a:r>
+              <a:rPr lang="en-US" sz="900" b="1" dirty="0">
+                <a:solidFill>
+                  <a:srgbClr val="34D058"/>
+                </a:solidFill>
+                <a:latin typeface="Courier New" pitchFamily="34" charset="0"/>
+                <a:ea typeface="Courier New" pitchFamily="34" charset="-122"/>
+                <a:cs typeface="Courier New" pitchFamily="34" charset="-120"/>
+              </a:rPr>
+              <a:t>Foto/testo</a:t>
+            </a:r>
+            <a:endParaRPr lang="en-US" sz="900" dirty="0"/>
+          </a:p>
+        </p:txBody>
+      </p:sp>
+      <p:sp>
+        <p:nvSpPr>
+          <p:cNvPr id="22" name="Text 19"/>
+          <p:cNvSpPr/>
+          <p:nvPr/>
+        </p:nvSpPr>
+        <p:spPr>
+          <a:xfrm>
+            <a:off x="3931920" y="3154680"/>
+            <a:ext cx="4663440" cy="246888"/>
+          </a:xfrm>
+          <a:prstGeom prst="rect">
+            <a:avLst/>
+          </a:prstGeom>
+          <a:noFill/>
+          <a:ln/>
+        </p:spPr>
+        <p:txBody>
+          <a:bodyPr wrap="square" lIns="0" tIns="0" rIns="0" bIns="0" rtlCol="0" anchor="ctr"/>
+          <a:lstStyle/>
+          <a:p>
+            <a:pPr indent="0" marL="0">
+              <a:buNone/>
+            </a:pPr>
+            <a:r>
+              <a:rPr lang="en-US" sz="800" dirty="0">
+                <a:solidFill>
+                  <a:srgbClr val="CCCCCC"/>
+                </a:solidFill>
+                <a:latin typeface="Arial" pitchFamily="34" charset="0"/>
+                <a:ea typeface="Arial" pitchFamily="34" charset="-122"/>
+                <a:cs typeface="Arial" pitchFamily="34" charset="-120"/>
+              </a:rPr>
+              <a:t>AI Engine analizza e crea azione</a:t>
+            </a:r>
+            <a:endParaRPr lang="en-US" sz="800" dirty="0"/>
+          </a:p>
+        </p:txBody>
+      </p:sp>
+      <p:sp>
+        <p:nvSpPr>
+          <p:cNvPr id="23" name="Shape 20"/>
+          <p:cNvSpPr/>
+          <p:nvPr/>
+        </p:nvSpPr>
+        <p:spPr>
+          <a:xfrm>
+            <a:off x="274320" y="4206240"/>
+            <a:ext cx="8595360" cy="502920"/>
+          </a:xfrm>
+          <a:prstGeom prst="rect">
+            <a:avLst/>
+          </a:prstGeom>
+          <a:solidFill>
+            <a:srgbClr val="222222"/>
           </a:solidFill>
           <a:ln/>
           <a:effectLst>
@@ -9146,34 +8878,34 @@
       </p:sp>
       <p:sp>
         <p:nvSpPr>
-          <p:cNvPr id="6" name="Shape 4"/>
-          <p:cNvSpPr/>
-          <p:nvPr/>
-        </p:nvSpPr>
-        <p:spPr>
-          <a:xfrm>
-            <a:off x="274320" y="822960"/>
-            <a:ext cx="4572000" cy="320040"/>
-          </a:xfrm>
-          <a:prstGeom prst="rect">
-            <a:avLst/>
-          </a:prstGeom>
-          <a:solidFill>
-            <a:srgbClr val="1C2B3A"/>
-          </a:solidFill>
-          <a:ln/>
-        </p:spPr>
-      </p:sp>
-      <p:sp>
-        <p:nvSpPr>
-          <p:cNvPr id="7" name="Text 5"/>
-          <p:cNvSpPr/>
-          <p:nvPr/>
-        </p:nvSpPr>
-        <p:spPr>
-          <a:xfrm>
-            <a:off x="640080" y="850392"/>
-            <a:ext cx="2743200" cy="274320"/>
+          <p:cNvPr id="24" name="Shape 21"/>
+          <p:cNvSpPr/>
+          <p:nvPr/>
+        </p:nvSpPr>
+        <p:spPr>
+          <a:xfrm>
+            <a:off x="274320" y="4206240"/>
+            <a:ext cx="8595360" cy="27432"/>
+          </a:xfrm>
+          <a:prstGeom prst="rect">
+            <a:avLst/>
+          </a:prstGeom>
+          <a:solidFill>
+            <a:srgbClr val="8854D0"/>
+          </a:solidFill>
+          <a:ln/>
+        </p:spPr>
+      </p:sp>
+      <p:sp>
+        <p:nvSpPr>
+          <p:cNvPr id="25" name="Text 22"/>
+          <p:cNvSpPr/>
+          <p:nvPr/>
+        </p:nvSpPr>
+        <p:spPr>
+          <a:xfrm>
+            <a:off x="457200" y="4270248"/>
+            <a:ext cx="8229600" cy="384048"/>
           </a:xfrm>
           <a:prstGeom prst="rect">
             <a:avLst/>
@@ -9189,1363 +8921,17 @@
               <a:buNone/>
             </a:pPr>
             <a:r>
-              <a:rPr lang="en-US" sz="1000" b="1" dirty="0">
-                <a:solidFill>
-                  <a:srgbClr val="FFFFFF"/>
-                </a:solidFill>
-                <a:latin typeface="Arial" pitchFamily="34" charset="0"/>
-                <a:ea typeface="Arial" pitchFamily="34" charset="-122"/>
-                <a:cs typeface="Arial" pitchFamily="34" charset="-120"/>
-              </a:rPr>
-              <a:t>Syntoniqa Bot</a:t>
-            </a:r>
-            <a:endParaRPr lang="en-US" sz="1000" dirty="0"/>
-          </a:p>
-        </p:txBody>
-      </p:sp>
-      <p:sp>
-        <p:nvSpPr>
-          <p:cNvPr id="8" name="Shape 6"/>
-          <p:cNvSpPr/>
-          <p:nvPr/>
-        </p:nvSpPr>
-        <p:spPr>
-          <a:xfrm>
-            <a:off x="2651760" y="1234440"/>
-            <a:ext cx="2011680" cy="228600"/>
-          </a:xfrm>
-          <a:prstGeom prst="rect">
-            <a:avLst/>
-          </a:prstGeom>
-          <a:solidFill>
-            <a:srgbClr val="2B5278"/>
-          </a:solidFill>
-          <a:ln/>
-        </p:spPr>
-      </p:sp>
-      <p:sp>
-        <p:nvSpPr>
-          <p:cNvPr id="9" name="Text 7"/>
-          <p:cNvSpPr/>
-          <p:nvPr/>
-        </p:nvSpPr>
-        <p:spPr>
-          <a:xfrm>
-            <a:off x="2724912" y="1252728"/>
-            <a:ext cx="1865376" cy="192024"/>
-          </a:xfrm>
-          <a:prstGeom prst="rect">
-            <a:avLst/>
-          </a:prstGeom>
-          <a:noFill/>
-          <a:ln/>
-        </p:spPr>
-        <p:txBody>
-          <a:bodyPr wrap="square" lIns="0" tIns="0" rIns="0" bIns="0" rtlCol="0" anchor="ctr"/>
-          <a:lstStyle/>
-          <a:p>
-            <a:pPr indent="0" marL="0">
-              <a:lnSpc>
-                <a:spcPct val="115000"/>
-              </a:lnSpc>
-              <a:buNone/>
-            </a:pPr>
-            <a:r>
-              <a:rPr lang="en-US" sz="700" dirty="0">
-                <a:solidFill>
-                  <a:srgbClr val="FFFFFF"/>
-                </a:solidFill>
-                <a:latin typeface="Arial" pitchFamily="34" charset="0"/>
-                <a:ea typeface="Arial" pitchFamily="34" charset="-122"/>
-                <a:cs typeface="Arial" pitchFamily="34" charset="-120"/>
-              </a:rPr>
-              <a:t>/oggi</a:t>
-            </a:r>
-            <a:endParaRPr lang="en-US" sz="700" dirty="0"/>
-          </a:p>
-        </p:txBody>
-      </p:sp>
-      <p:sp>
-        <p:nvSpPr>
-          <p:cNvPr id="10" name="Shape 8"/>
-          <p:cNvSpPr/>
-          <p:nvPr/>
-        </p:nvSpPr>
-        <p:spPr>
-          <a:xfrm>
-            <a:off x="365760" y="1508760"/>
-            <a:ext cx="3657600" cy="502920"/>
-          </a:xfrm>
-          <a:prstGeom prst="rect">
-            <a:avLst/>
-          </a:prstGeom>
-          <a:solidFill>
-            <a:srgbClr val="1C2B3A"/>
-          </a:solidFill>
-          <a:ln/>
-        </p:spPr>
-      </p:sp>
-      <p:sp>
-        <p:nvSpPr>
-          <p:cNvPr id="11" name="Text 9"/>
-          <p:cNvSpPr/>
-          <p:nvPr/>
-        </p:nvSpPr>
-        <p:spPr>
-          <a:xfrm>
-            <a:off x="438912" y="1527048"/>
-            <a:ext cx="3511296" cy="466344"/>
-          </a:xfrm>
-          <a:prstGeom prst="rect">
-            <a:avLst/>
-          </a:prstGeom>
-          <a:noFill/>
-          <a:ln/>
-        </p:spPr>
-        <p:txBody>
-          <a:bodyPr wrap="square" lIns="0" tIns="0" rIns="0" bIns="0" rtlCol="0" anchor="ctr"/>
-          <a:lstStyle/>
-          <a:p>
-            <a:pPr indent="0" marL="0">
-              <a:lnSpc>
-                <a:spcPct val="115000"/>
-              </a:lnSpc>
-              <a:buNone/>
-            </a:pPr>
-            <a:r>
-              <a:rPr lang="en-US" sz="700" dirty="0">
-                <a:solidFill>
-                  <a:srgbClr val="FFFFFF"/>
-                </a:solidFill>
-                <a:latin typeface="Arial" pitchFamily="34" charset="0"/>
-                <a:ea typeface="Arial" pitchFamily="34" charset="-122"/>
-                <a:cs typeface="Arial" pitchFamily="34" charset="-120"/>
-              </a:rPr>
-              <a:t>📋 Interventi di oggi:</a:t>
-            </a:r>
-            <a:endParaRPr lang="en-US" sz="700" dirty="0"/>
-          </a:p>
-          <a:p>
-            <a:pPr indent="0" marL="0">
-              <a:lnSpc>
-                <a:spcPct val="115000"/>
-              </a:lnSpc>
-              <a:buNone/>
-            </a:pPr>
-            <a:r>
-              <a:rPr lang="en-US" sz="700" dirty="0">
-                <a:solidFill>
-                  <a:srgbClr val="FFFFFF"/>
-                </a:solidFill>
-                <a:latin typeface="Arial" pitchFamily="34" charset="0"/>
-                <a:ea typeface="Arial" pitchFamily="34" charset="-122"/>
-                <a:cs typeface="Arial" pitchFamily="34" charset="-120"/>
-              </a:rPr>
-              <a:t>1. INT_089 · Az. Rossi · PM Trimestrale · 09:00</a:t>
-            </a:r>
-            <a:endParaRPr lang="en-US" sz="700" dirty="0"/>
-          </a:p>
-          <a:p>
-            <a:pPr indent="0" marL="0">
-              <a:lnSpc>
-                <a:spcPct val="115000"/>
-              </a:lnSpc>
-              <a:buNone/>
-            </a:pPr>
-            <a:r>
-              <a:rPr lang="en-US" sz="700" dirty="0">
-                <a:solidFill>
-                  <a:srgbClr val="FFFFFF"/>
-                </a:solidFill>
-                <a:latin typeface="Arial" pitchFamily="34" charset="0"/>
-                <a:ea typeface="Arial" pitchFamily="34" charset="-122"/>
-                <a:cs typeface="Arial" pitchFamily="34" charset="-120"/>
-              </a:rPr>
-              <a:t>2. INT_090 · Coop Verdi · Sostituzione sensore · 14:00</a:t>
-            </a:r>
-            <a:endParaRPr lang="en-US" sz="700" dirty="0"/>
-          </a:p>
-        </p:txBody>
-      </p:sp>
-      <p:sp>
-        <p:nvSpPr>
-          <p:cNvPr id="12" name="Shape 10"/>
-          <p:cNvSpPr/>
-          <p:nvPr/>
-        </p:nvSpPr>
-        <p:spPr>
-          <a:xfrm>
-            <a:off x="2651760" y="2331720"/>
-            <a:ext cx="2011680" cy="228600"/>
-          </a:xfrm>
-          <a:prstGeom prst="rect">
-            <a:avLst/>
-          </a:prstGeom>
-          <a:solidFill>
-            <a:srgbClr val="2B5278"/>
-          </a:solidFill>
-          <a:ln/>
-        </p:spPr>
-      </p:sp>
-      <p:sp>
-        <p:nvSpPr>
-          <p:cNvPr id="13" name="Text 11"/>
-          <p:cNvSpPr/>
-          <p:nvPr/>
-        </p:nvSpPr>
-        <p:spPr>
-          <a:xfrm>
-            <a:off x="2724912" y="2350008"/>
-            <a:ext cx="1865376" cy="192024"/>
-          </a:xfrm>
-          <a:prstGeom prst="rect">
-            <a:avLst/>
-          </a:prstGeom>
-          <a:noFill/>
-          <a:ln/>
-        </p:spPr>
-        <p:txBody>
-          <a:bodyPr wrap="square" lIns="0" tIns="0" rIns="0" bIns="0" rtlCol="0" anchor="ctr"/>
-          <a:lstStyle/>
-          <a:p>
-            <a:pPr indent="0" marL="0">
-              <a:lnSpc>
-                <a:spcPct val="115000"/>
-              </a:lnSpc>
-              <a:buNone/>
-            </a:pPr>
-            <a:r>
-              <a:rPr lang="en-US" sz="700" dirty="0">
-                <a:solidFill>
-                  <a:srgbClr val="FFFFFF"/>
-                </a:solidFill>
-                <a:latin typeface="Arial" pitchFamily="34" charset="0"/>
-                <a:ea typeface="Arial" pitchFamily="34" charset="-122"/>
-                <a:cs typeface="Arial" pitchFamily="34" charset="-120"/>
-              </a:rPr>
-              <a:t>/vado</a:t>
-            </a:r>
-            <a:endParaRPr lang="en-US" sz="700" dirty="0"/>
-          </a:p>
-        </p:txBody>
-      </p:sp>
-      <p:sp>
-        <p:nvSpPr>
-          <p:cNvPr id="14" name="Shape 12"/>
-          <p:cNvSpPr/>
-          <p:nvPr/>
-        </p:nvSpPr>
-        <p:spPr>
-          <a:xfrm>
-            <a:off x="365760" y="2606040"/>
-            <a:ext cx="3657600" cy="502920"/>
-          </a:xfrm>
-          <a:prstGeom prst="rect">
-            <a:avLst/>
-          </a:prstGeom>
-          <a:solidFill>
-            <a:srgbClr val="1C2B3A"/>
-          </a:solidFill>
-          <a:ln/>
-        </p:spPr>
-      </p:sp>
-      <p:sp>
-        <p:nvSpPr>
-          <p:cNvPr id="15" name="Text 13"/>
-          <p:cNvSpPr/>
-          <p:nvPr/>
-        </p:nvSpPr>
-        <p:spPr>
-          <a:xfrm>
-            <a:off x="438912" y="2624328"/>
-            <a:ext cx="3511296" cy="466344"/>
-          </a:xfrm>
-          <a:prstGeom prst="rect">
-            <a:avLst/>
-          </a:prstGeom>
-          <a:noFill/>
-          <a:ln/>
-        </p:spPr>
-        <p:txBody>
-          <a:bodyPr wrap="square" lIns="0" tIns="0" rIns="0" bIns="0" rtlCol="0" anchor="ctr"/>
-          <a:lstStyle/>
-          <a:p>
-            <a:pPr indent="0" marL="0">
-              <a:lnSpc>
-                <a:spcPct val="115000"/>
-              </a:lnSpc>
-              <a:buNone/>
-            </a:pPr>
-            <a:r>
-              <a:rPr lang="en-US" sz="700" dirty="0">
-                <a:solidFill>
-                  <a:srgbClr val="FFFFFF"/>
-                </a:solidFill>
-                <a:latin typeface="Arial" pitchFamily="34" charset="0"/>
-                <a:ea typeface="Arial" pitchFamily="34" charset="-122"/>
-                <a:cs typeface="Arial" pitchFamily="34" charset="-120"/>
-              </a:rPr>
-              <a:t>🔴 Urgenze aperte:</a:t>
-            </a:r>
-            <a:endParaRPr lang="en-US" sz="700" dirty="0"/>
-          </a:p>
-          <a:p>
-            <a:pPr indent="0" marL="0">
-              <a:lnSpc>
-                <a:spcPct val="115000"/>
-              </a:lnSpc>
-              <a:buNone/>
-            </a:pPr>
-            <a:r>
-              <a:rPr lang="en-US" sz="700" dirty="0">
-                <a:solidFill>
-                  <a:srgbClr val="FFFFFF"/>
-                </a:solidFill>
-                <a:latin typeface="Arial" pitchFamily="34" charset="0"/>
-                <a:ea typeface="Arial" pitchFamily="34" charset="-122"/>
-                <a:cs typeface="Arial" pitchFamily="34" charset="-120"/>
-              </a:rPr>
-              <a:t>1. URG_042 · Az. Rossi · Robot A5 bloccato</a:t>
-            </a:r>
-            <a:endParaRPr lang="en-US" sz="700" dirty="0"/>
-          </a:p>
-          <a:p>
-            <a:pPr indent="0" marL="0">
-              <a:lnSpc>
-                <a:spcPct val="115000"/>
-              </a:lnSpc>
-              <a:buNone/>
-            </a:pPr>
-            <a:r>
-              <a:rPr lang="en-US" sz="700" dirty="0">
-                <a:solidFill>
-                  <a:srgbClr val="FFFFFF"/>
-                </a:solidFill>
-                <a:latin typeface="Arial" pitchFamily="34" charset="0"/>
-                <a:ea typeface="Arial" pitchFamily="34" charset="-122"/>
-                <a:cs typeface="Arial" pitchFamily="34" charset="-120"/>
-              </a:rPr>
-              <a:t>2. URG_041 · Coop Verdi · Sensore guasto</a:t>
-            </a:r>
-            <a:endParaRPr lang="en-US" sz="700" dirty="0"/>
-          </a:p>
-        </p:txBody>
-      </p:sp>
-      <p:sp>
-        <p:nvSpPr>
-          <p:cNvPr id="16" name="Shape 14"/>
-          <p:cNvSpPr/>
-          <p:nvPr/>
-        </p:nvSpPr>
-        <p:spPr>
-          <a:xfrm>
-            <a:off x="2651760" y="3246120"/>
-            <a:ext cx="2011680" cy="228600"/>
-          </a:xfrm>
-          <a:prstGeom prst="rect">
-            <a:avLst/>
-          </a:prstGeom>
-          <a:solidFill>
-            <a:srgbClr val="2B5278"/>
-          </a:solidFill>
-          <a:ln/>
-        </p:spPr>
-      </p:sp>
-      <p:sp>
-        <p:nvSpPr>
-          <p:cNvPr id="17" name="Text 15"/>
-          <p:cNvSpPr/>
-          <p:nvPr/>
-        </p:nvSpPr>
-        <p:spPr>
-          <a:xfrm>
-            <a:off x="2724912" y="3264408"/>
-            <a:ext cx="1865376" cy="192024"/>
-          </a:xfrm>
-          <a:prstGeom prst="rect">
-            <a:avLst/>
-          </a:prstGeom>
-          <a:noFill/>
-          <a:ln/>
-        </p:spPr>
-        <p:txBody>
-          <a:bodyPr wrap="square" lIns="0" tIns="0" rIns="0" bIns="0" rtlCol="0" anchor="ctr"/>
-          <a:lstStyle/>
-          <a:p>
-            <a:pPr indent="0" marL="0">
-              <a:lnSpc>
-                <a:spcPct val="115000"/>
-              </a:lnSpc>
-              <a:buNone/>
-            </a:pPr>
-            <a:r>
-              <a:rPr lang="en-US" sz="700" dirty="0">
-                <a:solidFill>
-                  <a:srgbClr val="FFFFFF"/>
-                </a:solidFill>
-                <a:latin typeface="Arial" pitchFamily="34" charset="0"/>
-                <a:ea typeface="Arial" pitchFamily="34" charset="-122"/>
-                <a:cs typeface="Arial" pitchFamily="34" charset="-120"/>
-              </a:rPr>
-              <a:t>/vado 1</a:t>
-            </a:r>
-            <a:endParaRPr lang="en-US" sz="700" dirty="0"/>
-          </a:p>
-        </p:txBody>
-      </p:sp>
-      <p:sp>
-        <p:nvSpPr>
-          <p:cNvPr id="18" name="Shape 16"/>
-          <p:cNvSpPr/>
-          <p:nvPr/>
-        </p:nvSpPr>
-        <p:spPr>
-          <a:xfrm>
-            <a:off x="365760" y="3474720"/>
-            <a:ext cx="3657600" cy="365760"/>
-          </a:xfrm>
-          <a:prstGeom prst="rect">
-            <a:avLst/>
-          </a:prstGeom>
-          <a:solidFill>
-            <a:srgbClr val="1C2B3A"/>
-          </a:solidFill>
-          <a:ln/>
-        </p:spPr>
-      </p:sp>
-      <p:sp>
-        <p:nvSpPr>
-          <p:cNvPr id="19" name="Text 17"/>
-          <p:cNvSpPr/>
-          <p:nvPr/>
-        </p:nvSpPr>
-        <p:spPr>
-          <a:xfrm>
-            <a:off x="438912" y="3493008"/>
-            <a:ext cx="3511296" cy="329184"/>
-          </a:xfrm>
-          <a:prstGeom prst="rect">
-            <a:avLst/>
-          </a:prstGeom>
-          <a:noFill/>
-          <a:ln/>
-        </p:spPr>
-        <p:txBody>
-          <a:bodyPr wrap="square" lIns="0" tIns="0" rIns="0" bIns="0" rtlCol="0" anchor="ctr"/>
-          <a:lstStyle/>
-          <a:p>
-            <a:pPr indent="0" marL="0">
-              <a:lnSpc>
-                <a:spcPct val="115000"/>
-              </a:lnSpc>
-              <a:buNone/>
-            </a:pPr>
-            <a:r>
-              <a:rPr lang="en-US" sz="700" dirty="0">
-                <a:solidFill>
-                  <a:srgbClr val="FFFFFF"/>
-                </a:solidFill>
-                <a:latin typeface="Arial" pitchFamily="34" charset="0"/>
-                <a:ea typeface="Arial" pitchFamily="34" charset="-122"/>
-                <a:cs typeface="Arial" pitchFamily="34" charset="-120"/>
-              </a:rPr>
-              <a:t>✅ Hai preso URG_042.</a:t>
-            </a:r>
-            <a:endParaRPr lang="en-US" sz="700" dirty="0"/>
-          </a:p>
-          <a:p>
-            <a:pPr indent="0" marL="0">
-              <a:lnSpc>
-                <a:spcPct val="115000"/>
-              </a:lnSpc>
-              <a:buNone/>
-            </a:pPr>
-            <a:r>
-              <a:rPr lang="en-US" sz="700" dirty="0">
-                <a:solidFill>
-                  <a:srgbClr val="FFFFFF"/>
-                </a:solidFill>
-                <a:latin typeface="Arial" pitchFamily="34" charset="0"/>
-                <a:ea typeface="Arial" pitchFamily="34" charset="-122"/>
-                <a:cs typeface="Arial" pitchFamily="34" charset="-120"/>
-              </a:rPr>
-              <a:t>📍 Naviga: maps.google.com/...</a:t>
-            </a:r>
-            <a:endParaRPr lang="en-US" sz="700" dirty="0"/>
-          </a:p>
-        </p:txBody>
-      </p:sp>
-      <p:sp>
-        <p:nvSpPr>
-          <p:cNvPr id="20" name="Text 18"/>
-          <p:cNvSpPr/>
-          <p:nvPr/>
-        </p:nvSpPr>
-        <p:spPr>
-          <a:xfrm>
-            <a:off x="5120640" y="822960"/>
-            <a:ext cx="3657600" cy="320040"/>
-          </a:xfrm>
-          <a:prstGeom prst="rect">
-            <a:avLst/>
-          </a:prstGeom>
-          <a:noFill/>
-          <a:ln/>
-        </p:spPr>
-        <p:txBody>
-          <a:bodyPr wrap="square" lIns="0" tIns="0" rIns="0" bIns="0" rtlCol="0" anchor="ctr"/>
-          <a:lstStyle/>
-          <a:p>
-            <a:pPr indent="0" marL="0">
-              <a:buNone/>
-            </a:pPr>
-            <a:r>
-              <a:rPr lang="en-US" sz="1400" b="1" dirty="0">
-                <a:solidFill>
-                  <a:srgbClr val="FFFFFF"/>
-                </a:solidFill>
-                <a:latin typeface="Arial" pitchFamily="34" charset="0"/>
-                <a:ea typeface="Arial" pitchFamily="34" charset="-122"/>
-                <a:cs typeface="Arial" pitchFamily="34" charset="-120"/>
-              </a:rPr>
-              <a:t>Comandi</a:t>
-            </a:r>
-            <a:endParaRPr lang="en-US" sz="1400" dirty="0"/>
-          </a:p>
-        </p:txBody>
-      </p:sp>
-      <p:sp>
-        <p:nvSpPr>
-          <p:cNvPr id="21" name="Text 19"/>
-          <p:cNvSpPr/>
-          <p:nvPr/>
-        </p:nvSpPr>
-        <p:spPr>
-          <a:xfrm>
-            <a:off x="5120640" y="1234440"/>
-            <a:ext cx="1371600" cy="246888"/>
-          </a:xfrm>
-          <a:prstGeom prst="rect">
-            <a:avLst/>
-          </a:prstGeom>
-          <a:noFill/>
-          <a:ln/>
-        </p:spPr>
-        <p:txBody>
-          <a:bodyPr wrap="square" lIns="0" tIns="0" rIns="0" bIns="0" rtlCol="0" anchor="ctr"/>
-          <a:lstStyle/>
-          <a:p>
-            <a:pPr indent="0" marL="0">
-              <a:buNone/>
-            </a:pPr>
-            <a:r>
-              <a:rPr lang="en-US" sz="900" b="1" dirty="0">
-                <a:solidFill>
-                  <a:srgbClr val="C30A14"/>
-                </a:solidFill>
-                <a:latin typeface="Courier New" pitchFamily="34" charset="0"/>
-                <a:ea typeface="Courier New" pitchFamily="34" charset="-122"/>
-                <a:cs typeface="Courier New" pitchFamily="34" charset="-120"/>
-              </a:rPr>
-              <a:t>/vado</a:t>
+              <a:rPr lang="en-US" sz="900" i="1" dirty="0">
+                <a:solidFill>
+                  <a:srgbClr val="CCCCCC"/>
+                </a:solidFill>
+                <a:latin typeface="Arial" pitchFamily="34" charset="0"/>
+                <a:ea typeface="Arial" pitchFamily="34" charset="-122"/>
+                <a:cs typeface="Arial" pitchFamily="34" charset="-120"/>
+              </a:rPr>
+              <a:t>AI Engine: invia una foto del guasto → l'AI identifica il problema e suggerisce l'azione da intraprendere.</a:t>
             </a:r>
             <a:endParaRPr lang="en-US" sz="900" dirty="0"/>
-          </a:p>
-        </p:txBody>
-      </p:sp>
-      <p:sp>
-        <p:nvSpPr>
-          <p:cNvPr id="22" name="Text 20"/>
-          <p:cNvSpPr/>
-          <p:nvPr/>
-        </p:nvSpPr>
-        <p:spPr>
-          <a:xfrm>
-            <a:off x="6675120" y="1234440"/>
-            <a:ext cx="2286000" cy="246888"/>
-          </a:xfrm>
-          <a:prstGeom prst="rect">
-            <a:avLst/>
-          </a:prstGeom>
-          <a:noFill/>
-          <a:ln/>
-        </p:spPr>
-        <p:txBody>
-          <a:bodyPr wrap="square" lIns="0" tIns="0" rIns="0" bIns="0" rtlCol="0" anchor="ctr"/>
-          <a:lstStyle/>
-          <a:p>
-            <a:pPr indent="0" marL="0">
-              <a:buNone/>
-            </a:pPr>
-            <a:r>
-              <a:rPr lang="en-US" sz="800" dirty="0">
-                <a:solidFill>
-                  <a:srgbClr val="CCCCCC"/>
-                </a:solidFill>
-                <a:latin typeface="Arial" pitchFamily="34" charset="0"/>
-                <a:ea typeface="Arial" pitchFamily="34" charset="-122"/>
-                <a:cs typeface="Arial" pitchFamily="34" charset="-120"/>
-              </a:rPr>
-              <a:t>Mostra urgenze, prendi con /vado N</a:t>
-            </a:r>
-            <a:endParaRPr lang="en-US" sz="800" dirty="0"/>
-          </a:p>
-        </p:txBody>
-      </p:sp>
-      <p:sp>
-        <p:nvSpPr>
-          <p:cNvPr id="23" name="Text 21"/>
-          <p:cNvSpPr/>
-          <p:nvPr/>
-        </p:nvSpPr>
-        <p:spPr>
-          <a:xfrm>
-            <a:off x="5120640" y="1508760"/>
-            <a:ext cx="1371600" cy="246888"/>
-          </a:xfrm>
-          <a:prstGeom prst="rect">
-            <a:avLst/>
-          </a:prstGeom>
-          <a:noFill/>
-          <a:ln/>
-        </p:spPr>
-        <p:txBody>
-          <a:bodyPr wrap="square" lIns="0" tIns="0" rIns="0" bIns="0" rtlCol="0" anchor="ctr"/>
-          <a:lstStyle/>
-          <a:p>
-            <a:pPr indent="0" marL="0">
-              <a:buNone/>
-            </a:pPr>
-            <a:r>
-              <a:rPr lang="en-US" sz="900" b="1" dirty="0">
-                <a:solidFill>
-                  <a:srgbClr val="F7B731"/>
-                </a:solidFill>
-                <a:latin typeface="Courier New" pitchFamily="34" charset="0"/>
-                <a:ea typeface="Courier New" pitchFamily="34" charset="-122"/>
-                <a:cs typeface="Courier New" pitchFamily="34" charset="-120"/>
-              </a:rPr>
-              <a:t>/incorso</a:t>
-            </a:r>
-            <a:endParaRPr lang="en-US" sz="900" dirty="0"/>
-          </a:p>
-        </p:txBody>
-      </p:sp>
-      <p:sp>
-        <p:nvSpPr>
-          <p:cNvPr id="24" name="Text 22"/>
-          <p:cNvSpPr/>
-          <p:nvPr/>
-        </p:nvSpPr>
-        <p:spPr>
-          <a:xfrm>
-            <a:off x="6675120" y="1508760"/>
-            <a:ext cx="2286000" cy="246888"/>
-          </a:xfrm>
-          <a:prstGeom prst="rect">
-            <a:avLst/>
-          </a:prstGeom>
-          <a:noFill/>
-          <a:ln/>
-        </p:spPr>
-        <p:txBody>
-          <a:bodyPr wrap="square" lIns="0" tIns="0" rIns="0" bIns="0" rtlCol="0" anchor="ctr"/>
-          <a:lstStyle/>
-          <a:p>
-            <a:pPr indent="0" marL="0">
-              <a:buNone/>
-            </a:pPr>
-            <a:r>
-              <a:rPr lang="en-US" sz="800" dirty="0">
-                <a:solidFill>
-                  <a:srgbClr val="CCCCCC"/>
-                </a:solidFill>
-                <a:latin typeface="Arial" pitchFamily="34" charset="0"/>
-                <a:ea typeface="Arial" pitchFamily="34" charset="-122"/>
-                <a:cs typeface="Arial" pitchFamily="34" charset="-120"/>
-              </a:rPr>
-              <a:t>Segna urgenza in corso</a:t>
-            </a:r>
-            <a:endParaRPr lang="en-US" sz="800" dirty="0"/>
-          </a:p>
-        </p:txBody>
-      </p:sp>
-      <p:sp>
-        <p:nvSpPr>
-          <p:cNvPr id="25" name="Text 23"/>
-          <p:cNvSpPr/>
-          <p:nvPr/>
-        </p:nvSpPr>
-        <p:spPr>
-          <a:xfrm>
-            <a:off x="5120640" y="1783080"/>
-            <a:ext cx="1371600" cy="246888"/>
-          </a:xfrm>
-          <a:prstGeom prst="rect">
-            <a:avLst/>
-          </a:prstGeom>
-          <a:noFill/>
-          <a:ln/>
-        </p:spPr>
-        <p:txBody>
-          <a:bodyPr wrap="square" lIns="0" tIns="0" rIns="0" bIns="0" rtlCol="0" anchor="ctr"/>
-          <a:lstStyle/>
-          <a:p>
-            <a:pPr indent="0" marL="0">
-              <a:buNone/>
-            </a:pPr>
-            <a:r>
-              <a:rPr lang="en-US" sz="900" b="1" dirty="0">
-                <a:solidFill>
-                  <a:srgbClr val="34D058"/>
-                </a:solidFill>
-                <a:latin typeface="Courier New" pitchFamily="34" charset="0"/>
-                <a:ea typeface="Courier New" pitchFamily="34" charset="-122"/>
-                <a:cs typeface="Courier New" pitchFamily="34" charset="-120"/>
-              </a:rPr>
-              <a:t>/risolto</a:t>
-            </a:r>
-            <a:endParaRPr lang="en-US" sz="900" dirty="0"/>
-          </a:p>
-        </p:txBody>
-      </p:sp>
-      <p:sp>
-        <p:nvSpPr>
-          <p:cNvPr id="26" name="Text 24"/>
-          <p:cNvSpPr/>
-          <p:nvPr/>
-        </p:nvSpPr>
-        <p:spPr>
-          <a:xfrm>
-            <a:off x="6675120" y="1783080"/>
-            <a:ext cx="2286000" cy="246888"/>
-          </a:xfrm>
-          <a:prstGeom prst="rect">
-            <a:avLst/>
-          </a:prstGeom>
-          <a:noFill/>
-          <a:ln/>
-        </p:spPr>
-        <p:txBody>
-          <a:bodyPr wrap="square" lIns="0" tIns="0" rIns="0" bIns="0" rtlCol="0" anchor="ctr"/>
-          <a:lstStyle/>
-          <a:p>
-            <a:pPr indent="0" marL="0">
-              <a:buNone/>
-            </a:pPr>
-            <a:r>
-              <a:rPr lang="en-US" sz="800" dirty="0">
-                <a:solidFill>
-                  <a:srgbClr val="CCCCCC"/>
-                </a:solidFill>
-                <a:latin typeface="Arial" pitchFamily="34" charset="0"/>
-                <a:ea typeface="Arial" pitchFamily="34" charset="-122"/>
-                <a:cs typeface="Arial" pitchFamily="34" charset="-120"/>
-              </a:rPr>
-              <a:t>Chiudi urgenza con note</a:t>
-            </a:r>
-            <a:endParaRPr lang="en-US" sz="800" dirty="0"/>
-          </a:p>
-        </p:txBody>
-      </p:sp>
-      <p:sp>
-        <p:nvSpPr>
-          <p:cNvPr id="27" name="Text 25"/>
-          <p:cNvSpPr/>
-          <p:nvPr/>
-        </p:nvSpPr>
-        <p:spPr>
-          <a:xfrm>
-            <a:off x="5120640" y="2057400"/>
-            <a:ext cx="1371600" cy="246888"/>
-          </a:xfrm>
-          <a:prstGeom prst="rect">
-            <a:avLst/>
-          </a:prstGeom>
-          <a:noFill/>
-          <a:ln/>
-        </p:spPr>
-        <p:txBody>
-          <a:bodyPr wrap="square" lIns="0" tIns="0" rIns="0" bIns="0" rtlCol="0" anchor="ctr"/>
-          <a:lstStyle/>
-          <a:p>
-            <a:pPr indent="0" marL="0">
-              <a:buNone/>
-            </a:pPr>
-            <a:r>
-              <a:rPr lang="en-US" sz="900" b="1" dirty="0">
-                <a:solidFill>
-                  <a:srgbClr val="3B7EF7"/>
-                </a:solidFill>
-                <a:latin typeface="Courier New" pitchFamily="34" charset="0"/>
-                <a:ea typeface="Courier New" pitchFamily="34" charset="-122"/>
-                <a:cs typeface="Courier New" pitchFamily="34" charset="-120"/>
-              </a:rPr>
-              <a:t>/stato</a:t>
-            </a:r>
-            <a:endParaRPr lang="en-US" sz="900" dirty="0"/>
-          </a:p>
-        </p:txBody>
-      </p:sp>
-      <p:sp>
-        <p:nvSpPr>
-          <p:cNvPr id="28" name="Text 26"/>
-          <p:cNvSpPr/>
-          <p:nvPr/>
-        </p:nvSpPr>
-        <p:spPr>
-          <a:xfrm>
-            <a:off x="6675120" y="2057400"/>
-            <a:ext cx="2286000" cy="246888"/>
-          </a:xfrm>
-          <a:prstGeom prst="rect">
-            <a:avLst/>
-          </a:prstGeom>
-          <a:noFill/>
-          <a:ln/>
-        </p:spPr>
-        <p:txBody>
-          <a:bodyPr wrap="square" lIns="0" tIns="0" rIns="0" bIns="0" rtlCol="0" anchor="ctr"/>
-          <a:lstStyle/>
-          <a:p>
-            <a:pPr indent="0" marL="0">
-              <a:buNone/>
-            </a:pPr>
-            <a:r>
-              <a:rPr lang="en-US" sz="800" dirty="0">
-                <a:solidFill>
-                  <a:srgbClr val="CCCCCC"/>
-                </a:solidFill>
-                <a:latin typeface="Arial" pitchFamily="34" charset="0"/>
-                <a:ea typeface="Arial" pitchFamily="34" charset="-122"/>
-                <a:cs typeface="Arial" pitchFamily="34" charset="-120"/>
-              </a:rPr>
-              <a:t>Stato urgenze attive</a:t>
-            </a:r>
-            <a:endParaRPr lang="en-US" sz="800" dirty="0"/>
-          </a:p>
-        </p:txBody>
-      </p:sp>
-      <p:sp>
-        <p:nvSpPr>
-          <p:cNvPr id="29" name="Text 27"/>
-          <p:cNvSpPr/>
-          <p:nvPr/>
-        </p:nvSpPr>
-        <p:spPr>
-          <a:xfrm>
-            <a:off x="5120640" y="2331720"/>
-            <a:ext cx="1371600" cy="246888"/>
-          </a:xfrm>
-          <a:prstGeom prst="rect">
-            <a:avLst/>
-          </a:prstGeom>
-          <a:noFill/>
-          <a:ln/>
-        </p:spPr>
-        <p:txBody>
-          <a:bodyPr wrap="square" lIns="0" tIns="0" rIns="0" bIns="0" rtlCol="0" anchor="ctr"/>
-          <a:lstStyle/>
-          <a:p>
-            <a:pPr indent="0" marL="0">
-              <a:buNone/>
-            </a:pPr>
-            <a:r>
-              <a:rPr lang="en-US" sz="900" b="1" dirty="0">
-                <a:solidFill>
-                  <a:srgbClr val="17C0EB"/>
-                </a:solidFill>
-                <a:latin typeface="Courier New" pitchFamily="34" charset="0"/>
-                <a:ea typeface="Courier New" pitchFamily="34" charset="-122"/>
-                <a:cs typeface="Courier New" pitchFamily="34" charset="-120"/>
-              </a:rPr>
-              <a:t>/oggi</a:t>
-            </a:r>
-            <a:endParaRPr lang="en-US" sz="900" dirty="0"/>
-          </a:p>
-        </p:txBody>
-      </p:sp>
-      <p:sp>
-        <p:nvSpPr>
-          <p:cNvPr id="30" name="Text 28"/>
-          <p:cNvSpPr/>
-          <p:nvPr/>
-        </p:nvSpPr>
-        <p:spPr>
-          <a:xfrm>
-            <a:off x="6675120" y="2331720"/>
-            <a:ext cx="2286000" cy="246888"/>
-          </a:xfrm>
-          <a:prstGeom prst="rect">
-            <a:avLst/>
-          </a:prstGeom>
-          <a:noFill/>
-          <a:ln/>
-        </p:spPr>
-        <p:txBody>
-          <a:bodyPr wrap="square" lIns="0" tIns="0" rIns="0" bIns="0" rtlCol="0" anchor="ctr"/>
-          <a:lstStyle/>
-          <a:p>
-            <a:pPr indent="0" marL="0">
-              <a:buNone/>
-            </a:pPr>
-            <a:r>
-              <a:rPr lang="en-US" sz="800" dirty="0">
-                <a:solidFill>
-                  <a:srgbClr val="CCCCCC"/>
-                </a:solidFill>
-                <a:latin typeface="Arial" pitchFamily="34" charset="0"/>
-                <a:ea typeface="Arial" pitchFamily="34" charset="-122"/>
-                <a:cs typeface="Arial" pitchFamily="34" charset="-120"/>
-              </a:rPr>
-              <a:t>Piano interventi di oggi</a:t>
-            </a:r>
-            <a:endParaRPr lang="en-US" sz="800" dirty="0"/>
-          </a:p>
-        </p:txBody>
-      </p:sp>
-      <p:sp>
-        <p:nvSpPr>
-          <p:cNvPr id="31" name="Text 29"/>
-          <p:cNvSpPr/>
-          <p:nvPr/>
-        </p:nvSpPr>
-        <p:spPr>
-          <a:xfrm>
-            <a:off x="5120640" y="2606040"/>
-            <a:ext cx="1371600" cy="246888"/>
-          </a:xfrm>
-          <a:prstGeom prst="rect">
-            <a:avLst/>
-          </a:prstGeom>
-          <a:noFill/>
-          <a:ln/>
-        </p:spPr>
-        <p:txBody>
-          <a:bodyPr wrap="square" lIns="0" tIns="0" rIns="0" bIns="0" rtlCol="0" anchor="ctr"/>
-          <a:lstStyle/>
-          <a:p>
-            <a:pPr indent="0" marL="0">
-              <a:buNone/>
-            </a:pPr>
-            <a:r>
-              <a:rPr lang="en-US" sz="900" b="1" dirty="0">
-                <a:solidFill>
-                  <a:srgbClr val="8854D0"/>
-                </a:solidFill>
-                <a:latin typeface="Courier New" pitchFamily="34" charset="0"/>
-                <a:ea typeface="Courier New" pitchFamily="34" charset="-122"/>
-                <a:cs typeface="Courier New" pitchFamily="34" charset="-120"/>
-              </a:rPr>
-              <a:t>/settimana</a:t>
-            </a:r>
-            <a:endParaRPr lang="en-US" sz="900" dirty="0"/>
-          </a:p>
-        </p:txBody>
-      </p:sp>
-      <p:sp>
-        <p:nvSpPr>
-          <p:cNvPr id="32" name="Text 30"/>
-          <p:cNvSpPr/>
-          <p:nvPr/>
-        </p:nvSpPr>
-        <p:spPr>
-          <a:xfrm>
-            <a:off x="6675120" y="2606040"/>
-            <a:ext cx="2286000" cy="246888"/>
-          </a:xfrm>
-          <a:prstGeom prst="rect">
-            <a:avLst/>
-          </a:prstGeom>
-          <a:noFill/>
-          <a:ln/>
-        </p:spPr>
-        <p:txBody>
-          <a:bodyPr wrap="square" lIns="0" tIns="0" rIns="0" bIns="0" rtlCol="0" anchor="ctr"/>
-          <a:lstStyle/>
-          <a:p>
-            <a:pPr indent="0" marL="0">
-              <a:buNone/>
-            </a:pPr>
-            <a:r>
-              <a:rPr lang="en-US" sz="800" dirty="0">
-                <a:solidFill>
-                  <a:srgbClr val="CCCCCC"/>
-                </a:solidFill>
-                <a:latin typeface="Arial" pitchFamily="34" charset="0"/>
-                <a:ea typeface="Arial" pitchFamily="34" charset="-122"/>
-                <a:cs typeface="Arial" pitchFamily="34" charset="-120"/>
-              </a:rPr>
-              <a:t>Piano settimanale</a:t>
-            </a:r>
-            <a:endParaRPr lang="en-US" sz="800" dirty="0"/>
-          </a:p>
-        </p:txBody>
-      </p:sp>
-      <p:sp>
-        <p:nvSpPr>
-          <p:cNvPr id="33" name="Text 31"/>
-          <p:cNvSpPr/>
-          <p:nvPr/>
-        </p:nvSpPr>
-        <p:spPr>
-          <a:xfrm>
-            <a:off x="5120640" y="2880360"/>
-            <a:ext cx="1371600" cy="246888"/>
-          </a:xfrm>
-          <a:prstGeom prst="rect">
-            <a:avLst/>
-          </a:prstGeom>
-          <a:noFill/>
-          <a:ln/>
-        </p:spPr>
-        <p:txBody>
-          <a:bodyPr wrap="square" lIns="0" tIns="0" rIns="0" bIns="0" rtlCol="0" anchor="ctr"/>
-          <a:lstStyle/>
-          <a:p>
-            <a:pPr indent="0" marL="0">
-              <a:buNone/>
-            </a:pPr>
-            <a:r>
-              <a:rPr lang="en-US" sz="900" b="1" dirty="0">
-                <a:solidFill>
-                  <a:srgbClr val="F7B731"/>
-                </a:solidFill>
-                <a:latin typeface="Courier New" pitchFamily="34" charset="0"/>
-                <a:ea typeface="Courier New" pitchFamily="34" charset="-122"/>
-                <a:cs typeface="Courier New" pitchFamily="34" charset="-120"/>
-              </a:rPr>
-              <a:t>/ordine</a:t>
-            </a:r>
-            <a:endParaRPr lang="en-US" sz="900" dirty="0"/>
-          </a:p>
-        </p:txBody>
-      </p:sp>
-      <p:sp>
-        <p:nvSpPr>
-          <p:cNvPr id="34" name="Text 32"/>
-          <p:cNvSpPr/>
-          <p:nvPr/>
-        </p:nvSpPr>
-        <p:spPr>
-          <a:xfrm>
-            <a:off x="6675120" y="2880360"/>
-            <a:ext cx="2286000" cy="246888"/>
-          </a:xfrm>
-          <a:prstGeom prst="rect">
-            <a:avLst/>
-          </a:prstGeom>
-          <a:noFill/>
-          <a:ln/>
-        </p:spPr>
-        <p:txBody>
-          <a:bodyPr wrap="square" lIns="0" tIns="0" rIns="0" bIns="0" rtlCol="0" anchor="ctr"/>
-          <a:lstStyle/>
-          <a:p>
-            <a:pPr indent="0" marL="0">
-              <a:buNone/>
-            </a:pPr>
-            <a:r>
-              <a:rPr lang="en-US" sz="800" dirty="0">
-                <a:solidFill>
-                  <a:srgbClr val="CCCCCC"/>
-                </a:solidFill>
-                <a:latin typeface="Arial" pitchFamily="34" charset="0"/>
-                <a:ea typeface="Arial" pitchFamily="34" charset="-122"/>
-                <a:cs typeface="Arial" pitchFamily="34" charset="-120"/>
-              </a:rPr>
-              <a:t>Crea ordine: /ordine cod qt cli</a:t>
-            </a:r>
-            <a:endParaRPr lang="en-US" sz="800" dirty="0"/>
-          </a:p>
-        </p:txBody>
-      </p:sp>
-      <p:sp>
-        <p:nvSpPr>
-          <p:cNvPr id="35" name="Text 33"/>
-          <p:cNvSpPr/>
-          <p:nvPr/>
-        </p:nvSpPr>
-        <p:spPr>
-          <a:xfrm>
-            <a:off x="5120640" y="3154680"/>
-            <a:ext cx="1371600" cy="246888"/>
-          </a:xfrm>
-          <a:prstGeom prst="rect">
-            <a:avLst/>
-          </a:prstGeom>
-          <a:noFill/>
-          <a:ln/>
-        </p:spPr>
-        <p:txBody>
-          <a:bodyPr wrap="square" lIns="0" tIns="0" rIns="0" bIns="0" rtlCol="0" anchor="ctr"/>
-          <a:lstStyle/>
-          <a:p>
-            <a:pPr indent="0" marL="0">
-              <a:buNone/>
-            </a:pPr>
-            <a:r>
-              <a:rPr lang="en-US" sz="900" b="1" dirty="0">
-                <a:solidFill>
-                  <a:srgbClr val="34D058"/>
-                </a:solidFill>
-                <a:latin typeface="Courier New" pitchFamily="34" charset="0"/>
-                <a:ea typeface="Courier New" pitchFamily="34" charset="-122"/>
-                <a:cs typeface="Courier New" pitchFamily="34" charset="-120"/>
-              </a:rPr>
-              <a:t>Foto/testo</a:t>
-            </a:r>
-            <a:endParaRPr lang="en-US" sz="900" dirty="0"/>
-          </a:p>
-        </p:txBody>
-      </p:sp>
-      <p:sp>
-        <p:nvSpPr>
-          <p:cNvPr id="36" name="Text 34"/>
-          <p:cNvSpPr/>
-          <p:nvPr/>
-        </p:nvSpPr>
-        <p:spPr>
-          <a:xfrm>
-            <a:off x="6675120" y="3154680"/>
-            <a:ext cx="2286000" cy="246888"/>
-          </a:xfrm>
-          <a:prstGeom prst="rect">
-            <a:avLst/>
-          </a:prstGeom>
-          <a:noFill/>
-          <a:ln/>
-        </p:spPr>
-        <p:txBody>
-          <a:bodyPr wrap="square" lIns="0" tIns="0" rIns="0" bIns="0" rtlCol="0" anchor="ctr"/>
-          <a:lstStyle/>
-          <a:p>
-            <a:pPr indent="0" marL="0">
-              <a:buNone/>
-            </a:pPr>
-            <a:r>
-              <a:rPr lang="en-US" sz="800" dirty="0">
-                <a:solidFill>
-                  <a:srgbClr val="CCCCCC"/>
-                </a:solidFill>
-                <a:latin typeface="Arial" pitchFamily="34" charset="0"/>
-                <a:ea typeface="Arial" pitchFamily="34" charset="-122"/>
-                <a:cs typeface="Arial" pitchFamily="34" charset="-120"/>
-              </a:rPr>
-              <a:t>AI analizza e crea azione</a:t>
-            </a:r>
-            <a:endParaRPr lang="en-US" sz="800" dirty="0"/>
-          </a:p>
-        </p:txBody>
-      </p:sp>
-      <p:sp>
-        <p:nvSpPr>
-          <p:cNvPr id="37" name="Shape 35"/>
-          <p:cNvSpPr/>
-          <p:nvPr/>
-        </p:nvSpPr>
-        <p:spPr>
-          <a:xfrm>
-            <a:off x="5120640" y="3520440"/>
-            <a:ext cx="3749040" cy="502920"/>
-          </a:xfrm>
-          <a:prstGeom prst="rect">
-            <a:avLst/>
-          </a:prstGeom>
-          <a:solidFill>
-            <a:srgbClr val="222222"/>
-          </a:solidFill>
-          <a:ln/>
-          <a:effectLst>
-            <a:outerShdw sx="100000" sy="100000" kx="0" ky="0" algn="bl" rotWithShape="0" blurRad="76200" dist="25400" dir="8100000">
-              <a:srgbClr val="000000">
-                <a:alpha val="40000"/>
-              </a:srgbClr>
-            </a:outerShdw>
-          </a:effectLst>
-        </p:spPr>
-      </p:sp>
-      <p:sp>
-        <p:nvSpPr>
-          <p:cNvPr id="38" name="Shape 36"/>
-          <p:cNvSpPr/>
-          <p:nvPr/>
-        </p:nvSpPr>
-        <p:spPr>
-          <a:xfrm>
-            <a:off x="5120640" y="3520440"/>
-            <a:ext cx="3749040" cy="27432"/>
-          </a:xfrm>
-          <a:prstGeom prst="rect">
-            <a:avLst/>
-          </a:prstGeom>
-          <a:solidFill>
-            <a:srgbClr val="8854D0"/>
-          </a:solidFill>
-          <a:ln/>
-        </p:spPr>
-      </p:sp>
-      <p:sp>
-        <p:nvSpPr>
-          <p:cNvPr id="39" name="Text 37"/>
-          <p:cNvSpPr/>
-          <p:nvPr/>
-        </p:nvSpPr>
-        <p:spPr>
-          <a:xfrm>
-            <a:off x="5212080" y="3584448"/>
-            <a:ext cx="3566160" cy="384048"/>
-          </a:xfrm>
-          <a:prstGeom prst="rect">
-            <a:avLst/>
-          </a:prstGeom>
-          <a:noFill/>
-          <a:ln/>
-        </p:spPr>
-        <p:txBody>
-          <a:bodyPr wrap="square" lIns="0" tIns="0" rIns="0" bIns="0" rtlCol="0" anchor="ctr"/>
-          <a:lstStyle/>
-          <a:p>
-            <a:pPr indent="0" marL="0">
-              <a:buNone/>
-            </a:pPr>
-            <a:r>
-              <a:rPr lang="en-US" sz="800" i="1" dirty="0">
-                <a:solidFill>
-                  <a:srgbClr val="CCCCCC"/>
-                </a:solidFill>
-                <a:latin typeface="Arial" pitchFamily="34" charset="0"/>
-                <a:ea typeface="Arial" pitchFamily="34" charset="-122"/>
-                <a:cs typeface="Arial" pitchFamily="34" charset="-120"/>
-              </a:rPr>
-              <a:t>AI Vision: invia una foto del guasto → l'AI identifica il problema e suggerisce l'azione da intraprendere.</a:t>
-            </a:r>
-            <a:endParaRPr lang="en-US" sz="800" dirty="0"/>
-          </a:p>
-        </p:txBody>
-      </p:sp>
-      <p:sp>
-        <p:nvSpPr>
-          <p:cNvPr id="40" name="Shape 38"/>
-          <p:cNvSpPr/>
-          <p:nvPr/>
-        </p:nvSpPr>
-        <p:spPr>
-          <a:xfrm>
-            <a:off x="274320" y="4206240"/>
-            <a:ext cx="8595360" cy="548640"/>
-          </a:xfrm>
-          <a:prstGeom prst="rect">
-            <a:avLst/>
-          </a:prstGeom>
-          <a:solidFill>
-            <a:srgbClr val="222222"/>
-          </a:solidFill>
-          <a:ln/>
-          <a:effectLst>
-            <a:outerShdw sx="100000" sy="100000" kx="0" ky="0" algn="bl" rotWithShape="0" blurRad="76200" dist="25400" dir="8100000">
-              <a:srgbClr val="000000">
-                <a:alpha val="40000"/>
-              </a:srgbClr>
-            </a:outerShdw>
-          </a:effectLst>
-        </p:spPr>
-      </p:sp>
-      <p:sp>
-        <p:nvSpPr>
-          <p:cNvPr id="41" name="Shape 39"/>
-          <p:cNvSpPr/>
-          <p:nvPr/>
-        </p:nvSpPr>
-        <p:spPr>
-          <a:xfrm>
-            <a:off x="274320" y="4206240"/>
-            <a:ext cx="54864" cy="548640"/>
-          </a:xfrm>
-          <a:prstGeom prst="rect">
-            <a:avLst/>
-          </a:prstGeom>
-          <a:solidFill>
-            <a:srgbClr val="34D058"/>
-          </a:solidFill>
-          <a:ln/>
-        </p:spPr>
-      </p:sp>
-      <p:sp>
-        <p:nvSpPr>
-          <p:cNvPr id="42" name="Text 40"/>
-          <p:cNvSpPr/>
-          <p:nvPr/>
-        </p:nvSpPr>
-        <p:spPr>
-          <a:xfrm>
-            <a:off x="457200" y="4224528"/>
-            <a:ext cx="1371600" cy="228600"/>
-          </a:xfrm>
-          <a:prstGeom prst="rect">
-            <a:avLst/>
-          </a:prstGeom>
-          <a:noFill/>
-          <a:ln/>
-        </p:spPr>
-        <p:txBody>
-          <a:bodyPr wrap="square" lIns="0" tIns="0" rIns="0" bIns="0" rtlCol="0" anchor="ctr"/>
-          <a:lstStyle/>
-          <a:p>
-            <a:pPr indent="0" marL="0">
-              <a:buNone/>
-            </a:pPr>
-            <a:r>
-              <a:rPr lang="en-US" sz="900" b="1" dirty="0">
-                <a:solidFill>
-                  <a:srgbClr val="34D058"/>
-                </a:solidFill>
-                <a:latin typeface="Arial" pitchFamily="34" charset="0"/>
-                <a:ea typeface="Arial" pitchFamily="34" charset="-122"/>
-                <a:cs typeface="Arial" pitchFamily="34" charset="-120"/>
-              </a:rPr>
-              <a:t>ESERCIZIO</a:t>
-            </a:r>
-            <a:endParaRPr lang="en-US" sz="900" dirty="0"/>
-          </a:p>
-        </p:txBody>
-      </p:sp>
-      <p:sp>
-        <p:nvSpPr>
-          <p:cNvPr id="43" name="Text 41"/>
-          <p:cNvSpPr/>
-          <p:nvPr/>
-        </p:nvSpPr>
-        <p:spPr>
-          <a:xfrm>
-            <a:off x="457200" y="4434840"/>
-            <a:ext cx="8229600" cy="274320"/>
-          </a:xfrm>
-          <a:prstGeom prst="rect">
-            <a:avLst/>
-          </a:prstGeom>
-          <a:noFill/>
-          <a:ln/>
-        </p:spPr>
-        <p:txBody>
-          <a:bodyPr wrap="square" lIns="0" tIns="0" rIns="0" bIns="0" rtlCol="0" anchor="ctr"/>
-          <a:lstStyle/>
-          <a:p>
-            <a:pPr indent="0" marL="0">
-              <a:buNone/>
-            </a:pPr>
-            <a:r>
-              <a:rPr lang="en-US" sz="850" dirty="0">
-                <a:solidFill>
-                  <a:srgbClr val="CCCCCC"/>
-                </a:solidFill>
-                <a:latin typeface="Arial" pitchFamily="34" charset="0"/>
-                <a:ea typeface="Arial" pitchFamily="34" charset="-122"/>
-                <a:cs typeface="Arial" pitchFamily="34" charset="-120"/>
-              </a:rPr>
-              <a:t>Aprire Telegram, cercare @SyntoniqaBot, eseguire /oggi e /vado. Prendere un'urgenza e completare il ciclo fino a /risolto.</a:t>
-            </a:r>
-            <a:endParaRPr lang="en-US" sz="850" dirty="0"/>
           </a:p>
         </p:txBody>
       </p:sp>
@@ -19583,1395 +17969,33 @@
           </a:p>
         </p:txBody>
       </p:sp>
-      <p:sp>
-        <p:nvSpPr>
-          <p:cNvPr id="5" name="Shape 3"/>
-          <p:cNvSpPr/>
-          <p:nvPr/>
-        </p:nvSpPr>
+      <p:pic>
+        <p:nvPicPr>
+          <p:cNvPr id="5" name="Image 0" descr="/sessions/brave-peaceful-lovelace/mockups/admin_dashboard.png">    </p:cNvPr>
+          <p:cNvPicPr>
+            <a:picLocks noChangeAspect="1"/>
+          </p:cNvPicPr>
+          <p:nvPr/>
+        </p:nvPicPr>
+        <p:blipFill>
+          <a:blip r:embed="rId1"/>
+          <a:stretch>
+            <a:fillRect/>
+          </a:stretch>
+        </p:blipFill>
         <p:spPr>
           <a:xfrm>
             <a:off x="274320" y="914400"/>
-            <a:ext cx="8595360" cy="3291840"/>
-          </a:xfrm>
-          <a:prstGeom prst="rect">
-            <a:avLst/>
-          </a:prstGeom>
-          <a:solidFill>
-            <a:srgbClr val="1A1A1A"/>
-          </a:solidFill>
-          <a:ln/>
-          <a:effectLst>
-            <a:outerShdw sx="100000" sy="100000" kx="0" ky="0" algn="bl" rotWithShape="0" blurRad="76200" dist="25400" dir="8100000">
-              <a:srgbClr val="000000">
-                <a:alpha val="40000"/>
-              </a:srgbClr>
-            </a:outerShdw>
-          </a:effectLst>
-        </p:spPr>
-      </p:sp>
-      <p:sp>
-        <p:nvSpPr>
-          <p:cNvPr id="6" name="Shape 4"/>
-          <p:cNvSpPr/>
-          <p:nvPr/>
-        </p:nvSpPr>
-        <p:spPr>
-          <a:xfrm>
-            <a:off x="274320" y="914400"/>
-            <a:ext cx="8595360" cy="274320"/>
-          </a:xfrm>
-          <a:prstGeom prst="rect">
-            <a:avLst/>
-          </a:prstGeom>
-          <a:solidFill>
-            <a:srgbClr val="2D2D2D"/>
-          </a:solidFill>
-          <a:ln/>
-        </p:spPr>
-      </p:sp>
-      <p:sp>
-        <p:nvSpPr>
-          <p:cNvPr id="7" name="Shape 5"/>
-          <p:cNvSpPr/>
-          <p:nvPr/>
-        </p:nvSpPr>
-        <p:spPr>
-          <a:xfrm>
-            <a:off x="411480" y="1005840"/>
-            <a:ext cx="91440" cy="91440"/>
-          </a:xfrm>
-          <a:prstGeom prst="ellipse">
-            <a:avLst/>
-          </a:prstGeom>
-          <a:solidFill>
-            <a:srgbClr val="C30A14"/>
-          </a:solidFill>
-          <a:ln/>
-        </p:spPr>
-      </p:sp>
-      <p:sp>
-        <p:nvSpPr>
-          <p:cNvPr id="8" name="Shape 6"/>
-          <p:cNvSpPr/>
-          <p:nvPr/>
-        </p:nvSpPr>
-        <p:spPr>
-          <a:xfrm>
-            <a:off x="594360" y="1005840"/>
-            <a:ext cx="91440" cy="91440"/>
-          </a:xfrm>
-          <a:prstGeom prst="ellipse">
-            <a:avLst/>
-          </a:prstGeom>
-          <a:solidFill>
-            <a:srgbClr val="F7B731"/>
-          </a:solidFill>
-          <a:ln/>
-        </p:spPr>
-      </p:sp>
-      <p:sp>
-        <p:nvSpPr>
-          <p:cNvPr id="9" name="Shape 7"/>
-          <p:cNvSpPr/>
-          <p:nvPr/>
-        </p:nvSpPr>
-        <p:spPr>
-          <a:xfrm>
-            <a:off x="777240" y="1005840"/>
-            <a:ext cx="91440" cy="91440"/>
-          </a:xfrm>
-          <a:prstGeom prst="ellipse">
-            <a:avLst/>
-          </a:prstGeom>
-          <a:solidFill>
-            <a:srgbClr val="34D058"/>
-          </a:solidFill>
-          <a:ln/>
-        </p:spPr>
-      </p:sp>
-      <p:sp>
-        <p:nvSpPr>
-          <p:cNvPr id="10" name="Shape 8"/>
-          <p:cNvSpPr/>
-          <p:nvPr/>
-        </p:nvSpPr>
-        <p:spPr>
-          <a:xfrm>
-            <a:off x="1005840" y="969264"/>
-            <a:ext cx="7498080" cy="164592"/>
-          </a:xfrm>
-          <a:prstGeom prst="roundRect">
-            <a:avLst>
-              <a:gd name="adj" fmla="val 22222"/>
-            </a:avLst>
-          </a:prstGeom>
-          <a:solidFill>
-            <a:srgbClr val="3A3A3A"/>
-          </a:solidFill>
-          <a:ln/>
-        </p:spPr>
-      </p:sp>
-      <p:sp>
-        <p:nvSpPr>
-          <p:cNvPr id="11" name="Text 9"/>
-          <p:cNvSpPr/>
-          <p:nvPr/>
-        </p:nvSpPr>
-        <p:spPr>
-          <a:xfrm>
-            <a:off x="1097280" y="969264"/>
-            <a:ext cx="7315200" cy="164592"/>
-          </a:xfrm>
-          <a:prstGeom prst="rect">
-            <a:avLst/>
-          </a:prstGeom>
-          <a:noFill/>
-          <a:ln/>
-        </p:spPr>
-        <p:txBody>
-          <a:bodyPr wrap="square" rtlCol="0" anchor="ctr"/>
-          <a:lstStyle/>
-          <a:p>
-            <a:pPr indent="0" marL="0">
-              <a:buNone/>
-            </a:pPr>
-            <a:r>
-              <a:rPr lang="en-US" sz="650" dirty="0">
-                <a:solidFill>
-                  <a:srgbClr val="888888"/>
-                </a:solidFill>
-                <a:latin typeface="Arial" pitchFamily="34" charset="0"/>
-                <a:ea typeface="Arial" pitchFamily="34" charset="-122"/>
-                <a:cs typeface="Arial" pitchFamily="34" charset="-120"/>
-              </a:rPr>
-              <a:t>admin_v1.html</a:t>
-            </a:r>
-            <a:endParaRPr lang="en-US" sz="650" dirty="0"/>
-          </a:p>
-        </p:txBody>
-      </p:sp>
-      <p:sp>
-        <p:nvSpPr>
-          <p:cNvPr id="12" name="Shape 10"/>
-          <p:cNvSpPr/>
-          <p:nvPr/>
-        </p:nvSpPr>
-        <p:spPr>
-          <a:xfrm>
-            <a:off x="274320" y="1188720"/>
-            <a:ext cx="1097280" cy="3017520"/>
-          </a:xfrm>
-          <a:prstGeom prst="rect">
-            <a:avLst/>
-          </a:prstGeom>
-          <a:solidFill>
-            <a:srgbClr val="151515"/>
-          </a:solidFill>
-          <a:ln/>
-        </p:spPr>
-      </p:sp>
-      <p:sp>
-        <p:nvSpPr>
-          <p:cNvPr id="13" name="Shape 11"/>
-          <p:cNvSpPr/>
-          <p:nvPr/>
-        </p:nvSpPr>
-        <p:spPr>
-          <a:xfrm>
-            <a:off x="274320" y="1325880"/>
-            <a:ext cx="1097280" cy="256032"/>
-          </a:xfrm>
-          <a:prstGeom prst="rect">
-            <a:avLst/>
-          </a:prstGeom>
-          <a:solidFill>
-            <a:srgbClr val="C30A14"/>
-          </a:solidFill>
-          <a:ln/>
-        </p:spPr>
-      </p:sp>
-      <p:sp>
-        <p:nvSpPr>
-          <p:cNvPr id="14" name="Text 12"/>
-          <p:cNvSpPr/>
-          <p:nvPr/>
-        </p:nvSpPr>
-        <p:spPr>
-          <a:xfrm>
-            <a:off x="365760" y="1325880"/>
-            <a:ext cx="914400" cy="256032"/>
-          </a:xfrm>
-          <a:prstGeom prst="rect">
-            <a:avLst/>
-          </a:prstGeom>
-          <a:noFill/>
-          <a:ln/>
-        </p:spPr>
-        <p:txBody>
-          <a:bodyPr wrap="square" rtlCol="0" anchor="ctr"/>
-          <a:lstStyle/>
-          <a:p>
-            <a:pPr indent="0" marL="0">
-              <a:buNone/>
-            </a:pPr>
-            <a:r>
-              <a:rPr lang="en-US" sz="650" dirty="0">
-                <a:solidFill>
-                  <a:srgbClr val="FFFFFF"/>
-                </a:solidFill>
-                <a:latin typeface="Arial" pitchFamily="34" charset="0"/>
-                <a:ea typeface="Arial" pitchFamily="34" charset="-122"/>
-                <a:cs typeface="Arial" pitchFamily="34" charset="-120"/>
-              </a:rPr>
-              <a:t>Dashboard</a:t>
-            </a:r>
-            <a:endParaRPr lang="en-US" sz="650" dirty="0"/>
-          </a:p>
-        </p:txBody>
-      </p:sp>
-      <p:sp>
-        <p:nvSpPr>
-          <p:cNvPr id="15" name="Text 13"/>
-          <p:cNvSpPr/>
-          <p:nvPr/>
-        </p:nvSpPr>
-        <p:spPr>
-          <a:xfrm>
-            <a:off x="365760" y="1600200"/>
-            <a:ext cx="914400" cy="256032"/>
-          </a:xfrm>
-          <a:prstGeom prst="rect">
-            <a:avLst/>
-          </a:prstGeom>
-          <a:noFill/>
-          <a:ln/>
-        </p:spPr>
-        <p:txBody>
-          <a:bodyPr wrap="square" rtlCol="0" anchor="ctr"/>
-          <a:lstStyle/>
-          <a:p>
-            <a:pPr indent="0" marL="0">
-              <a:buNone/>
-            </a:pPr>
-            <a:r>
-              <a:rPr lang="en-US" sz="650" dirty="0">
-                <a:solidFill>
-                  <a:srgbClr val="888888"/>
-                </a:solidFill>
-                <a:latin typeface="Arial" pitchFamily="34" charset="0"/>
-                <a:ea typeface="Arial" pitchFamily="34" charset="-122"/>
-                <a:cs typeface="Arial" pitchFamily="34" charset="-120"/>
-              </a:rPr>
-              <a:t>Urgenze</a:t>
-            </a:r>
-            <a:endParaRPr lang="en-US" sz="650" dirty="0"/>
-          </a:p>
-        </p:txBody>
-      </p:sp>
-      <p:sp>
-        <p:nvSpPr>
-          <p:cNvPr id="16" name="Text 14"/>
-          <p:cNvSpPr/>
-          <p:nvPr/>
-        </p:nvSpPr>
-        <p:spPr>
-          <a:xfrm>
-            <a:off x="365760" y="1874520"/>
-            <a:ext cx="914400" cy="256032"/>
-          </a:xfrm>
-          <a:prstGeom prst="rect">
-            <a:avLst/>
-          </a:prstGeom>
-          <a:noFill/>
-          <a:ln/>
-        </p:spPr>
-        <p:txBody>
-          <a:bodyPr wrap="square" rtlCol="0" anchor="ctr"/>
-          <a:lstStyle/>
-          <a:p>
-            <a:pPr indent="0" marL="0">
-              <a:buNone/>
-            </a:pPr>
-            <a:r>
-              <a:rPr lang="en-US" sz="650" dirty="0">
-                <a:solidFill>
-                  <a:srgbClr val="888888"/>
-                </a:solidFill>
-                <a:latin typeface="Arial" pitchFamily="34" charset="0"/>
-                <a:ea typeface="Arial" pitchFamily="34" charset="-122"/>
-                <a:cs typeface="Arial" pitchFamily="34" charset="-120"/>
-              </a:rPr>
-              <a:t>Piano</a:t>
-            </a:r>
-            <a:endParaRPr lang="en-US" sz="650" dirty="0"/>
-          </a:p>
-        </p:txBody>
-      </p:sp>
-      <p:sp>
-        <p:nvSpPr>
-          <p:cNvPr id="17" name="Text 15"/>
-          <p:cNvSpPr/>
-          <p:nvPr/>
-        </p:nvSpPr>
-        <p:spPr>
-          <a:xfrm>
-            <a:off x="365760" y="2148840"/>
-            <a:ext cx="914400" cy="256032"/>
-          </a:xfrm>
-          <a:prstGeom prst="rect">
-            <a:avLst/>
-          </a:prstGeom>
-          <a:noFill/>
-          <a:ln/>
-        </p:spPr>
-        <p:txBody>
-          <a:bodyPr wrap="square" rtlCol="0" anchor="ctr"/>
-          <a:lstStyle/>
-          <a:p>
-            <a:pPr indent="0" marL="0">
-              <a:buNone/>
-            </a:pPr>
-            <a:r>
-              <a:rPr lang="en-US" sz="650" dirty="0">
-                <a:solidFill>
-                  <a:srgbClr val="888888"/>
-                </a:solidFill>
-                <a:latin typeface="Arial" pitchFamily="34" charset="0"/>
-                <a:ea typeface="Arial" pitchFamily="34" charset="-122"/>
-                <a:cs typeface="Arial" pitchFamily="34" charset="-120"/>
-              </a:rPr>
-              <a:t>Ordini</a:t>
-            </a:r>
-            <a:endParaRPr lang="en-US" sz="650" dirty="0"/>
-          </a:p>
-        </p:txBody>
-      </p:sp>
-      <p:sp>
-        <p:nvSpPr>
-          <p:cNvPr id="18" name="Text 16"/>
-          <p:cNvSpPr/>
-          <p:nvPr/>
-        </p:nvSpPr>
-        <p:spPr>
-          <a:xfrm>
-            <a:off x="365760" y="2423160"/>
-            <a:ext cx="914400" cy="256032"/>
-          </a:xfrm>
-          <a:prstGeom prst="rect">
-            <a:avLst/>
-          </a:prstGeom>
-          <a:noFill/>
-          <a:ln/>
-        </p:spPr>
-        <p:txBody>
-          <a:bodyPr wrap="square" rtlCol="0" anchor="ctr"/>
-          <a:lstStyle/>
-          <a:p>
-            <a:pPr indent="0" marL="0">
-              <a:buNone/>
-            </a:pPr>
-            <a:r>
-              <a:rPr lang="en-US" sz="650" dirty="0">
-                <a:solidFill>
-                  <a:srgbClr val="888888"/>
-                </a:solidFill>
-                <a:latin typeface="Arial" pitchFamily="34" charset="0"/>
-                <a:ea typeface="Arial" pitchFamily="34" charset="-122"/>
-                <a:cs typeface="Arial" pitchFamily="34" charset="-120"/>
-              </a:rPr>
-              <a:t>Clienti</a:t>
-            </a:r>
-            <a:endParaRPr lang="en-US" sz="650" dirty="0"/>
-          </a:p>
-        </p:txBody>
-      </p:sp>
-      <p:sp>
-        <p:nvSpPr>
-          <p:cNvPr id="19" name="Text 17"/>
-          <p:cNvSpPr/>
-          <p:nvPr/>
-        </p:nvSpPr>
-        <p:spPr>
-          <a:xfrm>
-            <a:off x="365760" y="2697480"/>
-            <a:ext cx="914400" cy="256032"/>
-          </a:xfrm>
-          <a:prstGeom prst="rect">
-            <a:avLst/>
-          </a:prstGeom>
-          <a:noFill/>
-          <a:ln/>
-        </p:spPr>
-        <p:txBody>
-          <a:bodyPr wrap="square" rtlCol="0" anchor="ctr"/>
-          <a:lstStyle/>
-          <a:p>
-            <a:pPr indent="0" marL="0">
-              <a:buNone/>
-            </a:pPr>
-            <a:r>
-              <a:rPr lang="en-US" sz="650" dirty="0">
-                <a:solidFill>
-                  <a:srgbClr val="888888"/>
-                </a:solidFill>
-                <a:latin typeface="Arial" pitchFamily="34" charset="0"/>
-                <a:ea typeface="Arial" pitchFamily="34" charset="-122"/>
-                <a:cs typeface="Arial" pitchFamily="34" charset="-120"/>
-              </a:rPr>
-              <a:t>Macchine</a:t>
-            </a:r>
-            <a:endParaRPr lang="en-US" sz="650" dirty="0"/>
-          </a:p>
-        </p:txBody>
-      </p:sp>
-      <p:sp>
-        <p:nvSpPr>
-          <p:cNvPr id="20" name="Text 18"/>
-          <p:cNvSpPr/>
-          <p:nvPr/>
-        </p:nvSpPr>
-        <p:spPr>
-          <a:xfrm>
-            <a:off x="365760" y="2971800"/>
-            <a:ext cx="914400" cy="256032"/>
-          </a:xfrm>
-          <a:prstGeom prst="rect">
-            <a:avLst/>
-          </a:prstGeom>
-          <a:noFill/>
-          <a:ln/>
-        </p:spPr>
-        <p:txBody>
-          <a:bodyPr wrap="square" rtlCol="0" anchor="ctr"/>
-          <a:lstStyle/>
-          <a:p>
-            <a:pPr indent="0" marL="0">
-              <a:buNone/>
-            </a:pPr>
-            <a:r>
-              <a:rPr lang="en-US" sz="650" dirty="0">
-                <a:solidFill>
-                  <a:srgbClr val="888888"/>
-                </a:solidFill>
-                <a:latin typeface="Arial" pitchFamily="34" charset="0"/>
-                <a:ea typeface="Arial" pitchFamily="34" charset="-122"/>
-                <a:cs typeface="Arial" pitchFamily="34" charset="-120"/>
-              </a:rPr>
-              <a:t>Mappa</a:t>
-            </a:r>
-            <a:endParaRPr lang="en-US" sz="650" dirty="0"/>
-          </a:p>
-        </p:txBody>
-      </p:sp>
-      <p:sp>
-        <p:nvSpPr>
-          <p:cNvPr id="21" name="Text 19"/>
-          <p:cNvSpPr/>
-          <p:nvPr/>
-        </p:nvSpPr>
-        <p:spPr>
-          <a:xfrm>
-            <a:off x="365760" y="3246120"/>
-            <a:ext cx="914400" cy="256032"/>
-          </a:xfrm>
-          <a:prstGeom prst="rect">
-            <a:avLst/>
-          </a:prstGeom>
-          <a:noFill/>
-          <a:ln/>
-        </p:spPr>
-        <p:txBody>
-          <a:bodyPr wrap="square" rtlCol="0" anchor="ctr"/>
-          <a:lstStyle/>
-          <a:p>
-            <a:pPr indent="0" marL="0">
-              <a:buNone/>
-            </a:pPr>
-            <a:r>
-              <a:rPr lang="en-US" sz="650" dirty="0">
-                <a:solidFill>
-                  <a:srgbClr val="888888"/>
-                </a:solidFill>
-                <a:latin typeface="Arial" pitchFamily="34" charset="0"/>
-                <a:ea typeface="Arial" pitchFamily="34" charset="-122"/>
-                <a:cs typeface="Arial" pitchFamily="34" charset="-120"/>
-              </a:rPr>
-              <a:t>KPI</a:t>
-            </a:r>
-            <a:endParaRPr lang="en-US" sz="650" dirty="0"/>
-          </a:p>
-        </p:txBody>
-      </p:sp>
-      <p:sp>
-        <p:nvSpPr>
-          <p:cNvPr id="22" name="Text 20"/>
-          <p:cNvSpPr/>
-          <p:nvPr/>
-        </p:nvSpPr>
-        <p:spPr>
-          <a:xfrm>
-            <a:off x="365760" y="3520440"/>
-            <a:ext cx="914400" cy="256032"/>
-          </a:xfrm>
-          <a:prstGeom prst="rect">
-            <a:avLst/>
-          </a:prstGeom>
-          <a:noFill/>
-          <a:ln/>
-        </p:spPr>
-        <p:txBody>
-          <a:bodyPr wrap="square" rtlCol="0" anchor="ctr"/>
-          <a:lstStyle/>
-          <a:p>
-            <a:pPr indent="0" marL="0">
-              <a:buNone/>
-            </a:pPr>
-            <a:r>
-              <a:rPr lang="en-US" sz="650" dirty="0">
-                <a:solidFill>
-                  <a:srgbClr val="888888"/>
-                </a:solidFill>
-                <a:latin typeface="Arial" pitchFamily="34" charset="0"/>
-                <a:ea typeface="Arial" pitchFamily="34" charset="-122"/>
-                <a:cs typeface="Arial" pitchFamily="34" charset="-120"/>
-              </a:rPr>
-              <a:t>Config</a:t>
-            </a:r>
-            <a:endParaRPr lang="en-US" sz="650" dirty="0"/>
-          </a:p>
-        </p:txBody>
-      </p:sp>
-      <p:sp>
-        <p:nvSpPr>
-          <p:cNvPr id="23" name="Shape 21"/>
-          <p:cNvSpPr/>
-          <p:nvPr/>
-        </p:nvSpPr>
-        <p:spPr>
-          <a:xfrm>
-            <a:off x="1463040" y="1325880"/>
-            <a:ext cx="1691640" cy="594360"/>
-          </a:xfrm>
-          <a:prstGeom prst="rect">
-            <a:avLst/>
-          </a:prstGeom>
-          <a:solidFill>
-            <a:srgbClr val="222222"/>
-          </a:solidFill>
-          <a:ln/>
-        </p:spPr>
-      </p:sp>
-      <p:sp>
-        <p:nvSpPr>
-          <p:cNvPr id="24" name="Text 22"/>
-          <p:cNvSpPr/>
-          <p:nvPr/>
-        </p:nvSpPr>
-        <p:spPr>
-          <a:xfrm>
-            <a:off x="1554480" y="1325880"/>
-            <a:ext cx="914400" cy="365760"/>
-          </a:xfrm>
-          <a:prstGeom prst="rect">
-            <a:avLst/>
-          </a:prstGeom>
-          <a:noFill/>
-          <a:ln/>
-        </p:spPr>
-        <p:txBody>
-          <a:bodyPr wrap="square" rtlCol="0" anchor="ctr"/>
-          <a:lstStyle/>
-          <a:p>
-            <a:pPr indent="0" marL="0">
-              <a:buNone/>
-            </a:pPr>
-            <a:r>
-              <a:rPr lang="en-US" sz="1600" b="1" dirty="0">
-                <a:solidFill>
-                  <a:srgbClr val="C30A14"/>
-                </a:solidFill>
-                <a:latin typeface="Arial Black" pitchFamily="34" charset="0"/>
-                <a:ea typeface="Arial Black" pitchFamily="34" charset="-122"/>
-                <a:cs typeface="Arial Black" pitchFamily="34" charset="-120"/>
-              </a:rPr>
-              <a:t>12</a:t>
-            </a:r>
-            <a:endParaRPr lang="en-US" sz="1600" dirty="0"/>
-          </a:p>
-        </p:txBody>
-      </p:sp>
-      <p:sp>
-        <p:nvSpPr>
-          <p:cNvPr id="25" name="Text 23"/>
-          <p:cNvSpPr/>
-          <p:nvPr/>
-        </p:nvSpPr>
-        <p:spPr>
-          <a:xfrm>
-            <a:off x="1554480" y="1645920"/>
-            <a:ext cx="1463040" cy="228600"/>
-          </a:xfrm>
-          <a:prstGeom prst="rect">
-            <a:avLst/>
-          </a:prstGeom>
-          <a:noFill/>
-          <a:ln/>
-        </p:spPr>
-        <p:txBody>
-          <a:bodyPr wrap="square" rtlCol="0" anchor="ctr"/>
-          <a:lstStyle/>
-          <a:p>
-            <a:pPr indent="0" marL="0">
-              <a:buNone/>
-            </a:pPr>
-            <a:r>
-              <a:rPr lang="en-US" sz="600" dirty="0">
-                <a:solidFill>
-                  <a:srgbClr val="888888"/>
-                </a:solidFill>
-                <a:latin typeface="Arial" pitchFamily="34" charset="0"/>
-                <a:ea typeface="Arial" pitchFamily="34" charset="-122"/>
-                <a:cs typeface="Arial" pitchFamily="34" charset="-120"/>
-              </a:rPr>
-              <a:t>Urgenze Aperte</a:t>
-            </a:r>
-            <a:endParaRPr lang="en-US" sz="600" dirty="0"/>
-          </a:p>
-        </p:txBody>
-      </p:sp>
-      <p:sp>
-        <p:nvSpPr>
-          <p:cNvPr id="26" name="Shape 24"/>
-          <p:cNvSpPr/>
-          <p:nvPr/>
-        </p:nvSpPr>
-        <p:spPr>
-          <a:xfrm>
-            <a:off x="3291840" y="1325880"/>
-            <a:ext cx="1691640" cy="594360"/>
-          </a:xfrm>
-          <a:prstGeom prst="rect">
-            <a:avLst/>
-          </a:prstGeom>
-          <a:solidFill>
-            <a:srgbClr val="222222"/>
-          </a:solidFill>
-          <a:ln/>
-        </p:spPr>
-      </p:sp>
-      <p:sp>
-        <p:nvSpPr>
-          <p:cNvPr id="27" name="Text 25"/>
-          <p:cNvSpPr/>
-          <p:nvPr/>
-        </p:nvSpPr>
-        <p:spPr>
-          <a:xfrm>
-            <a:off x="3383280" y="1325880"/>
-            <a:ext cx="914400" cy="365760"/>
-          </a:xfrm>
-          <a:prstGeom prst="rect">
-            <a:avLst/>
-          </a:prstGeom>
-          <a:noFill/>
-          <a:ln/>
-        </p:spPr>
-        <p:txBody>
-          <a:bodyPr wrap="square" rtlCol="0" anchor="ctr"/>
-          <a:lstStyle/>
-          <a:p>
-            <a:pPr indent="0" marL="0">
-              <a:buNone/>
-            </a:pPr>
-            <a:r>
-              <a:rPr lang="en-US" sz="1600" b="1" dirty="0">
-                <a:solidFill>
-                  <a:srgbClr val="3B7EF7"/>
-                </a:solidFill>
-                <a:latin typeface="Arial Black" pitchFamily="34" charset="0"/>
-                <a:ea typeface="Arial Black" pitchFamily="34" charset="-122"/>
-                <a:cs typeface="Arial Black" pitchFamily="34" charset="-120"/>
-              </a:rPr>
-              <a:t>8</a:t>
-            </a:r>
-            <a:endParaRPr lang="en-US" sz="1600" dirty="0"/>
-          </a:p>
-        </p:txBody>
-      </p:sp>
-      <p:sp>
-        <p:nvSpPr>
-          <p:cNvPr id="28" name="Text 26"/>
-          <p:cNvSpPr/>
-          <p:nvPr/>
-        </p:nvSpPr>
-        <p:spPr>
-          <a:xfrm>
-            <a:off x="3383280" y="1645920"/>
-            <a:ext cx="1463040" cy="228600"/>
-          </a:xfrm>
-          <a:prstGeom prst="rect">
-            <a:avLst/>
-          </a:prstGeom>
-          <a:noFill/>
-          <a:ln/>
-        </p:spPr>
-        <p:txBody>
-          <a:bodyPr wrap="square" rtlCol="0" anchor="ctr"/>
-          <a:lstStyle/>
-          <a:p>
-            <a:pPr indent="0" marL="0">
-              <a:buNone/>
-            </a:pPr>
-            <a:r>
-              <a:rPr lang="en-US" sz="600" dirty="0">
-                <a:solidFill>
-                  <a:srgbClr val="888888"/>
-                </a:solidFill>
-                <a:latin typeface="Arial" pitchFamily="34" charset="0"/>
-                <a:ea typeface="Arial" pitchFamily="34" charset="-122"/>
-                <a:cs typeface="Arial" pitchFamily="34" charset="-120"/>
-              </a:rPr>
-              <a:t>Interventi Oggi</a:t>
-            </a:r>
-            <a:endParaRPr lang="en-US" sz="600" dirty="0"/>
-          </a:p>
-        </p:txBody>
-      </p:sp>
-      <p:sp>
-        <p:nvSpPr>
-          <p:cNvPr id="29" name="Shape 27"/>
-          <p:cNvSpPr/>
-          <p:nvPr/>
-        </p:nvSpPr>
-        <p:spPr>
-          <a:xfrm>
-            <a:off x="5120640" y="1325880"/>
-            <a:ext cx="1691640" cy="594360"/>
-          </a:xfrm>
-          <a:prstGeom prst="rect">
-            <a:avLst/>
-          </a:prstGeom>
-          <a:solidFill>
-            <a:srgbClr val="222222"/>
-          </a:solidFill>
-          <a:ln/>
-        </p:spPr>
-      </p:sp>
-      <p:sp>
-        <p:nvSpPr>
-          <p:cNvPr id="30" name="Text 28"/>
-          <p:cNvSpPr/>
-          <p:nvPr/>
-        </p:nvSpPr>
-        <p:spPr>
-          <a:xfrm>
-            <a:off x="5212080" y="1325880"/>
-            <a:ext cx="914400" cy="365760"/>
-          </a:xfrm>
-          <a:prstGeom prst="rect">
-            <a:avLst/>
-          </a:prstGeom>
-          <a:noFill/>
-          <a:ln/>
-        </p:spPr>
-        <p:txBody>
-          <a:bodyPr wrap="square" rtlCol="0" anchor="ctr"/>
-          <a:lstStyle/>
-          <a:p>
-            <a:pPr indent="0" marL="0">
-              <a:buNone/>
-            </a:pPr>
-            <a:r>
-              <a:rPr lang="en-US" sz="1600" b="1" dirty="0">
-                <a:solidFill>
-                  <a:srgbClr val="34D058"/>
-                </a:solidFill>
-                <a:latin typeface="Arial Black" pitchFamily="34" charset="0"/>
-                <a:ea typeface="Arial Black" pitchFamily="34" charset="-122"/>
-                <a:cs typeface="Arial Black" pitchFamily="34" charset="-120"/>
-              </a:rPr>
-              <a:t>94%</a:t>
-            </a:r>
-            <a:endParaRPr lang="en-US" sz="1600" dirty="0"/>
-          </a:p>
-        </p:txBody>
-      </p:sp>
-      <p:sp>
-        <p:nvSpPr>
-          <p:cNvPr id="31" name="Text 29"/>
-          <p:cNvSpPr/>
-          <p:nvPr/>
-        </p:nvSpPr>
-        <p:spPr>
-          <a:xfrm>
-            <a:off x="5212080" y="1645920"/>
-            <a:ext cx="1463040" cy="228600"/>
-          </a:xfrm>
-          <a:prstGeom prst="rect">
-            <a:avLst/>
-          </a:prstGeom>
-          <a:noFill/>
-          <a:ln/>
-        </p:spPr>
-        <p:txBody>
-          <a:bodyPr wrap="square" rtlCol="0" anchor="ctr"/>
-          <a:lstStyle/>
-          <a:p>
-            <a:pPr indent="0" marL="0">
-              <a:buNone/>
-            </a:pPr>
-            <a:r>
-              <a:rPr lang="en-US" sz="600" dirty="0">
-                <a:solidFill>
-                  <a:srgbClr val="888888"/>
-                </a:solidFill>
-                <a:latin typeface="Arial" pitchFamily="34" charset="0"/>
-                <a:ea typeface="Arial" pitchFamily="34" charset="-122"/>
-                <a:cs typeface="Arial" pitchFamily="34" charset="-120"/>
-              </a:rPr>
-              <a:t>SLA Compliance</a:t>
-            </a:r>
-            <a:endParaRPr lang="en-US" sz="600" dirty="0"/>
-          </a:p>
-        </p:txBody>
-      </p:sp>
-      <p:sp>
-        <p:nvSpPr>
-          <p:cNvPr id="32" name="Shape 30"/>
-          <p:cNvSpPr/>
-          <p:nvPr/>
-        </p:nvSpPr>
-        <p:spPr>
-          <a:xfrm>
-            <a:off x="6949440" y="1325880"/>
-            <a:ext cx="1691640" cy="594360"/>
-          </a:xfrm>
-          <a:prstGeom prst="rect">
-            <a:avLst/>
-          </a:prstGeom>
-          <a:solidFill>
-            <a:srgbClr val="222222"/>
-          </a:solidFill>
-          <a:ln/>
-        </p:spPr>
-      </p:sp>
-      <p:sp>
-        <p:nvSpPr>
-          <p:cNvPr id="33" name="Text 31"/>
-          <p:cNvSpPr/>
-          <p:nvPr/>
-        </p:nvSpPr>
-        <p:spPr>
-          <a:xfrm>
-            <a:off x="7040880" y="1325880"/>
-            <a:ext cx="914400" cy="365760"/>
-          </a:xfrm>
-          <a:prstGeom prst="rect">
-            <a:avLst/>
-          </a:prstGeom>
-          <a:noFill/>
-          <a:ln/>
-        </p:spPr>
-        <p:txBody>
-          <a:bodyPr wrap="square" rtlCol="0" anchor="ctr"/>
-          <a:lstStyle/>
-          <a:p>
-            <a:pPr indent="0" marL="0">
-              <a:buNone/>
-            </a:pPr>
-            <a:r>
-              <a:rPr lang="en-US" sz="1600" b="1" dirty="0">
-                <a:solidFill>
-                  <a:srgbClr val="F7B731"/>
-                </a:solidFill>
-                <a:latin typeface="Arial Black" pitchFamily="34" charset="0"/>
-                <a:ea typeface="Arial Black" pitchFamily="34" charset="-122"/>
-                <a:cs typeface="Arial Black" pitchFamily="34" charset="-120"/>
-              </a:rPr>
-              <a:t>3</a:t>
-            </a:r>
-            <a:endParaRPr lang="en-US" sz="1600" dirty="0"/>
-          </a:p>
-        </p:txBody>
-      </p:sp>
-      <p:sp>
-        <p:nvSpPr>
-          <p:cNvPr id="34" name="Text 32"/>
-          <p:cNvSpPr/>
-          <p:nvPr/>
-        </p:nvSpPr>
-        <p:spPr>
-          <a:xfrm>
-            <a:off x="7040880" y="1645920"/>
-            <a:ext cx="1463040" cy="228600"/>
-          </a:xfrm>
-          <a:prstGeom prst="rect">
-            <a:avLst/>
-          </a:prstGeom>
-          <a:noFill/>
-          <a:ln/>
-        </p:spPr>
-        <p:txBody>
-          <a:bodyPr wrap="square" rtlCol="0" anchor="ctr"/>
-          <a:lstStyle/>
-          <a:p>
-            <a:pPr indent="0" marL="0">
-              <a:buNone/>
-            </a:pPr>
-            <a:r>
-              <a:rPr lang="en-US" sz="600" dirty="0">
-                <a:solidFill>
-                  <a:srgbClr val="888888"/>
-                </a:solidFill>
-                <a:latin typeface="Arial" pitchFamily="34" charset="0"/>
-                <a:ea typeface="Arial" pitchFamily="34" charset="-122"/>
-                <a:cs typeface="Arial" pitchFamily="34" charset="-120"/>
-              </a:rPr>
-              <a:t>Ordini Pendenti</a:t>
-            </a:r>
-            <a:endParaRPr lang="en-US" sz="600" dirty="0"/>
-          </a:p>
-        </p:txBody>
-      </p:sp>
-      <p:sp>
-        <p:nvSpPr>
-          <p:cNvPr id="35" name="Shape 33"/>
-          <p:cNvSpPr/>
-          <p:nvPr/>
-        </p:nvSpPr>
-        <p:spPr>
-          <a:xfrm>
-            <a:off x="1463040" y="2103120"/>
-            <a:ext cx="4389120" cy="201168"/>
-          </a:xfrm>
-          <a:prstGeom prst="rect">
-            <a:avLst/>
-          </a:prstGeom>
-          <a:solidFill>
-            <a:srgbClr val="333333"/>
-          </a:solidFill>
-          <a:ln/>
-        </p:spPr>
-      </p:sp>
-      <p:sp>
-        <p:nvSpPr>
-          <p:cNvPr id="36" name="Text 34"/>
-          <p:cNvSpPr/>
-          <p:nvPr/>
-        </p:nvSpPr>
-        <p:spPr>
-          <a:xfrm>
-            <a:off x="1554480" y="2103120"/>
-            <a:ext cx="4206240" cy="201168"/>
-          </a:xfrm>
-          <a:prstGeom prst="rect">
-            <a:avLst/>
-          </a:prstGeom>
-          <a:noFill/>
-          <a:ln/>
-        </p:spPr>
-        <p:txBody>
-          <a:bodyPr wrap="square" rtlCol="0" anchor="ctr"/>
-          <a:lstStyle/>
-          <a:p>
-            <a:pPr indent="0" marL="0">
-              <a:buNone/>
-            </a:pPr>
-            <a:r>
-              <a:rPr lang="en-US" sz="550" dirty="0">
-                <a:solidFill>
-                  <a:srgbClr val="888888"/>
-                </a:solidFill>
-                <a:latin typeface="Courier New" pitchFamily="34" charset="0"/>
-                <a:ea typeface="Courier New" pitchFamily="34" charset="-122"/>
-                <a:cs typeface="Courier New" pitchFamily="34" charset="-120"/>
-              </a:rPr>
-              <a:t>ID          Cliente          Stato          Tecnico</a:t>
-            </a:r>
-            <a:endParaRPr lang="en-US" sz="550" dirty="0"/>
-          </a:p>
-        </p:txBody>
-      </p:sp>
-      <p:sp>
-        <p:nvSpPr>
-          <p:cNvPr id="37" name="Shape 35"/>
-          <p:cNvSpPr/>
-          <p:nvPr/>
-        </p:nvSpPr>
-        <p:spPr>
-          <a:xfrm>
-            <a:off x="1463040" y="2322576"/>
-            <a:ext cx="4389120" cy="173736"/>
-          </a:xfrm>
-          <a:prstGeom prst="rect">
-            <a:avLst/>
-          </a:prstGeom>
-          <a:solidFill>
-            <a:srgbClr val="111111"/>
-          </a:solidFill>
-          <a:ln/>
-        </p:spPr>
-      </p:sp>
-      <p:sp>
-        <p:nvSpPr>
-          <p:cNvPr id="38" name="Text 36"/>
-          <p:cNvSpPr/>
-          <p:nvPr/>
-        </p:nvSpPr>
-        <p:spPr>
-          <a:xfrm>
-            <a:off x="1554480" y="2322576"/>
-            <a:ext cx="4206240" cy="173736"/>
-          </a:xfrm>
-          <a:prstGeom prst="rect">
-            <a:avLst/>
-          </a:prstGeom>
-          <a:noFill/>
-          <a:ln/>
-        </p:spPr>
-        <p:txBody>
-          <a:bodyPr wrap="square" rtlCol="0" anchor="ctr"/>
-          <a:lstStyle/>
-          <a:p>
-            <a:pPr indent="0" marL="0">
-              <a:buNone/>
-            </a:pPr>
-            <a:r>
-              <a:rPr lang="en-US" sz="500" dirty="0">
-                <a:solidFill>
-                  <a:srgbClr val="CCCCCC"/>
-                </a:solidFill>
-                <a:latin typeface="Courier New" pitchFamily="34" charset="0"/>
-                <a:ea typeface="Courier New" pitchFamily="34" charset="-122"/>
-                <a:cs typeface="Courier New" pitchFamily="34" charset="-120"/>
-              </a:rPr>
-              <a:t>URG_042  Az. Rossi      IN_CORSO    Jacopo</a:t>
-            </a:r>
-            <a:endParaRPr lang="en-US" sz="500" dirty="0"/>
-          </a:p>
-        </p:txBody>
-      </p:sp>
-      <p:sp>
-        <p:nvSpPr>
-          <p:cNvPr id="39" name="Shape 37"/>
-          <p:cNvSpPr/>
-          <p:nvPr/>
-        </p:nvSpPr>
-        <p:spPr>
-          <a:xfrm>
-            <a:off x="1463040" y="2505456"/>
-            <a:ext cx="4389120" cy="173736"/>
-          </a:xfrm>
-          <a:prstGeom prst="rect">
-            <a:avLst/>
-          </a:prstGeom>
-          <a:solidFill>
-            <a:srgbClr val="0D0D0D"/>
-          </a:solidFill>
-          <a:ln/>
-        </p:spPr>
-      </p:sp>
-      <p:sp>
-        <p:nvSpPr>
-          <p:cNvPr id="40" name="Text 38"/>
-          <p:cNvSpPr/>
-          <p:nvPr/>
-        </p:nvSpPr>
-        <p:spPr>
-          <a:xfrm>
-            <a:off x="1554480" y="2505456"/>
-            <a:ext cx="4206240" cy="173736"/>
-          </a:xfrm>
-          <a:prstGeom prst="rect">
-            <a:avLst/>
-          </a:prstGeom>
-          <a:noFill/>
-          <a:ln/>
-        </p:spPr>
-        <p:txBody>
-          <a:bodyPr wrap="square" rtlCol="0" anchor="ctr"/>
-          <a:lstStyle/>
-          <a:p>
-            <a:pPr indent="0" marL="0">
-              <a:buNone/>
-            </a:pPr>
-            <a:r>
-              <a:rPr lang="en-US" sz="500" dirty="0">
-                <a:solidFill>
-                  <a:srgbClr val="CCCCCC"/>
-                </a:solidFill>
-                <a:latin typeface="Courier New" pitchFamily="34" charset="0"/>
-                <a:ea typeface="Courier New" pitchFamily="34" charset="-122"/>
-                <a:cs typeface="Courier New" pitchFamily="34" charset="-120"/>
-              </a:rPr>
-              <a:t>URG_041  Coop Verdi     ASSEGNATA   Anton</a:t>
-            </a:r>
-            <a:endParaRPr lang="en-US" sz="500" dirty="0"/>
-          </a:p>
-        </p:txBody>
-      </p:sp>
-      <p:sp>
-        <p:nvSpPr>
-          <p:cNvPr id="41" name="Shape 39"/>
-          <p:cNvSpPr/>
-          <p:nvPr/>
-        </p:nvSpPr>
-        <p:spPr>
-          <a:xfrm>
-            <a:off x="1463040" y="2688336"/>
-            <a:ext cx="4389120" cy="173736"/>
-          </a:xfrm>
-          <a:prstGeom prst="rect">
-            <a:avLst/>
-          </a:prstGeom>
-          <a:solidFill>
-            <a:srgbClr val="111111"/>
-          </a:solidFill>
-          <a:ln/>
-        </p:spPr>
-      </p:sp>
-      <p:sp>
-        <p:nvSpPr>
-          <p:cNvPr id="42" name="Text 40"/>
-          <p:cNvSpPr/>
-          <p:nvPr/>
-        </p:nvSpPr>
-        <p:spPr>
-          <a:xfrm>
-            <a:off x="1554480" y="2688336"/>
-            <a:ext cx="4206240" cy="173736"/>
-          </a:xfrm>
-          <a:prstGeom prst="rect">
-            <a:avLst/>
-          </a:prstGeom>
-          <a:noFill/>
-          <a:ln/>
-        </p:spPr>
-        <p:txBody>
-          <a:bodyPr wrap="square" rtlCol="0" anchor="ctr"/>
-          <a:lstStyle/>
-          <a:p>
-            <a:pPr indent="0" marL="0">
-              <a:buNone/>
-            </a:pPr>
-            <a:r>
-              <a:rPr lang="en-US" sz="500" dirty="0">
-                <a:solidFill>
-                  <a:srgbClr val="CCCCCC"/>
-                </a:solidFill>
-                <a:latin typeface="Courier New" pitchFamily="34" charset="0"/>
-                <a:ea typeface="Courier New" pitchFamily="34" charset="-122"/>
-                <a:cs typeface="Courier New" pitchFamily="34" charset="-120"/>
-              </a:rPr>
-              <a:t>URG_040  Latteria B.    APERTA      —</a:t>
-            </a:r>
-            <a:endParaRPr lang="en-US" sz="500" dirty="0"/>
-          </a:p>
-        </p:txBody>
-      </p:sp>
-      <p:sp>
-        <p:nvSpPr>
-          <p:cNvPr id="43" name="Shape 41"/>
-          <p:cNvSpPr/>
-          <p:nvPr/>
-        </p:nvSpPr>
-        <p:spPr>
-          <a:xfrm>
-            <a:off x="6126480" y="2103120"/>
-            <a:ext cx="2560320" cy="1554480"/>
-          </a:xfrm>
-          <a:prstGeom prst="rect">
-            <a:avLst/>
-          </a:prstGeom>
-          <a:solidFill>
-            <a:srgbClr val="222222"/>
-          </a:solidFill>
-          <a:ln/>
-        </p:spPr>
-      </p:sp>
-      <p:sp>
-        <p:nvSpPr>
-          <p:cNvPr id="44" name="Text 42"/>
-          <p:cNvSpPr/>
-          <p:nvPr/>
-        </p:nvSpPr>
-        <p:spPr>
-          <a:xfrm>
-            <a:off x="6217920" y="2148840"/>
-            <a:ext cx="2377440" cy="182880"/>
-          </a:xfrm>
-          <a:prstGeom prst="rect">
-            <a:avLst/>
-          </a:prstGeom>
-          <a:noFill/>
-          <a:ln/>
-        </p:spPr>
-        <p:txBody>
-          <a:bodyPr wrap="square" rtlCol="0" anchor="ctr"/>
-          <a:lstStyle/>
-          <a:p>
-            <a:pPr indent="0" marL="0">
-              <a:buNone/>
-            </a:pPr>
-            <a:r>
-              <a:rPr lang="en-US" sz="600" b="1" dirty="0">
-                <a:solidFill>
-                  <a:srgbClr val="FFFFFF"/>
-                </a:solidFill>
-                <a:latin typeface="Arial" pitchFamily="34" charset="0"/>
-                <a:ea typeface="Arial" pitchFamily="34" charset="-122"/>
-                <a:cs typeface="Arial" pitchFamily="34" charset="-120"/>
-              </a:rPr>
-              <a:t>Urgenze Ultimi 7 Giorni</a:t>
-            </a:r>
-            <a:endParaRPr lang="en-US" sz="600" dirty="0"/>
-          </a:p>
-        </p:txBody>
-      </p:sp>
-      <p:sp>
-        <p:nvSpPr>
-          <p:cNvPr id="45" name="Shape 43"/>
-          <p:cNvSpPr/>
-          <p:nvPr/>
-        </p:nvSpPr>
-        <p:spPr>
-          <a:xfrm>
-            <a:off x="6309360" y="2971800"/>
-            <a:ext cx="182880" cy="411480"/>
-          </a:xfrm>
-          <a:prstGeom prst="rect">
-            <a:avLst/>
-          </a:prstGeom>
-          <a:solidFill>
-            <a:srgbClr val="3B7EF7"/>
-          </a:solidFill>
-          <a:ln/>
-        </p:spPr>
-      </p:sp>
-      <p:sp>
-        <p:nvSpPr>
-          <p:cNvPr id="46" name="Shape 44"/>
-          <p:cNvSpPr/>
-          <p:nvPr/>
-        </p:nvSpPr>
-        <p:spPr>
-          <a:xfrm>
-            <a:off x="6629400" y="3136392"/>
-            <a:ext cx="182880" cy="246888"/>
-          </a:xfrm>
-          <a:prstGeom prst="rect">
-            <a:avLst/>
-          </a:prstGeom>
-          <a:solidFill>
-            <a:srgbClr val="3B7EF7"/>
-          </a:solidFill>
-          <a:ln/>
-        </p:spPr>
-      </p:sp>
-      <p:sp>
-        <p:nvSpPr>
-          <p:cNvPr id="47" name="Shape 45"/>
-          <p:cNvSpPr/>
-          <p:nvPr/>
-        </p:nvSpPr>
-        <p:spPr>
-          <a:xfrm>
-            <a:off x="6949440" y="2807208"/>
-            <a:ext cx="182880" cy="576072"/>
-          </a:xfrm>
-          <a:prstGeom prst="rect">
-            <a:avLst/>
-          </a:prstGeom>
-          <a:solidFill>
-            <a:srgbClr val="3B7EF7"/>
-          </a:solidFill>
-          <a:ln/>
-        </p:spPr>
-      </p:sp>
-      <p:sp>
-        <p:nvSpPr>
-          <p:cNvPr id="48" name="Shape 46"/>
-          <p:cNvSpPr/>
-          <p:nvPr/>
-        </p:nvSpPr>
-        <p:spPr>
-          <a:xfrm>
-            <a:off x="7269480" y="3054096"/>
-            <a:ext cx="182880" cy="329184"/>
-          </a:xfrm>
-          <a:prstGeom prst="rect">
-            <a:avLst/>
-          </a:prstGeom>
-          <a:solidFill>
-            <a:srgbClr val="3B7EF7"/>
-          </a:solidFill>
-          <a:ln/>
-        </p:spPr>
-      </p:sp>
-      <p:sp>
-        <p:nvSpPr>
-          <p:cNvPr id="49" name="Shape 47"/>
-          <p:cNvSpPr/>
-          <p:nvPr/>
-        </p:nvSpPr>
-        <p:spPr>
-          <a:xfrm>
-            <a:off x="7589520" y="2889504"/>
-            <a:ext cx="182880" cy="493776"/>
-          </a:xfrm>
-          <a:prstGeom prst="rect">
-            <a:avLst/>
-          </a:prstGeom>
-          <a:solidFill>
-            <a:srgbClr val="3B7EF7"/>
-          </a:solidFill>
-          <a:ln/>
-        </p:spPr>
-      </p:sp>
-      <p:sp>
-        <p:nvSpPr>
-          <p:cNvPr id="50" name="Shape 48"/>
-          <p:cNvSpPr/>
-          <p:nvPr/>
-        </p:nvSpPr>
-        <p:spPr>
-          <a:xfrm>
-            <a:off x="7909560" y="2724912"/>
-            <a:ext cx="182880" cy="658368"/>
-          </a:xfrm>
-          <a:prstGeom prst="rect">
-            <a:avLst/>
-          </a:prstGeom>
-          <a:solidFill>
-            <a:srgbClr val="3B7EF7"/>
-          </a:solidFill>
-          <a:ln/>
-        </p:spPr>
-      </p:sp>
-      <p:sp>
-        <p:nvSpPr>
-          <p:cNvPr id="51" name="Shape 49"/>
-          <p:cNvSpPr/>
-          <p:nvPr/>
-        </p:nvSpPr>
-        <p:spPr>
-          <a:xfrm>
-            <a:off x="8229600" y="3012948"/>
-            <a:ext cx="182880" cy="370332"/>
-          </a:xfrm>
-          <a:prstGeom prst="rect">
-            <a:avLst/>
-          </a:prstGeom>
-          <a:solidFill>
-            <a:srgbClr val="3B7EF7"/>
-          </a:solidFill>
-          <a:ln/>
-        </p:spPr>
-      </p:sp>
-      <p:sp>
-        <p:nvSpPr>
-          <p:cNvPr id="52" name="Shape 50"/>
+            <a:ext cx="8595360" cy="5733288"/>
+          </a:xfrm>
+          <a:prstGeom prst="rect">
+            <a:avLst/>
+          </a:prstGeom>
+        </p:spPr>
+      </p:pic>
+      <p:sp>
+        <p:nvSpPr>
+          <p:cNvPr id="6" name="Shape 3"/>
           <p:cNvSpPr/>
           <p:nvPr/>
         </p:nvSpPr>
@@ -20991,7 +18015,7 @@
       </p:sp>
       <p:sp>
         <p:nvSpPr>
-          <p:cNvPr id="53" name="Text 51"/>
+          <p:cNvPr id="7" name="Text 4"/>
           <p:cNvSpPr/>
           <p:nvPr/>
         </p:nvSpPr>
@@ -21030,7 +18054,7 @@
       </p:sp>
       <p:sp>
         <p:nvSpPr>
-          <p:cNvPr id="54" name="Text 52"/>
+          <p:cNvPr id="8" name="Text 5"/>
           <p:cNvSpPr/>
           <p:nvPr/>
         </p:nvSpPr>
@@ -21069,7 +18093,7 @@
       </p:sp>
       <p:sp>
         <p:nvSpPr>
-          <p:cNvPr id="55" name="Shape 53"/>
+          <p:cNvPr id="9" name="Shape 6"/>
           <p:cNvSpPr/>
           <p:nvPr/>
         </p:nvSpPr>
@@ -21089,7 +18113,7 @@
       </p:sp>
       <p:sp>
         <p:nvSpPr>
-          <p:cNvPr id="56" name="Text 54"/>
+          <p:cNvPr id="10" name="Text 7"/>
           <p:cNvSpPr/>
           <p:nvPr/>
         </p:nvSpPr>
@@ -21128,7 +18152,7 @@
       </p:sp>
       <p:sp>
         <p:nvSpPr>
-          <p:cNvPr id="57" name="Text 55"/>
+          <p:cNvPr id="11" name="Text 8"/>
           <p:cNvSpPr/>
           <p:nvPr/>
         </p:nvSpPr>
@@ -21167,7 +18191,7 @@
       </p:sp>
       <p:sp>
         <p:nvSpPr>
-          <p:cNvPr id="58" name="Shape 56"/>
+          <p:cNvPr id="12" name="Shape 9"/>
           <p:cNvSpPr/>
           <p:nvPr/>
         </p:nvSpPr>
@@ -21187,7 +18211,7 @@
       </p:sp>
       <p:sp>
         <p:nvSpPr>
-          <p:cNvPr id="59" name="Text 57"/>
+          <p:cNvPr id="13" name="Text 10"/>
           <p:cNvSpPr/>
           <p:nvPr/>
         </p:nvSpPr>
@@ -21226,7 +18250,7 @@
       </p:sp>
       <p:sp>
         <p:nvSpPr>
-          <p:cNvPr id="60" name="Text 58"/>
+          <p:cNvPr id="14" name="Text 11"/>
           <p:cNvSpPr/>
           <p:nvPr/>
         </p:nvSpPr>
@@ -23590,22 +20614,46 @@
           </a:p>
         </p:txBody>
       </p:sp>
-      <p:sp>
-        <p:nvSpPr>
-          <p:cNvPr id="5" name="Shape 3"/>
-          <p:cNvSpPr/>
-          <p:nvPr/>
-        </p:nvSpPr>
+      <p:pic>
+        <p:nvPicPr>
+          <p:cNvPr id="5" name="Image 0" descr="/sessions/brave-peaceful-lovelace/mockups/piano_interventi.png">    </p:cNvPr>
+          <p:cNvPicPr>
+            <a:picLocks noChangeAspect="1"/>
+          </p:cNvPicPr>
+          <p:nvPr/>
+        </p:nvPicPr>
+        <p:blipFill>
+          <a:blip r:embed="rId1"/>
+          <a:stretch>
+            <a:fillRect/>
+          </a:stretch>
+        </p:blipFill>
         <p:spPr>
           <a:xfrm>
             <a:off x="274320" y="822960"/>
-            <a:ext cx="5029200" cy="2286000"/>
-          </a:xfrm>
-          <a:prstGeom prst="rect">
-            <a:avLst/>
-          </a:prstGeom>
-          <a:solidFill>
-            <a:srgbClr val="1A1A1A"/>
+            <a:ext cx="5029200" cy="3355848"/>
+          </a:xfrm>
+          <a:prstGeom prst="rect">
+            <a:avLst/>
+          </a:prstGeom>
+        </p:spPr>
+      </p:pic>
+      <p:sp>
+        <p:nvSpPr>
+          <p:cNvPr id="6" name="Shape 3"/>
+          <p:cNvSpPr/>
+          <p:nvPr/>
+        </p:nvSpPr>
+        <p:spPr>
+          <a:xfrm>
+            <a:off x="5669280" y="822960"/>
+            <a:ext cx="3200400" cy="2286000"/>
+          </a:xfrm>
+          <a:prstGeom prst="rect">
+            <a:avLst/>
+          </a:prstGeom>
+          <a:solidFill>
+            <a:srgbClr val="222222"/>
           </a:solidFill>
           <a:ln/>
           <a:effectLst>
@@ -23619,191 +20667,50 @@
       </p:sp>
       <p:sp>
         <p:nvSpPr>
-          <p:cNvPr id="6" name="Shape 4"/>
-          <p:cNvSpPr/>
-          <p:nvPr/>
-        </p:nvSpPr>
-        <p:spPr>
-          <a:xfrm>
-            <a:off x="274320" y="822960"/>
-            <a:ext cx="5029200" cy="274320"/>
-          </a:xfrm>
-          <a:prstGeom prst="rect">
-            <a:avLst/>
-          </a:prstGeom>
-          <a:solidFill>
-            <a:srgbClr val="2D2D2D"/>
-          </a:solidFill>
-          <a:ln/>
-        </p:spPr>
-      </p:sp>
-      <p:sp>
-        <p:nvSpPr>
-          <p:cNvPr id="7" name="Shape 5"/>
-          <p:cNvSpPr/>
-          <p:nvPr/>
-        </p:nvSpPr>
-        <p:spPr>
-          <a:xfrm>
-            <a:off x="411480" y="914400"/>
-            <a:ext cx="91440" cy="91440"/>
-          </a:xfrm>
-          <a:prstGeom prst="ellipse">
-            <a:avLst/>
-          </a:prstGeom>
-          <a:solidFill>
-            <a:srgbClr val="C30A14"/>
-          </a:solidFill>
-          <a:ln/>
-        </p:spPr>
-      </p:sp>
-      <p:sp>
-        <p:nvSpPr>
-          <p:cNvPr id="8" name="Shape 6"/>
-          <p:cNvSpPr/>
-          <p:nvPr/>
-        </p:nvSpPr>
-        <p:spPr>
-          <a:xfrm>
-            <a:off x="594360" y="914400"/>
-            <a:ext cx="91440" cy="91440"/>
-          </a:xfrm>
-          <a:prstGeom prst="ellipse">
-            <a:avLst/>
-          </a:prstGeom>
-          <a:solidFill>
-            <a:srgbClr val="F7B731"/>
-          </a:solidFill>
-          <a:ln/>
-        </p:spPr>
-      </p:sp>
-      <p:sp>
-        <p:nvSpPr>
-          <p:cNvPr id="9" name="Shape 7"/>
-          <p:cNvSpPr/>
-          <p:nvPr/>
-        </p:nvSpPr>
-        <p:spPr>
-          <a:xfrm>
-            <a:off x="777240" y="914400"/>
-            <a:ext cx="91440" cy="91440"/>
-          </a:xfrm>
-          <a:prstGeom prst="ellipse">
-            <a:avLst/>
-          </a:prstGeom>
-          <a:solidFill>
-            <a:srgbClr val="34D058"/>
-          </a:solidFill>
-          <a:ln/>
-        </p:spPr>
-      </p:sp>
-      <p:sp>
-        <p:nvSpPr>
-          <p:cNvPr id="10" name="Shape 8"/>
-          <p:cNvSpPr/>
-          <p:nvPr/>
-        </p:nvSpPr>
-        <p:spPr>
-          <a:xfrm>
-            <a:off x="1005840" y="877824"/>
-            <a:ext cx="3931920" cy="164592"/>
-          </a:xfrm>
-          <a:prstGeom prst="roundRect">
-            <a:avLst>
-              <a:gd name="adj" fmla="val 22222"/>
-            </a:avLst>
-          </a:prstGeom>
-          <a:solidFill>
-            <a:srgbClr val="3A3A3A"/>
-          </a:solidFill>
-          <a:ln/>
-        </p:spPr>
-      </p:sp>
-      <p:sp>
-        <p:nvSpPr>
-          <p:cNvPr id="11" name="Text 9"/>
-          <p:cNvSpPr/>
-          <p:nvPr/>
-        </p:nvSpPr>
-        <p:spPr>
-          <a:xfrm>
-            <a:off x="1097280" y="877824"/>
-            <a:ext cx="3749040" cy="164592"/>
-          </a:xfrm>
-          <a:prstGeom prst="rect">
-            <a:avLst/>
-          </a:prstGeom>
-          <a:noFill/>
-          <a:ln/>
-        </p:spPr>
-        <p:txBody>
-          <a:bodyPr wrap="square" rtlCol="0" anchor="ctr"/>
-          <a:lstStyle/>
-          <a:p>
-            <a:pPr indent="0" marL="0">
-              <a:buNone/>
-            </a:pPr>
-            <a:r>
-              <a:rPr lang="en-US" sz="650" dirty="0">
-                <a:solidFill>
-                  <a:srgbClr val="888888"/>
-                </a:solidFill>
-                <a:latin typeface="Arial" pitchFamily="34" charset="0"/>
-                <a:ea typeface="Arial" pitchFamily="34" charset="-122"/>
-                <a:cs typeface="Arial" pitchFamily="34" charset="-120"/>
-              </a:rPr>
-              <a:t>admin_v1.html</a:t>
-            </a:r>
-            <a:endParaRPr lang="en-US" sz="650" dirty="0"/>
-          </a:p>
-        </p:txBody>
-      </p:sp>
-      <p:sp>
-        <p:nvSpPr>
-          <p:cNvPr id="12" name="Shape 10"/>
-          <p:cNvSpPr/>
-          <p:nvPr/>
-        </p:nvSpPr>
-        <p:spPr>
-          <a:xfrm>
-            <a:off x="274320" y="1097280"/>
-            <a:ext cx="5029200" cy="228600"/>
-          </a:xfrm>
-          <a:prstGeom prst="rect">
-            <a:avLst/>
-          </a:prstGeom>
-          <a:solidFill>
-            <a:srgbClr val="252525"/>
-          </a:solidFill>
-          <a:ln/>
-        </p:spPr>
-      </p:sp>
-      <p:sp>
-        <p:nvSpPr>
-          <p:cNvPr id="13" name="Text 11"/>
-          <p:cNvSpPr/>
-          <p:nvPr/>
-        </p:nvSpPr>
-        <p:spPr>
-          <a:xfrm>
-            <a:off x="457200" y="1097280"/>
-            <a:ext cx="1188720" cy="228600"/>
-          </a:xfrm>
-          <a:prstGeom prst="rect">
-            <a:avLst/>
-          </a:prstGeom>
-          <a:noFill/>
-          <a:ln/>
-        </p:spPr>
-        <p:txBody>
-          <a:bodyPr wrap="square" rtlCol="0" anchor="ctr"/>
-          <a:lstStyle/>
-          <a:p>
-            <a:pPr indent="0" marL="0">
-              <a:buNone/>
-            </a:pPr>
-            <a:r>
-              <a:rPr lang="en-US" sz="700" b="1" dirty="0">
+          <p:cNvPr id="7" name="Shape 4"/>
+          <p:cNvSpPr/>
+          <p:nvPr/>
+        </p:nvSpPr>
+        <p:spPr>
+          <a:xfrm>
+            <a:off x="5669280" y="822960"/>
+            <a:ext cx="3200400" cy="36576"/>
+          </a:xfrm>
+          <a:prstGeom prst="rect">
+            <a:avLst/>
+          </a:prstGeom>
+          <a:solidFill>
+            <a:srgbClr val="8854D0"/>
+          </a:solidFill>
+          <a:ln/>
+        </p:spPr>
+      </p:sp>
+      <p:sp>
+        <p:nvSpPr>
+          <p:cNvPr id="8" name="Text 5"/>
+          <p:cNvSpPr/>
+          <p:nvPr/>
+        </p:nvSpPr>
+        <p:spPr>
+          <a:xfrm>
+            <a:off x="5852160" y="960120"/>
+            <a:ext cx="2743200" cy="274320"/>
+          </a:xfrm>
+          <a:prstGeom prst="rect">
+            <a:avLst/>
+          </a:prstGeom>
+          <a:noFill/>
+          <a:ln/>
+        </p:spPr>
+        <p:txBody>
+          <a:bodyPr wrap="square" lIns="0" tIns="0" rIns="0" bIns="0" rtlCol="0" anchor="ctr"/>
+          <a:lstStyle/>
+          <a:p>
+            <a:pPr indent="0" marL="0">
+              <a:buNone/>
+            </a:pPr>
+            <a:r>
+              <a:rPr lang="en-US" sz="1400" b="1" dirty="0">
                 <a:solidFill>
                   <a:srgbClr val="FFFFFF"/>
                 </a:solidFill>
@@ -23811,215 +20718,41 @@
                 <a:ea typeface="Arial" pitchFamily="34" charset="-122"/>
                 <a:cs typeface="Arial" pitchFamily="34" charset="-120"/>
               </a:rPr>
-              <a:t>Lista</a:t>
-            </a:r>
-            <a:endParaRPr lang="en-US" sz="700" dirty="0"/>
-          </a:p>
-        </p:txBody>
-      </p:sp>
-      <p:sp>
-        <p:nvSpPr>
-          <p:cNvPr id="14" name="Shape 12"/>
-          <p:cNvSpPr/>
-          <p:nvPr/>
-        </p:nvSpPr>
-        <p:spPr>
-          <a:xfrm>
-            <a:off x="457200" y="1298448"/>
-            <a:ext cx="1188720" cy="27432"/>
-          </a:xfrm>
-          <a:prstGeom prst="rect">
-            <a:avLst/>
-          </a:prstGeom>
-          <a:solidFill>
-            <a:srgbClr val="C30A14"/>
-          </a:solidFill>
-          <a:ln/>
-        </p:spPr>
-      </p:sp>
-      <p:sp>
-        <p:nvSpPr>
-          <p:cNvPr id="15" name="Text 13"/>
-          <p:cNvSpPr/>
-          <p:nvPr/>
-        </p:nvSpPr>
-        <p:spPr>
-          <a:xfrm>
-            <a:off x="1828800" y="1097280"/>
-            <a:ext cx="1188720" cy="228600"/>
-          </a:xfrm>
-          <a:prstGeom prst="rect">
-            <a:avLst/>
-          </a:prstGeom>
-          <a:noFill/>
-          <a:ln/>
-        </p:spPr>
-        <p:txBody>
-          <a:bodyPr wrap="square" rtlCol="0" anchor="ctr"/>
-          <a:lstStyle/>
-          <a:p>
-            <a:pPr indent="0" marL="0">
-              <a:buNone/>
-            </a:pPr>
-            <a:r>
-              <a:rPr lang="en-US" sz="700" dirty="0">
-                <a:solidFill>
-                  <a:srgbClr val="888888"/>
-                </a:solidFill>
-                <a:latin typeface="Arial" pitchFamily="34" charset="0"/>
-                <a:ea typeface="Arial" pitchFamily="34" charset="-122"/>
-                <a:cs typeface="Arial" pitchFamily="34" charset="-120"/>
-              </a:rPr>
-              <a:t>Calendario</a:t>
-            </a:r>
-            <a:endParaRPr lang="en-US" sz="700" dirty="0"/>
-          </a:p>
-        </p:txBody>
-      </p:sp>
-      <p:sp>
-        <p:nvSpPr>
-          <p:cNvPr id="16" name="Text 14"/>
-          <p:cNvSpPr/>
-          <p:nvPr/>
-        </p:nvSpPr>
-        <p:spPr>
-          <a:xfrm>
-            <a:off x="3200400" y="1097280"/>
-            <a:ext cx="1188720" cy="228600"/>
-          </a:xfrm>
-          <a:prstGeom prst="rect">
-            <a:avLst/>
-          </a:prstGeom>
-          <a:noFill/>
-          <a:ln/>
-        </p:spPr>
-        <p:txBody>
-          <a:bodyPr wrap="square" rtlCol="0" anchor="ctr"/>
-          <a:lstStyle/>
-          <a:p>
-            <a:pPr indent="0" marL="0">
-              <a:buNone/>
-            </a:pPr>
-            <a:r>
-              <a:rPr lang="en-US" sz="700" dirty="0">
-                <a:solidFill>
-                  <a:srgbClr val="888888"/>
-                </a:solidFill>
-                <a:latin typeface="Arial" pitchFamily="34" charset="0"/>
-                <a:ea typeface="Arial" pitchFamily="34" charset="-122"/>
-                <a:cs typeface="Arial" pitchFamily="34" charset="-120"/>
-              </a:rPr>
-              <a:t>Mappa</a:t>
-            </a:r>
-            <a:endParaRPr lang="en-US" sz="700" dirty="0"/>
-          </a:p>
-        </p:txBody>
-      </p:sp>
-      <p:sp>
-        <p:nvSpPr>
-          <p:cNvPr id="17" name="Shape 15"/>
-          <p:cNvSpPr/>
-          <p:nvPr/>
-        </p:nvSpPr>
-        <p:spPr>
-          <a:xfrm>
-            <a:off x="365760" y="1417320"/>
-            <a:ext cx="4846320" cy="384048"/>
-          </a:xfrm>
-          <a:prstGeom prst="rect">
-            <a:avLst/>
-          </a:prstGeom>
-          <a:solidFill>
-            <a:srgbClr val="222222"/>
-          </a:solidFill>
-          <a:ln/>
-        </p:spPr>
-      </p:sp>
-      <p:sp>
-        <p:nvSpPr>
-          <p:cNvPr id="18" name="Shape 16"/>
-          <p:cNvSpPr/>
-          <p:nvPr/>
-        </p:nvSpPr>
-        <p:spPr>
-          <a:xfrm>
-            <a:off x="365760" y="1417320"/>
-            <a:ext cx="36576" cy="384048"/>
-          </a:xfrm>
-          <a:prstGeom prst="rect">
-            <a:avLst/>
-          </a:prstGeom>
-          <a:solidFill>
-            <a:srgbClr val="3B7EF7"/>
-          </a:solidFill>
-          <a:ln/>
-        </p:spPr>
-      </p:sp>
-      <p:sp>
-        <p:nvSpPr>
-          <p:cNvPr id="19" name="Text 17"/>
-          <p:cNvSpPr/>
-          <p:nvPr/>
-        </p:nvSpPr>
-        <p:spPr>
-          <a:xfrm>
-            <a:off x="502920" y="1435608"/>
-            <a:ext cx="914400" cy="164592"/>
-          </a:xfrm>
-          <a:prstGeom prst="rect">
-            <a:avLst/>
-          </a:prstGeom>
-          <a:noFill/>
-          <a:ln/>
-        </p:spPr>
-        <p:txBody>
-          <a:bodyPr wrap="square" rtlCol="0" anchor="ctr"/>
-          <a:lstStyle/>
-          <a:p>
-            <a:pPr indent="0" marL="0">
-              <a:buNone/>
-            </a:pPr>
-            <a:r>
-              <a:rPr lang="en-US" sz="650" b="1" dirty="0">
-                <a:solidFill>
-                  <a:srgbClr val="FFFFFF"/>
-                </a:solidFill>
-                <a:latin typeface="Courier New" pitchFamily="34" charset="0"/>
-                <a:ea typeface="Courier New" pitchFamily="34" charset="-122"/>
-                <a:cs typeface="Courier New" pitchFamily="34" charset="-120"/>
-              </a:rPr>
-              <a:t>INT_089</a:t>
-            </a:r>
-            <a:endParaRPr lang="en-US" sz="650" dirty="0"/>
-          </a:p>
-        </p:txBody>
-      </p:sp>
-      <p:sp>
-        <p:nvSpPr>
-          <p:cNvPr id="20" name="Text 18"/>
-          <p:cNvSpPr/>
-          <p:nvPr/>
-        </p:nvSpPr>
-        <p:spPr>
-          <a:xfrm>
-            <a:off x="1463040" y="1435608"/>
-            <a:ext cx="2743200" cy="164592"/>
-          </a:xfrm>
-          <a:prstGeom prst="rect">
-            <a:avLst/>
-          </a:prstGeom>
-          <a:noFill/>
-          <a:ln/>
-        </p:spPr>
-        <p:txBody>
-          <a:bodyPr wrap="square" rtlCol="0" anchor="ctr"/>
-          <a:lstStyle/>
-          <a:p>
-            <a:pPr indent="0" marL="0">
-              <a:buNone/>
-            </a:pPr>
-            <a:r>
-              <a:rPr lang="en-US" sz="650" dirty="0">
+              <a:t>AI Planner</a:t>
+            </a:r>
+            <a:endParaRPr lang="en-US" sz="1400" dirty="0"/>
+          </a:p>
+        </p:txBody>
+      </p:sp>
+      <p:sp>
+        <p:nvSpPr>
+          <p:cNvPr id="9" name="Text 6"/>
+          <p:cNvSpPr/>
+          <p:nvPr/>
+        </p:nvSpPr>
+        <p:spPr>
+          <a:xfrm>
+            <a:off x="5852160" y="1280160"/>
+            <a:ext cx="2743200" cy="457200"/>
+          </a:xfrm>
+          <a:prstGeom prst="rect">
+            <a:avLst/>
+          </a:prstGeom>
+          <a:noFill/>
+          <a:ln/>
+        </p:spPr>
+        <p:txBody>
+          <a:bodyPr wrap="square" lIns="0" tIns="0" rIns="0" bIns="0" rtlCol="0" anchor="ctr"/>
+          <a:lstStyle/>
+          <a:p>
+            <a:pPr indent="0" marL="0">
+              <a:lnSpc>
+                <a:spcPct val="130000"/>
+              </a:lnSpc>
+              <a:buNone/>
+            </a:pPr>
+            <a:r>
+              <a:rPr lang="en-US" sz="850" dirty="0">
                 <a:solidFill>
                   <a:srgbClr val="CCCCCC"/>
                 </a:solidFill>
@@ -24027,217 +20760,19 @@
                 <a:ea typeface="Arial" pitchFamily="34" charset="-122"/>
                 <a:cs typeface="Arial" pitchFamily="34" charset="-120"/>
               </a:rPr>
-              <a:t>Az. Rossi — PM Trimestrale</a:t>
-            </a:r>
-            <a:endParaRPr lang="en-US" sz="650" dirty="0"/>
-          </a:p>
-        </p:txBody>
-      </p:sp>
-      <p:sp>
-        <p:nvSpPr>
-          <p:cNvPr id="21" name="Text 19"/>
-          <p:cNvSpPr/>
-          <p:nvPr/>
-        </p:nvSpPr>
-        <p:spPr>
-          <a:xfrm>
-            <a:off x="502920" y="1618488"/>
-            <a:ext cx="1828800" cy="137160"/>
-          </a:xfrm>
-          <a:prstGeom prst="rect">
-            <a:avLst/>
-          </a:prstGeom>
-          <a:noFill/>
-          <a:ln/>
-        </p:spPr>
-        <p:txBody>
-          <a:bodyPr wrap="square" rtlCol="0" anchor="ctr"/>
-          <a:lstStyle/>
-          <a:p>
-            <a:pPr indent="0" marL="0">
-              <a:buNone/>
-            </a:pPr>
-            <a:r>
-              <a:rPr lang="en-US" sz="550" dirty="0">
-                <a:solidFill>
-                  <a:srgbClr val="888888"/>
-                </a:solidFill>
-                <a:latin typeface="Arial" pitchFamily="34" charset="0"/>
-                <a:ea typeface="Arial" pitchFamily="34" charset="-122"/>
-                <a:cs typeface="Arial" pitchFamily="34" charset="-120"/>
-              </a:rPr>
-              <a:t>03/03  |  Jacopo</a:t>
-            </a:r>
-            <a:endParaRPr lang="en-US" sz="550" dirty="0"/>
-          </a:p>
-        </p:txBody>
-      </p:sp>
-      <p:sp>
-        <p:nvSpPr>
-          <p:cNvPr id="22" name="Shape 20"/>
-          <p:cNvSpPr/>
-          <p:nvPr/>
-        </p:nvSpPr>
-        <p:spPr>
-          <a:xfrm>
-            <a:off x="3931920" y="1508760"/>
-            <a:ext cx="822960" cy="182880"/>
-          </a:xfrm>
-          <a:prstGeom prst="roundRect">
-            <a:avLst>
-              <a:gd name="adj" fmla="val 15000"/>
-            </a:avLst>
-          </a:prstGeom>
-          <a:solidFill>
-            <a:srgbClr val="3B7EF7"/>
-          </a:solidFill>
-          <a:ln/>
-        </p:spPr>
-      </p:sp>
-      <p:sp>
-        <p:nvSpPr>
-          <p:cNvPr id="23" name="Text 21"/>
-          <p:cNvSpPr/>
-          <p:nvPr/>
-        </p:nvSpPr>
-        <p:spPr>
-          <a:xfrm>
-            <a:off x="3931920" y="1508760"/>
-            <a:ext cx="822960" cy="182880"/>
-          </a:xfrm>
-          <a:prstGeom prst="rect">
-            <a:avLst/>
-          </a:prstGeom>
-          <a:noFill/>
-          <a:ln/>
-        </p:spPr>
-        <p:txBody>
-          <a:bodyPr wrap="square" rtlCol="0" anchor="ctr"/>
-          <a:lstStyle/>
-          <a:p>
-            <a:pPr algn="ctr" indent="0" marL="0">
-              <a:buNone/>
-            </a:pPr>
-            <a:r>
-              <a:rPr lang="en-US" sz="500" b="1" dirty="0">
-                <a:solidFill>
-                  <a:srgbClr val="FFFFFF"/>
-                </a:solidFill>
-                <a:latin typeface="Arial" pitchFamily="34" charset="0"/>
-                <a:ea typeface="Arial" pitchFamily="34" charset="-122"/>
-                <a:cs typeface="Arial" pitchFamily="34" charset="-120"/>
-              </a:rPr>
-              <a:t>pianificato</a:t>
-            </a:r>
-            <a:endParaRPr lang="en-US" sz="500" dirty="0"/>
-          </a:p>
-        </p:txBody>
-      </p:sp>
-      <p:sp>
-        <p:nvSpPr>
-          <p:cNvPr id="24" name="Shape 22"/>
-          <p:cNvSpPr/>
-          <p:nvPr/>
-        </p:nvSpPr>
-        <p:spPr>
-          <a:xfrm>
-            <a:off x="365760" y="1874520"/>
-            <a:ext cx="4846320" cy="384048"/>
-          </a:xfrm>
-          <a:prstGeom prst="rect">
-            <a:avLst/>
-          </a:prstGeom>
-          <a:solidFill>
-            <a:srgbClr val="222222"/>
-          </a:solidFill>
-          <a:ln/>
-        </p:spPr>
-      </p:sp>
-      <p:sp>
-        <p:nvSpPr>
-          <p:cNvPr id="25" name="Shape 23"/>
-          <p:cNvSpPr/>
-          <p:nvPr/>
-        </p:nvSpPr>
-        <p:spPr>
-          <a:xfrm>
-            <a:off x="365760" y="1874520"/>
-            <a:ext cx="36576" cy="384048"/>
-          </a:xfrm>
-          <a:prstGeom prst="rect">
-            <a:avLst/>
-          </a:prstGeom>
-          <a:solidFill>
-            <a:srgbClr val="17C0EB"/>
-          </a:solidFill>
-          <a:ln/>
-        </p:spPr>
-      </p:sp>
-      <p:sp>
-        <p:nvSpPr>
-          <p:cNvPr id="26" name="Text 24"/>
-          <p:cNvSpPr/>
-          <p:nvPr/>
-        </p:nvSpPr>
-        <p:spPr>
-          <a:xfrm>
-            <a:off x="502920" y="1892808"/>
-            <a:ext cx="914400" cy="164592"/>
-          </a:xfrm>
-          <a:prstGeom prst="rect">
-            <a:avLst/>
-          </a:prstGeom>
-          <a:noFill/>
-          <a:ln/>
-        </p:spPr>
-        <p:txBody>
-          <a:bodyPr wrap="square" rtlCol="0" anchor="ctr"/>
-          <a:lstStyle/>
-          <a:p>
-            <a:pPr indent="0" marL="0">
-              <a:buNone/>
-            </a:pPr>
-            <a:r>
-              <a:rPr lang="en-US" sz="650" b="1" dirty="0">
-                <a:solidFill>
-                  <a:srgbClr val="FFFFFF"/>
-                </a:solidFill>
-                <a:latin typeface="Courier New" pitchFamily="34" charset="0"/>
-                <a:ea typeface="Courier New" pitchFamily="34" charset="-122"/>
-                <a:cs typeface="Courier New" pitchFamily="34" charset="-120"/>
-              </a:rPr>
-              <a:t>INT_090</a:t>
-            </a:r>
-            <a:endParaRPr lang="en-US" sz="650" dirty="0"/>
-          </a:p>
-        </p:txBody>
-      </p:sp>
-      <p:sp>
-        <p:nvSpPr>
-          <p:cNvPr id="27" name="Text 25"/>
-          <p:cNvSpPr/>
-          <p:nvPr/>
-        </p:nvSpPr>
-        <p:spPr>
-          <a:xfrm>
-            <a:off x="1463040" y="1892808"/>
-            <a:ext cx="2743200" cy="164592"/>
-          </a:xfrm>
-          <a:prstGeom prst="rect">
-            <a:avLst/>
-          </a:prstGeom>
-          <a:noFill/>
-          <a:ln/>
-        </p:spPr>
-        <p:txBody>
-          <a:bodyPr wrap="square" rtlCol="0" anchor="ctr"/>
-          <a:lstStyle/>
-          <a:p>
-            <a:pPr indent="0" marL="0">
-              <a:buNone/>
-            </a:pPr>
-            <a:r>
-              <a:rPr lang="en-US" sz="650" dirty="0">
+              <a:t>AI Engine suggerisce la pianificazione ottimale</a:t>
+            </a:r>
+            <a:endParaRPr lang="en-US" sz="850" dirty="0"/>
+          </a:p>
+          <a:p>
+            <a:pPr indent="0" marL="0">
+              <a:lnSpc>
+                <a:spcPct val="130000"/>
+              </a:lnSpc>
+              <a:buNone/>
+            </a:pPr>
+            <a:r>
+              <a:rPr lang="en-US" sz="850" dirty="0">
                 <a:solidFill>
                   <a:srgbClr val="CCCCCC"/>
                 </a:solidFill>
@@ -24245,217 +20780,38 @@
                 <a:ea typeface="Arial" pitchFamily="34" charset="-122"/>
                 <a:cs typeface="Arial" pitchFamily="34" charset="-120"/>
               </a:rPr>
-              <a:t>Coop Verdi — Sostituzione sensore</a:t>
-            </a:r>
-            <a:endParaRPr lang="en-US" sz="650" dirty="0"/>
-          </a:p>
-        </p:txBody>
-      </p:sp>
-      <p:sp>
-        <p:nvSpPr>
-          <p:cNvPr id="28" name="Text 26"/>
-          <p:cNvSpPr/>
-          <p:nvPr/>
-        </p:nvSpPr>
-        <p:spPr>
-          <a:xfrm>
-            <a:off x="502920" y="2075688"/>
-            <a:ext cx="1828800" cy="137160"/>
-          </a:xfrm>
-          <a:prstGeom prst="rect">
-            <a:avLst/>
-          </a:prstGeom>
-          <a:noFill/>
-          <a:ln/>
-        </p:spPr>
-        <p:txBody>
-          <a:bodyPr wrap="square" rtlCol="0" anchor="ctr"/>
-          <a:lstStyle/>
-          <a:p>
-            <a:pPr indent="0" marL="0">
-              <a:buNone/>
-            </a:pPr>
-            <a:r>
-              <a:rPr lang="en-US" sz="550" dirty="0">
-                <a:solidFill>
-                  <a:srgbClr val="888888"/>
-                </a:solidFill>
-                <a:latin typeface="Arial" pitchFamily="34" charset="0"/>
-                <a:ea typeface="Arial" pitchFamily="34" charset="-122"/>
-                <a:cs typeface="Arial" pitchFamily="34" charset="-120"/>
-              </a:rPr>
-              <a:t>03/03  |  Anton</a:t>
-            </a:r>
-            <a:endParaRPr lang="en-US" sz="550" dirty="0"/>
-          </a:p>
-        </p:txBody>
-      </p:sp>
-      <p:sp>
-        <p:nvSpPr>
-          <p:cNvPr id="29" name="Shape 27"/>
-          <p:cNvSpPr/>
-          <p:nvPr/>
-        </p:nvSpPr>
-        <p:spPr>
-          <a:xfrm>
-            <a:off x="3931920" y="1965960"/>
-            <a:ext cx="822960" cy="182880"/>
-          </a:xfrm>
-          <a:prstGeom prst="roundRect">
-            <a:avLst>
-              <a:gd name="adj" fmla="val 15000"/>
-            </a:avLst>
-          </a:prstGeom>
-          <a:solidFill>
-            <a:srgbClr val="17C0EB"/>
-          </a:solidFill>
-          <a:ln/>
-        </p:spPr>
-      </p:sp>
-      <p:sp>
-        <p:nvSpPr>
-          <p:cNvPr id="30" name="Text 28"/>
-          <p:cNvSpPr/>
-          <p:nvPr/>
-        </p:nvSpPr>
-        <p:spPr>
-          <a:xfrm>
-            <a:off x="3931920" y="1965960"/>
-            <a:ext cx="822960" cy="182880"/>
-          </a:xfrm>
-          <a:prstGeom prst="rect">
-            <a:avLst/>
-          </a:prstGeom>
-          <a:noFill/>
-          <a:ln/>
-        </p:spPr>
-        <p:txBody>
-          <a:bodyPr wrap="square" rtlCol="0" anchor="ctr"/>
-          <a:lstStyle/>
-          <a:p>
-            <a:pPr algn="ctr" indent="0" marL="0">
-              <a:buNone/>
-            </a:pPr>
-            <a:r>
-              <a:rPr lang="en-US" sz="500" b="1" dirty="0">
-                <a:solidFill>
-                  <a:srgbClr val="FFFFFF"/>
-                </a:solidFill>
-                <a:latin typeface="Arial" pitchFamily="34" charset="0"/>
-                <a:ea typeface="Arial" pitchFamily="34" charset="-122"/>
-                <a:cs typeface="Arial" pitchFamily="34" charset="-120"/>
-              </a:rPr>
-              <a:t>in_corso</a:t>
-            </a:r>
-            <a:endParaRPr lang="en-US" sz="500" dirty="0"/>
-          </a:p>
-        </p:txBody>
-      </p:sp>
-      <p:sp>
-        <p:nvSpPr>
-          <p:cNvPr id="31" name="Shape 29"/>
-          <p:cNvSpPr/>
-          <p:nvPr/>
-        </p:nvSpPr>
-        <p:spPr>
-          <a:xfrm>
-            <a:off x="365760" y="2331720"/>
-            <a:ext cx="4846320" cy="384048"/>
-          </a:xfrm>
-          <a:prstGeom prst="rect">
-            <a:avLst/>
-          </a:prstGeom>
-          <a:solidFill>
-            <a:srgbClr val="222222"/>
-          </a:solidFill>
-          <a:ln/>
-        </p:spPr>
-      </p:sp>
-      <p:sp>
-        <p:nvSpPr>
-          <p:cNvPr id="32" name="Shape 30"/>
-          <p:cNvSpPr/>
-          <p:nvPr/>
-        </p:nvSpPr>
-        <p:spPr>
-          <a:xfrm>
-            <a:off x="365760" y="2331720"/>
-            <a:ext cx="36576" cy="384048"/>
-          </a:xfrm>
-          <a:prstGeom prst="rect">
-            <a:avLst/>
-          </a:prstGeom>
-          <a:solidFill>
-            <a:srgbClr val="3B7EF7"/>
-          </a:solidFill>
-          <a:ln/>
-        </p:spPr>
-      </p:sp>
-      <p:sp>
-        <p:nvSpPr>
-          <p:cNvPr id="33" name="Text 31"/>
-          <p:cNvSpPr/>
-          <p:nvPr/>
-        </p:nvSpPr>
-        <p:spPr>
-          <a:xfrm>
-            <a:off x="502920" y="2350008"/>
-            <a:ext cx="914400" cy="164592"/>
-          </a:xfrm>
-          <a:prstGeom prst="rect">
-            <a:avLst/>
-          </a:prstGeom>
-          <a:noFill/>
-          <a:ln/>
-        </p:spPr>
-        <p:txBody>
-          <a:bodyPr wrap="square" rtlCol="0" anchor="ctr"/>
-          <a:lstStyle/>
-          <a:p>
-            <a:pPr indent="0" marL="0">
-              <a:buNone/>
-            </a:pPr>
-            <a:r>
-              <a:rPr lang="en-US" sz="650" b="1" dirty="0">
-                <a:solidFill>
-                  <a:srgbClr val="FFFFFF"/>
-                </a:solidFill>
-                <a:latin typeface="Courier New" pitchFamily="34" charset="0"/>
-                <a:ea typeface="Courier New" pitchFamily="34" charset="-122"/>
-                <a:cs typeface="Courier New" pitchFamily="34" charset="-120"/>
-              </a:rPr>
-              <a:t>INT_091</a:t>
-            </a:r>
-            <a:endParaRPr lang="en-US" sz="650" dirty="0"/>
-          </a:p>
-        </p:txBody>
-      </p:sp>
-      <p:sp>
-        <p:nvSpPr>
-          <p:cNvPr id="34" name="Text 32"/>
-          <p:cNvSpPr/>
-          <p:nvPr/>
-        </p:nvSpPr>
-        <p:spPr>
-          <a:xfrm>
-            <a:off x="1463040" y="2350008"/>
-            <a:ext cx="2743200" cy="164592"/>
-          </a:xfrm>
-          <a:prstGeom prst="rect">
-            <a:avLst/>
-          </a:prstGeom>
-          <a:noFill/>
-          <a:ln/>
-        </p:spPr>
-        <p:txBody>
-          <a:bodyPr wrap="square" rtlCol="0" anchor="ctr"/>
-          <a:lstStyle/>
-          <a:p>
-            <a:pPr indent="0" marL="0">
-              <a:buNone/>
-            </a:pPr>
-            <a:r>
-              <a:rPr lang="en-US" sz="650" dirty="0">
+              <a:t>considerando:</a:t>
+            </a:r>
+            <a:endParaRPr lang="en-US" sz="850" dirty="0"/>
+          </a:p>
+        </p:txBody>
+      </p:sp>
+      <p:sp>
+        <p:nvSpPr>
+          <p:cNvPr id="10" name="Text 7"/>
+          <p:cNvSpPr/>
+          <p:nvPr/>
+        </p:nvSpPr>
+        <p:spPr>
+          <a:xfrm>
+            <a:off x="5852160" y="1828800"/>
+            <a:ext cx="2743200" cy="228600"/>
+          </a:xfrm>
+          <a:prstGeom prst="rect">
+            <a:avLst/>
+          </a:prstGeom>
+          <a:noFill/>
+          <a:ln/>
+        </p:spPr>
+        <p:txBody>
+          <a:bodyPr wrap="square" lIns="0" tIns="0" rIns="0" bIns="0" rtlCol="0" anchor="ctr"/>
+          <a:lstStyle/>
+          <a:p>
+            <a:pPr indent="0" marL="0">
+              <a:buNone/>
+            </a:pPr>
+            <a:r>
+              <a:rPr lang="en-US" sz="800" dirty="0">
                 <a:solidFill>
                   <a:srgbClr val="CCCCCC"/>
                 </a:solidFill>
@@ -24463,122 +20819,178 @@
                 <a:ea typeface="Arial" pitchFamily="34" charset="-122"/>
                 <a:cs typeface="Arial" pitchFamily="34" charset="-120"/>
               </a:rPr>
-              <a:t>Latteria B. — Manutenzione robot</a:t>
-            </a:r>
-            <a:endParaRPr lang="en-US" sz="650" dirty="0"/>
-          </a:p>
-        </p:txBody>
-      </p:sp>
-      <p:sp>
-        <p:nvSpPr>
-          <p:cNvPr id="35" name="Text 33"/>
-          <p:cNvSpPr/>
-          <p:nvPr/>
-        </p:nvSpPr>
-        <p:spPr>
-          <a:xfrm>
-            <a:off x="502920" y="2532888"/>
-            <a:ext cx="1828800" cy="137160"/>
-          </a:xfrm>
-          <a:prstGeom prst="rect">
-            <a:avLst/>
-          </a:prstGeom>
-          <a:noFill/>
-          <a:ln/>
-        </p:spPr>
-        <p:txBody>
-          <a:bodyPr wrap="square" rtlCol="0" anchor="ctr"/>
-          <a:lstStyle/>
-          <a:p>
-            <a:pPr indent="0" marL="0">
-              <a:buNone/>
-            </a:pPr>
-            <a:r>
-              <a:rPr lang="en-US" sz="550" dirty="0">
-                <a:solidFill>
-                  <a:srgbClr val="888888"/>
-                </a:solidFill>
-                <a:latin typeface="Arial" pitchFamily="34" charset="0"/>
-                <a:ea typeface="Arial" pitchFamily="34" charset="-122"/>
-                <a:cs typeface="Arial" pitchFamily="34" charset="-120"/>
-              </a:rPr>
-              <a:t>04/03  |  Giovanni</a:t>
-            </a:r>
-            <a:endParaRPr lang="en-US" sz="550" dirty="0"/>
-          </a:p>
-        </p:txBody>
-      </p:sp>
-      <p:sp>
-        <p:nvSpPr>
-          <p:cNvPr id="36" name="Shape 34"/>
-          <p:cNvSpPr/>
-          <p:nvPr/>
-        </p:nvSpPr>
-        <p:spPr>
-          <a:xfrm>
-            <a:off x="3931920" y="2423160"/>
-            <a:ext cx="822960" cy="182880"/>
-          </a:xfrm>
-          <a:prstGeom prst="roundRect">
-            <a:avLst>
-              <a:gd name="adj" fmla="val 15000"/>
-            </a:avLst>
-          </a:prstGeom>
-          <a:solidFill>
-            <a:srgbClr val="3B7EF7"/>
-          </a:solidFill>
-          <a:ln/>
-        </p:spPr>
-      </p:sp>
-      <p:sp>
-        <p:nvSpPr>
-          <p:cNvPr id="37" name="Text 35"/>
-          <p:cNvSpPr/>
-          <p:nvPr/>
-        </p:nvSpPr>
-        <p:spPr>
-          <a:xfrm>
-            <a:off x="3931920" y="2423160"/>
-            <a:ext cx="822960" cy="182880"/>
-          </a:xfrm>
-          <a:prstGeom prst="rect">
-            <a:avLst/>
-          </a:prstGeom>
-          <a:noFill/>
-          <a:ln/>
-        </p:spPr>
-        <p:txBody>
-          <a:bodyPr wrap="square" rtlCol="0" anchor="ctr"/>
-          <a:lstStyle/>
-          <a:p>
-            <a:pPr algn="ctr" indent="0" marL="0">
-              <a:buNone/>
-            </a:pPr>
-            <a:r>
-              <a:rPr lang="en-US" sz="500" b="1" dirty="0">
-                <a:solidFill>
-                  <a:srgbClr val="FFFFFF"/>
-                </a:solidFill>
-                <a:latin typeface="Arial" pitchFamily="34" charset="0"/>
-                <a:ea typeface="Arial" pitchFamily="34" charset="-122"/>
-                <a:cs typeface="Arial" pitchFamily="34" charset="-120"/>
-              </a:rPr>
-              <a:t>pianificato</a:t>
-            </a:r>
-            <a:endParaRPr lang="en-US" sz="500" dirty="0"/>
-          </a:p>
-        </p:txBody>
-      </p:sp>
-      <p:sp>
-        <p:nvSpPr>
-          <p:cNvPr id="38" name="Shape 36"/>
-          <p:cNvSpPr/>
-          <p:nvPr/>
-        </p:nvSpPr>
-        <p:spPr>
-          <a:xfrm>
-            <a:off x="5669280" y="822960"/>
-            <a:ext cx="3200400" cy="2286000"/>
+              <a:t>📍  Posizione tecnici e clienti</a:t>
+            </a:r>
+            <a:endParaRPr lang="en-US" sz="800" dirty="0"/>
+          </a:p>
+        </p:txBody>
+      </p:sp>
+      <p:sp>
+        <p:nvSpPr>
+          <p:cNvPr id="11" name="Text 8"/>
+          <p:cNvSpPr/>
+          <p:nvPr/>
+        </p:nvSpPr>
+        <p:spPr>
+          <a:xfrm>
+            <a:off x="5852160" y="2084832"/>
+            <a:ext cx="2743200" cy="228600"/>
+          </a:xfrm>
+          <a:prstGeom prst="rect">
+            <a:avLst/>
+          </a:prstGeom>
+          <a:noFill/>
+          <a:ln/>
+        </p:spPr>
+        <p:txBody>
+          <a:bodyPr wrap="square" lIns="0" tIns="0" rIns="0" bIns="0" rtlCol="0" anchor="ctr"/>
+          <a:lstStyle/>
+          <a:p>
+            <a:pPr indent="0" marL="0">
+              <a:buNone/>
+            </a:pPr>
+            <a:r>
+              <a:rPr lang="en-US" sz="800" dirty="0">
+                <a:solidFill>
+                  <a:srgbClr val="CCCCCC"/>
+                </a:solidFill>
+                <a:latin typeface="Arial" pitchFamily="34" charset="0"/>
+                <a:ea typeface="Arial" pitchFamily="34" charset="-122"/>
+                <a:cs typeface="Arial" pitchFamily="34" charset="-120"/>
+              </a:rPr>
+              <a:t>🔧  Competenze specifiche</a:t>
+            </a:r>
+            <a:endParaRPr lang="en-US" sz="800" dirty="0"/>
+          </a:p>
+        </p:txBody>
+      </p:sp>
+      <p:sp>
+        <p:nvSpPr>
+          <p:cNvPr id="12" name="Text 9"/>
+          <p:cNvSpPr/>
+          <p:nvPr/>
+        </p:nvSpPr>
+        <p:spPr>
+          <a:xfrm>
+            <a:off x="5852160" y="2340864"/>
+            <a:ext cx="2743200" cy="228600"/>
+          </a:xfrm>
+          <a:prstGeom prst="rect">
+            <a:avLst/>
+          </a:prstGeom>
+          <a:noFill/>
+          <a:ln/>
+        </p:spPr>
+        <p:txBody>
+          <a:bodyPr wrap="square" lIns="0" tIns="0" rIns="0" bIns="0" rtlCol="0" anchor="ctr"/>
+          <a:lstStyle/>
+          <a:p>
+            <a:pPr indent="0" marL="0">
+              <a:buNone/>
+            </a:pPr>
+            <a:r>
+              <a:rPr lang="en-US" sz="800" dirty="0">
+                <a:solidFill>
+                  <a:srgbClr val="CCCCCC"/>
+                </a:solidFill>
+                <a:latin typeface="Arial" pitchFamily="34" charset="0"/>
+                <a:ea typeface="Arial" pitchFamily="34" charset="-122"/>
+                <a:cs typeface="Arial" pitchFamily="34" charset="-120"/>
+              </a:rPr>
+              <a:t>⏱️  Carichi di lavoro bilanciati</a:t>
+            </a:r>
+            <a:endParaRPr lang="en-US" sz="800" dirty="0"/>
+          </a:p>
+        </p:txBody>
+      </p:sp>
+      <p:sp>
+        <p:nvSpPr>
+          <p:cNvPr id="13" name="Text 10"/>
+          <p:cNvSpPr/>
+          <p:nvPr/>
+        </p:nvSpPr>
+        <p:spPr>
+          <a:xfrm>
+            <a:off x="5852160" y="2596896"/>
+            <a:ext cx="2743200" cy="228600"/>
+          </a:xfrm>
+          <a:prstGeom prst="rect">
+            <a:avLst/>
+          </a:prstGeom>
+          <a:noFill/>
+          <a:ln/>
+        </p:spPr>
+        <p:txBody>
+          <a:bodyPr wrap="square" lIns="0" tIns="0" rIns="0" bIns="0" rtlCol="0" anchor="ctr"/>
+          <a:lstStyle/>
+          <a:p>
+            <a:pPr indent="0" marL="0">
+              <a:buNone/>
+            </a:pPr>
+            <a:r>
+              <a:rPr lang="en-US" sz="800" dirty="0">
+                <a:solidFill>
+                  <a:srgbClr val="CCCCCC"/>
+                </a:solidFill>
+                <a:latin typeface="Arial" pitchFamily="34" charset="0"/>
+                <a:ea typeface="Arial" pitchFamily="34" charset="-122"/>
+                <a:cs typeface="Arial" pitchFamily="34" charset="-120"/>
+              </a:rPr>
+              <a:t>🚗  Distanze e tempi percorrenza</a:t>
+            </a:r>
+            <a:endParaRPr lang="en-US" sz="800" dirty="0"/>
+          </a:p>
+        </p:txBody>
+      </p:sp>
+      <p:sp>
+        <p:nvSpPr>
+          <p:cNvPr id="14" name="Text 11"/>
+          <p:cNvSpPr/>
+          <p:nvPr/>
+        </p:nvSpPr>
+        <p:spPr>
+          <a:xfrm>
+            <a:off x="5852160" y="2852928"/>
+            <a:ext cx="2743200" cy="228600"/>
+          </a:xfrm>
+          <a:prstGeom prst="rect">
+            <a:avLst/>
+          </a:prstGeom>
+          <a:noFill/>
+          <a:ln/>
+        </p:spPr>
+        <p:txBody>
+          <a:bodyPr wrap="square" lIns="0" tIns="0" rIns="0" bIns="0" rtlCol="0" anchor="ctr"/>
+          <a:lstStyle/>
+          <a:p>
+            <a:pPr indent="0" marL="0">
+              <a:buNone/>
+            </a:pPr>
+            <a:r>
+              <a:rPr lang="en-US" sz="800" dirty="0">
+                <a:solidFill>
+                  <a:srgbClr val="CCCCCC"/>
+                </a:solidFill>
+                <a:latin typeface="Arial" pitchFamily="34" charset="0"/>
+                <a:ea typeface="Arial" pitchFamily="34" charset="-122"/>
+                <a:cs typeface="Arial" pitchFamily="34" charset="-120"/>
+              </a:rPr>
+              <a:t>👥  Regole affiancamento junior</a:t>
+            </a:r>
+            <a:endParaRPr lang="en-US" sz="800" dirty="0"/>
+          </a:p>
+        </p:txBody>
+      </p:sp>
+      <p:sp>
+        <p:nvSpPr>
+          <p:cNvPr id="15" name="Shape 12"/>
+          <p:cNvSpPr/>
+          <p:nvPr/>
+        </p:nvSpPr>
+        <p:spPr>
+          <a:xfrm>
+            <a:off x="274320" y="3383280"/>
+            <a:ext cx="8595360" cy="548640"/>
           </a:xfrm>
           <a:prstGeom prst="rect">
             <a:avLst/>
@@ -24598,350 +21010,7 @@
       </p:sp>
       <p:sp>
         <p:nvSpPr>
-          <p:cNvPr id="39" name="Shape 37"/>
-          <p:cNvSpPr/>
-          <p:nvPr/>
-        </p:nvSpPr>
-        <p:spPr>
-          <a:xfrm>
-            <a:off x="5669280" y="822960"/>
-            <a:ext cx="3200400" cy="36576"/>
-          </a:xfrm>
-          <a:prstGeom prst="rect">
-            <a:avLst/>
-          </a:prstGeom>
-          <a:solidFill>
-            <a:srgbClr val="8854D0"/>
-          </a:solidFill>
-          <a:ln/>
-        </p:spPr>
-      </p:sp>
-      <p:sp>
-        <p:nvSpPr>
-          <p:cNvPr id="40" name="Text 38"/>
-          <p:cNvSpPr/>
-          <p:nvPr/>
-        </p:nvSpPr>
-        <p:spPr>
-          <a:xfrm>
-            <a:off x="5852160" y="960120"/>
-            <a:ext cx="2743200" cy="274320"/>
-          </a:xfrm>
-          <a:prstGeom prst="rect">
-            <a:avLst/>
-          </a:prstGeom>
-          <a:noFill/>
-          <a:ln/>
-        </p:spPr>
-        <p:txBody>
-          <a:bodyPr wrap="square" lIns="0" tIns="0" rIns="0" bIns="0" rtlCol="0" anchor="ctr"/>
-          <a:lstStyle/>
-          <a:p>
-            <a:pPr indent="0" marL="0">
-              <a:buNone/>
-            </a:pPr>
-            <a:r>
-              <a:rPr lang="en-US" sz="1400" b="1" dirty="0">
-                <a:solidFill>
-                  <a:srgbClr val="FFFFFF"/>
-                </a:solidFill>
-                <a:latin typeface="Arial" pitchFamily="34" charset="0"/>
-                <a:ea typeface="Arial" pitchFamily="34" charset="-122"/>
-                <a:cs typeface="Arial" pitchFamily="34" charset="-120"/>
-              </a:rPr>
-              <a:t>AI Planner</a:t>
-            </a:r>
-            <a:endParaRPr lang="en-US" sz="1400" dirty="0"/>
-          </a:p>
-        </p:txBody>
-      </p:sp>
-      <p:sp>
-        <p:nvSpPr>
-          <p:cNvPr id="41" name="Text 39"/>
-          <p:cNvSpPr/>
-          <p:nvPr/>
-        </p:nvSpPr>
-        <p:spPr>
-          <a:xfrm>
-            <a:off x="5852160" y="1280160"/>
-            <a:ext cx="2743200" cy="457200"/>
-          </a:xfrm>
-          <a:prstGeom prst="rect">
-            <a:avLst/>
-          </a:prstGeom>
-          <a:noFill/>
-          <a:ln/>
-        </p:spPr>
-        <p:txBody>
-          <a:bodyPr wrap="square" lIns="0" tIns="0" rIns="0" bIns="0" rtlCol="0" anchor="ctr"/>
-          <a:lstStyle/>
-          <a:p>
-            <a:pPr indent="0" marL="0">
-              <a:lnSpc>
-                <a:spcPct val="130000"/>
-              </a:lnSpc>
-              <a:buNone/>
-            </a:pPr>
-            <a:r>
-              <a:rPr lang="en-US" sz="850" dirty="0">
-                <a:solidFill>
-                  <a:srgbClr val="CCCCCC"/>
-                </a:solidFill>
-                <a:latin typeface="Arial" pitchFamily="34" charset="0"/>
-                <a:ea typeface="Arial" pitchFamily="34" charset="-122"/>
-                <a:cs typeface="Arial" pitchFamily="34" charset="-120"/>
-              </a:rPr>
-              <a:t>Gemini AI suggerisce la pianificazione ottimale</a:t>
-            </a:r>
-            <a:endParaRPr lang="en-US" sz="850" dirty="0"/>
-          </a:p>
-          <a:p>
-            <a:pPr indent="0" marL="0">
-              <a:lnSpc>
-                <a:spcPct val="130000"/>
-              </a:lnSpc>
-              <a:buNone/>
-            </a:pPr>
-            <a:r>
-              <a:rPr lang="en-US" sz="850" dirty="0">
-                <a:solidFill>
-                  <a:srgbClr val="CCCCCC"/>
-                </a:solidFill>
-                <a:latin typeface="Arial" pitchFamily="34" charset="0"/>
-                <a:ea typeface="Arial" pitchFamily="34" charset="-122"/>
-                <a:cs typeface="Arial" pitchFamily="34" charset="-120"/>
-              </a:rPr>
-              <a:t>considerando:</a:t>
-            </a:r>
-            <a:endParaRPr lang="en-US" sz="850" dirty="0"/>
-          </a:p>
-        </p:txBody>
-      </p:sp>
-      <p:sp>
-        <p:nvSpPr>
-          <p:cNvPr id="42" name="Text 40"/>
-          <p:cNvSpPr/>
-          <p:nvPr/>
-        </p:nvSpPr>
-        <p:spPr>
-          <a:xfrm>
-            <a:off x="5852160" y="1828800"/>
-            <a:ext cx="2743200" cy="228600"/>
-          </a:xfrm>
-          <a:prstGeom prst="rect">
-            <a:avLst/>
-          </a:prstGeom>
-          <a:noFill/>
-          <a:ln/>
-        </p:spPr>
-        <p:txBody>
-          <a:bodyPr wrap="square" lIns="0" tIns="0" rIns="0" bIns="0" rtlCol="0" anchor="ctr"/>
-          <a:lstStyle/>
-          <a:p>
-            <a:pPr indent="0" marL="0">
-              <a:buNone/>
-            </a:pPr>
-            <a:r>
-              <a:rPr lang="en-US" sz="800" dirty="0">
-                <a:solidFill>
-                  <a:srgbClr val="CCCCCC"/>
-                </a:solidFill>
-                <a:latin typeface="Arial" pitchFamily="34" charset="0"/>
-                <a:ea typeface="Arial" pitchFamily="34" charset="-122"/>
-                <a:cs typeface="Arial" pitchFamily="34" charset="-120"/>
-              </a:rPr>
-              <a:t>📍  Posizione tecnici e clienti</a:t>
-            </a:r>
-            <a:endParaRPr lang="en-US" sz="800" dirty="0"/>
-          </a:p>
-        </p:txBody>
-      </p:sp>
-      <p:sp>
-        <p:nvSpPr>
-          <p:cNvPr id="43" name="Text 41"/>
-          <p:cNvSpPr/>
-          <p:nvPr/>
-        </p:nvSpPr>
-        <p:spPr>
-          <a:xfrm>
-            <a:off x="5852160" y="2084832"/>
-            <a:ext cx="2743200" cy="228600"/>
-          </a:xfrm>
-          <a:prstGeom prst="rect">
-            <a:avLst/>
-          </a:prstGeom>
-          <a:noFill/>
-          <a:ln/>
-        </p:spPr>
-        <p:txBody>
-          <a:bodyPr wrap="square" lIns="0" tIns="0" rIns="0" bIns="0" rtlCol="0" anchor="ctr"/>
-          <a:lstStyle/>
-          <a:p>
-            <a:pPr indent="0" marL="0">
-              <a:buNone/>
-            </a:pPr>
-            <a:r>
-              <a:rPr lang="en-US" sz="800" dirty="0">
-                <a:solidFill>
-                  <a:srgbClr val="CCCCCC"/>
-                </a:solidFill>
-                <a:latin typeface="Arial" pitchFamily="34" charset="0"/>
-                <a:ea typeface="Arial" pitchFamily="34" charset="-122"/>
-                <a:cs typeface="Arial" pitchFamily="34" charset="-120"/>
-              </a:rPr>
-              <a:t>🔧  Competenze specifiche</a:t>
-            </a:r>
-            <a:endParaRPr lang="en-US" sz="800" dirty="0"/>
-          </a:p>
-        </p:txBody>
-      </p:sp>
-      <p:sp>
-        <p:nvSpPr>
-          <p:cNvPr id="44" name="Text 42"/>
-          <p:cNvSpPr/>
-          <p:nvPr/>
-        </p:nvSpPr>
-        <p:spPr>
-          <a:xfrm>
-            <a:off x="5852160" y="2340864"/>
-            <a:ext cx="2743200" cy="228600"/>
-          </a:xfrm>
-          <a:prstGeom prst="rect">
-            <a:avLst/>
-          </a:prstGeom>
-          <a:noFill/>
-          <a:ln/>
-        </p:spPr>
-        <p:txBody>
-          <a:bodyPr wrap="square" lIns="0" tIns="0" rIns="0" bIns="0" rtlCol="0" anchor="ctr"/>
-          <a:lstStyle/>
-          <a:p>
-            <a:pPr indent="0" marL="0">
-              <a:buNone/>
-            </a:pPr>
-            <a:r>
-              <a:rPr lang="en-US" sz="800" dirty="0">
-                <a:solidFill>
-                  <a:srgbClr val="CCCCCC"/>
-                </a:solidFill>
-                <a:latin typeface="Arial" pitchFamily="34" charset="0"/>
-                <a:ea typeface="Arial" pitchFamily="34" charset="-122"/>
-                <a:cs typeface="Arial" pitchFamily="34" charset="-120"/>
-              </a:rPr>
-              <a:t>⏱️  Carichi di lavoro bilanciati</a:t>
-            </a:r>
-            <a:endParaRPr lang="en-US" sz="800" dirty="0"/>
-          </a:p>
-        </p:txBody>
-      </p:sp>
-      <p:sp>
-        <p:nvSpPr>
-          <p:cNvPr id="45" name="Text 43"/>
-          <p:cNvSpPr/>
-          <p:nvPr/>
-        </p:nvSpPr>
-        <p:spPr>
-          <a:xfrm>
-            <a:off x="5852160" y="2596896"/>
-            <a:ext cx="2743200" cy="228600"/>
-          </a:xfrm>
-          <a:prstGeom prst="rect">
-            <a:avLst/>
-          </a:prstGeom>
-          <a:noFill/>
-          <a:ln/>
-        </p:spPr>
-        <p:txBody>
-          <a:bodyPr wrap="square" lIns="0" tIns="0" rIns="0" bIns="0" rtlCol="0" anchor="ctr"/>
-          <a:lstStyle/>
-          <a:p>
-            <a:pPr indent="0" marL="0">
-              <a:buNone/>
-            </a:pPr>
-            <a:r>
-              <a:rPr lang="en-US" sz="800" dirty="0">
-                <a:solidFill>
-                  <a:srgbClr val="CCCCCC"/>
-                </a:solidFill>
-                <a:latin typeface="Arial" pitchFamily="34" charset="0"/>
-                <a:ea typeface="Arial" pitchFamily="34" charset="-122"/>
-                <a:cs typeface="Arial" pitchFamily="34" charset="-120"/>
-              </a:rPr>
-              <a:t>🚗  Distanze e tempi percorrenza</a:t>
-            </a:r>
-            <a:endParaRPr lang="en-US" sz="800" dirty="0"/>
-          </a:p>
-        </p:txBody>
-      </p:sp>
-      <p:sp>
-        <p:nvSpPr>
-          <p:cNvPr id="46" name="Text 44"/>
-          <p:cNvSpPr/>
-          <p:nvPr/>
-        </p:nvSpPr>
-        <p:spPr>
-          <a:xfrm>
-            <a:off x="5852160" y="2852928"/>
-            <a:ext cx="2743200" cy="228600"/>
-          </a:xfrm>
-          <a:prstGeom prst="rect">
-            <a:avLst/>
-          </a:prstGeom>
-          <a:noFill/>
-          <a:ln/>
-        </p:spPr>
-        <p:txBody>
-          <a:bodyPr wrap="square" lIns="0" tIns="0" rIns="0" bIns="0" rtlCol="0" anchor="ctr"/>
-          <a:lstStyle/>
-          <a:p>
-            <a:pPr indent="0" marL="0">
-              <a:buNone/>
-            </a:pPr>
-            <a:r>
-              <a:rPr lang="en-US" sz="800" dirty="0">
-                <a:solidFill>
-                  <a:srgbClr val="CCCCCC"/>
-                </a:solidFill>
-                <a:latin typeface="Arial" pitchFamily="34" charset="0"/>
-                <a:ea typeface="Arial" pitchFamily="34" charset="-122"/>
-                <a:cs typeface="Arial" pitchFamily="34" charset="-120"/>
-              </a:rPr>
-              <a:t>👥  Regole affiancamento junior</a:t>
-            </a:r>
-            <a:endParaRPr lang="en-US" sz="800" dirty="0"/>
-          </a:p>
-        </p:txBody>
-      </p:sp>
-      <p:sp>
-        <p:nvSpPr>
-          <p:cNvPr id="47" name="Shape 45"/>
-          <p:cNvSpPr/>
-          <p:nvPr/>
-        </p:nvSpPr>
-        <p:spPr>
-          <a:xfrm>
-            <a:off x="274320" y="3383280"/>
-            <a:ext cx="8595360" cy="548640"/>
-          </a:xfrm>
-          <a:prstGeom prst="rect">
-            <a:avLst/>
-          </a:prstGeom>
-          <a:solidFill>
-            <a:srgbClr val="222222"/>
-          </a:solidFill>
-          <a:ln/>
-          <a:effectLst>
-            <a:outerShdw sx="100000" sy="100000" kx="0" ky="0" algn="bl" rotWithShape="0" blurRad="76200" dist="25400" dir="8100000">
-              <a:srgbClr val="000000">
-                <a:alpha val="40000"/>
-              </a:srgbClr>
-            </a:outerShdw>
-          </a:effectLst>
-        </p:spPr>
-      </p:sp>
-      <p:sp>
-        <p:nvSpPr>
-          <p:cNvPr id="48" name="Shape 46"/>
+          <p:cNvPr id="16" name="Shape 13"/>
           <p:cNvSpPr/>
           <p:nvPr/>
         </p:nvSpPr>
@@ -24961,7 +21030,7 @@
       </p:sp>
       <p:sp>
         <p:nvSpPr>
-          <p:cNvPr id="49" name="Text 47"/>
+          <p:cNvPr id="17" name="Text 14"/>
           <p:cNvSpPr/>
           <p:nvPr/>
         </p:nvSpPr>
@@ -25000,7 +21069,7 @@
       </p:sp>
       <p:sp>
         <p:nvSpPr>
-          <p:cNvPr id="50" name="Text 48"/>
+          <p:cNvPr id="18" name="Text 15"/>
           <p:cNvSpPr/>
           <p:nvPr/>
         </p:nvSpPr>
@@ -25039,7 +21108,7 @@
       </p:sp>
       <p:sp>
         <p:nvSpPr>
-          <p:cNvPr id="51" name="Text 49"/>
+          <p:cNvPr id="19" name="Text 16"/>
           <p:cNvSpPr/>
           <p:nvPr/>
         </p:nvSpPr>
@@ -25078,7 +21147,7 @@
       </p:sp>
       <p:sp>
         <p:nvSpPr>
-          <p:cNvPr id="52" name="Shape 50"/>
+          <p:cNvPr id="20" name="Shape 17"/>
           <p:cNvSpPr/>
           <p:nvPr/>
         </p:nvSpPr>
@@ -25100,7 +21169,7 @@
       </p:sp>
       <p:sp>
         <p:nvSpPr>
-          <p:cNvPr id="53" name="Text 51"/>
+          <p:cNvPr id="21" name="Text 18"/>
           <p:cNvSpPr/>
           <p:nvPr/>
         </p:nvSpPr>
@@ -25139,7 +21208,7 @@
       </p:sp>
       <p:sp>
         <p:nvSpPr>
-          <p:cNvPr id="54" name="Shape 52"/>
+          <p:cNvPr id="22" name="Shape 19"/>
           <p:cNvSpPr/>
           <p:nvPr/>
         </p:nvSpPr>
@@ -25161,7 +21230,7 @@
       </p:sp>
       <p:sp>
         <p:nvSpPr>
-          <p:cNvPr id="55" name="Text 53"/>
+          <p:cNvPr id="23" name="Text 20"/>
           <p:cNvSpPr/>
           <p:nvPr/>
         </p:nvSpPr>
@@ -25200,7 +21269,7 @@
       </p:sp>
       <p:sp>
         <p:nvSpPr>
-          <p:cNvPr id="56" name="Shape 54"/>
+          <p:cNvPr id="24" name="Shape 21"/>
           <p:cNvSpPr/>
           <p:nvPr/>
         </p:nvSpPr>
@@ -25222,7 +21291,7 @@
       </p:sp>
       <p:sp>
         <p:nvSpPr>
-          <p:cNvPr id="57" name="Text 55"/>
+          <p:cNvPr id="25" name="Text 22"/>
           <p:cNvSpPr/>
           <p:nvPr/>
         </p:nvSpPr>
@@ -25261,7 +21330,7 @@
       </p:sp>
       <p:sp>
         <p:nvSpPr>
-          <p:cNvPr id="58" name="Shape 56"/>
+          <p:cNvPr id="26" name="Shape 23"/>
           <p:cNvSpPr/>
           <p:nvPr/>
         </p:nvSpPr>
@@ -25283,7 +21352,7 @@
       </p:sp>
       <p:sp>
         <p:nvSpPr>
-          <p:cNvPr id="59" name="Text 57"/>
+          <p:cNvPr id="27" name="Text 24"/>
           <p:cNvSpPr/>
           <p:nvPr/>
         </p:nvSpPr>
@@ -25322,7 +21391,7 @@
       </p:sp>
       <p:sp>
         <p:nvSpPr>
-          <p:cNvPr id="60" name="Shape 58"/>
+          <p:cNvPr id="28" name="Shape 25"/>
           <p:cNvSpPr/>
           <p:nvPr/>
         </p:nvSpPr>
@@ -25342,7 +21411,7 @@
       </p:sp>
       <p:sp>
         <p:nvSpPr>
-          <p:cNvPr id="61" name="Shape 59"/>
+          <p:cNvPr id="29" name="Shape 26"/>
           <p:cNvSpPr/>
           <p:nvPr/>
         </p:nvSpPr>
@@ -25362,7 +21431,7 @@
       </p:sp>
       <p:sp>
         <p:nvSpPr>
-          <p:cNvPr id="62" name="Shape 60"/>
+          <p:cNvPr id="30" name="Shape 27"/>
           <p:cNvSpPr/>
           <p:nvPr/>
         </p:nvSpPr>
@@ -27310,16 +23379,40 @@
           </a:p>
         </p:txBody>
       </p:sp>
-      <p:sp>
-        <p:nvSpPr>
-          <p:cNvPr id="6" name="Shape 4"/>
-          <p:cNvSpPr/>
-          <p:nvPr/>
-        </p:nvSpPr>
+      <p:pic>
+        <p:nvPicPr>
+          <p:cNvPr id="6" name="Image 0" descr="/sessions/brave-peaceful-lovelace/mockups/kpi_dashboard.png">    </p:cNvPr>
+          <p:cNvPicPr>
+            <a:picLocks noChangeAspect="1"/>
+          </p:cNvPicPr>
+          <p:nvPr/>
+        </p:nvPicPr>
+        <p:blipFill>
+          <a:blip r:embed="rId1"/>
+          <a:stretch>
+            <a:fillRect/>
+          </a:stretch>
+        </p:blipFill>
         <p:spPr>
           <a:xfrm>
             <a:off x="274320" y="822960"/>
-            <a:ext cx="1965960" cy="914400"/>
+            <a:ext cx="8595360" cy="5733288"/>
+          </a:xfrm>
+          <a:prstGeom prst="rect">
+            <a:avLst/>
+          </a:prstGeom>
+        </p:spPr>
+      </p:pic>
+      <p:sp>
+        <p:nvSpPr>
+          <p:cNvPr id="7" name="Shape 4"/>
+          <p:cNvSpPr/>
+          <p:nvPr/>
+        </p:nvSpPr>
+        <p:spPr>
+          <a:xfrm>
+            <a:off x="274320" y="4389120"/>
+            <a:ext cx="8595360" cy="411480"/>
           </a:xfrm>
           <a:prstGeom prst="rect">
             <a:avLst/>
@@ -27339,1717 +23432,7 @@
       </p:sp>
       <p:sp>
         <p:nvSpPr>
-          <p:cNvPr id="7" name="Text 5"/>
-          <p:cNvSpPr/>
-          <p:nvPr/>
-        </p:nvSpPr>
-        <p:spPr>
-          <a:xfrm>
-            <a:off x="365760" y="868680"/>
-            <a:ext cx="1280160" cy="411480"/>
-          </a:xfrm>
-          <a:prstGeom prst="rect">
-            <a:avLst/>
-          </a:prstGeom>
-          <a:noFill/>
-          <a:ln/>
-        </p:spPr>
-        <p:txBody>
-          <a:bodyPr wrap="square" lIns="0" tIns="0" rIns="0" bIns="0" rtlCol="0" anchor="ctr"/>
-          <a:lstStyle/>
-          <a:p>
-            <a:pPr indent="0" marL="0">
-              <a:buNone/>
-            </a:pPr>
-            <a:r>
-              <a:rPr lang="en-US" sz="2400" b="1" dirty="0">
-                <a:solidFill>
-                  <a:srgbClr val="FFFFFF"/>
-                </a:solidFill>
-                <a:latin typeface="Arial Black" pitchFamily="34" charset="0"/>
-                <a:ea typeface="Arial Black" pitchFamily="34" charset="-122"/>
-                <a:cs typeface="Arial Black" pitchFamily="34" charset="-120"/>
-              </a:rPr>
-              <a:t>47</a:t>
-            </a:r>
-            <a:endParaRPr lang="en-US" sz="2400" dirty="0"/>
-          </a:p>
-        </p:txBody>
-      </p:sp>
-      <p:sp>
-        <p:nvSpPr>
-          <p:cNvPr id="8" name="Text 6"/>
-          <p:cNvSpPr/>
-          <p:nvPr/>
-        </p:nvSpPr>
-        <p:spPr>
-          <a:xfrm>
-            <a:off x="365760" y="1280160"/>
-            <a:ext cx="1097280" cy="320040"/>
-          </a:xfrm>
-          <a:prstGeom prst="rect">
-            <a:avLst/>
-          </a:prstGeom>
-          <a:noFill/>
-          <a:ln/>
-        </p:spPr>
-        <p:txBody>
-          <a:bodyPr wrap="square" lIns="0" tIns="0" rIns="0" bIns="0" rtlCol="0" anchor="ctr"/>
-          <a:lstStyle/>
-          <a:p>
-            <a:pPr indent="0" marL="0">
-              <a:lnSpc>
-                <a:spcPct val="120000"/>
-              </a:lnSpc>
-              <a:buNone/>
-            </a:pPr>
-            <a:r>
-              <a:rPr lang="en-US" sz="700" dirty="0">
-                <a:solidFill>
-                  <a:srgbClr val="888888"/>
-                </a:solidFill>
-                <a:latin typeface="Arial" pitchFamily="34" charset="0"/>
-                <a:ea typeface="Arial" pitchFamily="34" charset="-122"/>
-                <a:cs typeface="Arial" pitchFamily="34" charset="-120"/>
-              </a:rPr>
-              <a:t>Urgenze</a:t>
-            </a:r>
-            <a:endParaRPr lang="en-US" sz="700" dirty="0"/>
-          </a:p>
-          <a:p>
-            <a:pPr indent="0" marL="0">
-              <a:lnSpc>
-                <a:spcPct val="120000"/>
-              </a:lnSpc>
-              <a:buNone/>
-            </a:pPr>
-            <a:r>
-              <a:rPr lang="en-US" sz="700" dirty="0">
-                <a:solidFill>
-                  <a:srgbClr val="888888"/>
-                </a:solidFill>
-                <a:latin typeface="Arial" pitchFamily="34" charset="0"/>
-                <a:ea typeface="Arial" pitchFamily="34" charset="-122"/>
-                <a:cs typeface="Arial" pitchFamily="34" charset="-120"/>
-              </a:rPr>
-              <a:t>risolte mese</a:t>
-            </a:r>
-            <a:endParaRPr lang="en-US" sz="700" dirty="0"/>
-          </a:p>
-        </p:txBody>
-      </p:sp>
-      <p:sp>
-        <p:nvSpPr>
-          <p:cNvPr id="9" name="Text 7"/>
-          <p:cNvSpPr/>
-          <p:nvPr/>
-        </p:nvSpPr>
-        <p:spPr>
-          <a:xfrm>
-            <a:off x="1645920" y="914400"/>
-            <a:ext cx="502920" cy="228600"/>
-          </a:xfrm>
-          <a:prstGeom prst="rect">
-            <a:avLst/>
-          </a:prstGeom>
-          <a:noFill/>
-          <a:ln/>
-        </p:spPr>
-        <p:txBody>
-          <a:bodyPr wrap="square" lIns="0" tIns="0" rIns="0" bIns="0" rtlCol="0" anchor="ctr"/>
-          <a:lstStyle/>
-          <a:p>
-            <a:pPr algn="r" indent="0" marL="0">
-              <a:buNone/>
-            </a:pPr>
-            <a:r>
-              <a:rPr lang="en-US" sz="900" b="1" dirty="0">
-                <a:solidFill>
-                  <a:srgbClr val="34D058"/>
-                </a:solidFill>
-                <a:latin typeface="Arial" pitchFamily="34" charset="0"/>
-                <a:ea typeface="Arial" pitchFamily="34" charset="-122"/>
-                <a:cs typeface="Arial" pitchFamily="34" charset="-120"/>
-              </a:rPr>
-              <a:t>+12%</a:t>
-            </a:r>
-            <a:endParaRPr lang="en-US" sz="900" dirty="0"/>
-          </a:p>
-        </p:txBody>
-      </p:sp>
-      <p:sp>
-        <p:nvSpPr>
-          <p:cNvPr id="10" name="Shape 8"/>
-          <p:cNvSpPr/>
-          <p:nvPr/>
-        </p:nvSpPr>
-        <p:spPr>
-          <a:xfrm>
-            <a:off x="2423160" y="822960"/>
-            <a:ext cx="1965960" cy="914400"/>
-          </a:xfrm>
-          <a:prstGeom prst="rect">
-            <a:avLst/>
-          </a:prstGeom>
-          <a:solidFill>
-            <a:srgbClr val="222222"/>
-          </a:solidFill>
-          <a:ln/>
-          <a:effectLst>
-            <a:outerShdw sx="100000" sy="100000" kx="0" ky="0" algn="bl" rotWithShape="0" blurRad="76200" dist="25400" dir="8100000">
-              <a:srgbClr val="000000">
-                <a:alpha val="40000"/>
-              </a:srgbClr>
-            </a:outerShdw>
-          </a:effectLst>
-        </p:spPr>
-      </p:sp>
-      <p:sp>
-        <p:nvSpPr>
-          <p:cNvPr id="11" name="Text 9"/>
-          <p:cNvSpPr/>
-          <p:nvPr/>
-        </p:nvSpPr>
-        <p:spPr>
-          <a:xfrm>
-            <a:off x="2514600" y="868680"/>
-            <a:ext cx="1280160" cy="411480"/>
-          </a:xfrm>
-          <a:prstGeom prst="rect">
-            <a:avLst/>
-          </a:prstGeom>
-          <a:noFill/>
-          <a:ln/>
-        </p:spPr>
-        <p:txBody>
-          <a:bodyPr wrap="square" lIns="0" tIns="0" rIns="0" bIns="0" rtlCol="0" anchor="ctr"/>
-          <a:lstStyle/>
-          <a:p>
-            <a:pPr indent="0" marL="0">
-              <a:buNone/>
-            </a:pPr>
-            <a:r>
-              <a:rPr lang="en-US" sz="2400" b="1" dirty="0">
-                <a:solidFill>
-                  <a:srgbClr val="FFFFFF"/>
-                </a:solidFill>
-                <a:latin typeface="Arial Black" pitchFamily="34" charset="0"/>
-                <a:ea typeface="Arial Black" pitchFamily="34" charset="-122"/>
-                <a:cs typeface="Arial Black" pitchFamily="34" charset="-120"/>
-              </a:rPr>
-              <a:t>2.4h</a:t>
-            </a:r>
-            <a:endParaRPr lang="en-US" sz="2400" dirty="0"/>
-          </a:p>
-        </p:txBody>
-      </p:sp>
-      <p:sp>
-        <p:nvSpPr>
-          <p:cNvPr id="12" name="Text 10"/>
-          <p:cNvSpPr/>
-          <p:nvPr/>
-        </p:nvSpPr>
-        <p:spPr>
-          <a:xfrm>
-            <a:off x="2514600" y="1280160"/>
-            <a:ext cx="1097280" cy="320040"/>
-          </a:xfrm>
-          <a:prstGeom prst="rect">
-            <a:avLst/>
-          </a:prstGeom>
-          <a:noFill/>
-          <a:ln/>
-        </p:spPr>
-        <p:txBody>
-          <a:bodyPr wrap="square" lIns="0" tIns="0" rIns="0" bIns="0" rtlCol="0" anchor="ctr"/>
-          <a:lstStyle/>
-          <a:p>
-            <a:pPr indent="0" marL="0">
-              <a:lnSpc>
-                <a:spcPct val="120000"/>
-              </a:lnSpc>
-              <a:buNone/>
-            </a:pPr>
-            <a:r>
-              <a:rPr lang="en-US" sz="700" dirty="0">
-                <a:solidFill>
-                  <a:srgbClr val="888888"/>
-                </a:solidFill>
-                <a:latin typeface="Arial" pitchFamily="34" charset="0"/>
-                <a:ea typeface="Arial" pitchFamily="34" charset="-122"/>
-                <a:cs typeface="Arial" pitchFamily="34" charset="-120"/>
-              </a:rPr>
-              <a:t>Tempo medio</a:t>
-            </a:r>
-            <a:endParaRPr lang="en-US" sz="700" dirty="0"/>
-          </a:p>
-          <a:p>
-            <a:pPr indent="0" marL="0">
-              <a:lnSpc>
-                <a:spcPct val="120000"/>
-              </a:lnSpc>
-              <a:buNone/>
-            </a:pPr>
-            <a:r>
-              <a:rPr lang="en-US" sz="700" dirty="0">
-                <a:solidFill>
-                  <a:srgbClr val="888888"/>
-                </a:solidFill>
-                <a:latin typeface="Arial" pitchFamily="34" charset="0"/>
-                <a:ea typeface="Arial" pitchFamily="34" charset="-122"/>
-                <a:cs typeface="Arial" pitchFamily="34" charset="-120"/>
-              </a:rPr>
-              <a:t>risoluzione</a:t>
-            </a:r>
-            <a:endParaRPr lang="en-US" sz="700" dirty="0"/>
-          </a:p>
-        </p:txBody>
-      </p:sp>
-      <p:sp>
-        <p:nvSpPr>
-          <p:cNvPr id="13" name="Text 11"/>
-          <p:cNvSpPr/>
-          <p:nvPr/>
-        </p:nvSpPr>
-        <p:spPr>
-          <a:xfrm>
-            <a:off x="3794760" y="914400"/>
-            <a:ext cx="502920" cy="228600"/>
-          </a:xfrm>
-          <a:prstGeom prst="rect">
-            <a:avLst/>
-          </a:prstGeom>
-          <a:noFill/>
-          <a:ln/>
-        </p:spPr>
-        <p:txBody>
-          <a:bodyPr wrap="square" lIns="0" tIns="0" rIns="0" bIns="0" rtlCol="0" anchor="ctr"/>
-          <a:lstStyle/>
-          <a:p>
-            <a:pPr algn="r" indent="0" marL="0">
-              <a:buNone/>
-            </a:pPr>
-            <a:r>
-              <a:rPr lang="en-US" sz="900" b="1" dirty="0">
-                <a:solidFill>
-                  <a:srgbClr val="34D058"/>
-                </a:solidFill>
-                <a:latin typeface="Arial" pitchFamily="34" charset="0"/>
-                <a:ea typeface="Arial" pitchFamily="34" charset="-122"/>
-                <a:cs typeface="Arial" pitchFamily="34" charset="-120"/>
-              </a:rPr>
-              <a:t>-35%</a:t>
-            </a:r>
-            <a:endParaRPr lang="en-US" sz="900" dirty="0"/>
-          </a:p>
-        </p:txBody>
-      </p:sp>
-      <p:sp>
-        <p:nvSpPr>
-          <p:cNvPr id="14" name="Shape 12"/>
-          <p:cNvSpPr/>
-          <p:nvPr/>
-        </p:nvSpPr>
-        <p:spPr>
-          <a:xfrm>
-            <a:off x="4572000" y="822960"/>
-            <a:ext cx="1965960" cy="914400"/>
-          </a:xfrm>
-          <a:prstGeom prst="rect">
-            <a:avLst/>
-          </a:prstGeom>
-          <a:solidFill>
-            <a:srgbClr val="222222"/>
-          </a:solidFill>
-          <a:ln/>
-          <a:effectLst>
-            <a:outerShdw sx="100000" sy="100000" kx="0" ky="0" algn="bl" rotWithShape="0" blurRad="76200" dist="25400" dir="8100000">
-              <a:srgbClr val="000000">
-                <a:alpha val="40000"/>
-              </a:srgbClr>
-            </a:outerShdw>
-          </a:effectLst>
-        </p:spPr>
-      </p:sp>
-      <p:sp>
-        <p:nvSpPr>
-          <p:cNvPr id="15" name="Text 13"/>
-          <p:cNvSpPr/>
-          <p:nvPr/>
-        </p:nvSpPr>
-        <p:spPr>
-          <a:xfrm>
-            <a:off x="4663440" y="868680"/>
-            <a:ext cx="1280160" cy="411480"/>
-          </a:xfrm>
-          <a:prstGeom prst="rect">
-            <a:avLst/>
-          </a:prstGeom>
-          <a:noFill/>
-          <a:ln/>
-        </p:spPr>
-        <p:txBody>
-          <a:bodyPr wrap="square" lIns="0" tIns="0" rIns="0" bIns="0" rtlCol="0" anchor="ctr"/>
-          <a:lstStyle/>
-          <a:p>
-            <a:pPr indent="0" marL="0">
-              <a:buNone/>
-            </a:pPr>
-            <a:r>
-              <a:rPr lang="en-US" sz="2400" b="1" dirty="0">
-                <a:solidFill>
-                  <a:srgbClr val="FFFFFF"/>
-                </a:solidFill>
-                <a:latin typeface="Arial Black" pitchFamily="34" charset="0"/>
-                <a:ea typeface="Arial Black" pitchFamily="34" charset="-122"/>
-                <a:cs typeface="Arial Black" pitchFamily="34" charset="-120"/>
-              </a:rPr>
-              <a:t>94%</a:t>
-            </a:r>
-            <a:endParaRPr lang="en-US" sz="2400" dirty="0"/>
-          </a:p>
-        </p:txBody>
-      </p:sp>
-      <p:sp>
-        <p:nvSpPr>
-          <p:cNvPr id="16" name="Text 14"/>
-          <p:cNvSpPr/>
-          <p:nvPr/>
-        </p:nvSpPr>
-        <p:spPr>
-          <a:xfrm>
-            <a:off x="4663440" y="1280160"/>
-            <a:ext cx="1097280" cy="320040"/>
-          </a:xfrm>
-          <a:prstGeom prst="rect">
-            <a:avLst/>
-          </a:prstGeom>
-          <a:noFill/>
-          <a:ln/>
-        </p:spPr>
-        <p:txBody>
-          <a:bodyPr wrap="square" lIns="0" tIns="0" rIns="0" bIns="0" rtlCol="0" anchor="ctr"/>
-          <a:lstStyle/>
-          <a:p>
-            <a:pPr indent="0" marL="0">
-              <a:lnSpc>
-                <a:spcPct val="120000"/>
-              </a:lnSpc>
-              <a:buNone/>
-            </a:pPr>
-            <a:r>
-              <a:rPr lang="en-US" sz="700" dirty="0">
-                <a:solidFill>
-                  <a:srgbClr val="888888"/>
-                </a:solidFill>
-                <a:latin typeface="Arial" pitchFamily="34" charset="0"/>
-                <a:ea typeface="Arial" pitchFamily="34" charset="-122"/>
-                <a:cs typeface="Arial" pitchFamily="34" charset="-120"/>
-              </a:rPr>
-              <a:t>SLA</a:t>
-            </a:r>
-            <a:endParaRPr lang="en-US" sz="700" dirty="0"/>
-          </a:p>
-          <a:p>
-            <a:pPr indent="0" marL="0">
-              <a:lnSpc>
-                <a:spcPct val="120000"/>
-              </a:lnSpc>
-              <a:buNone/>
-            </a:pPr>
-            <a:r>
-              <a:rPr lang="en-US" sz="700" dirty="0">
-                <a:solidFill>
-                  <a:srgbClr val="888888"/>
-                </a:solidFill>
-                <a:latin typeface="Arial" pitchFamily="34" charset="0"/>
-                <a:ea typeface="Arial" pitchFamily="34" charset="-122"/>
-                <a:cs typeface="Arial" pitchFamily="34" charset="-120"/>
-              </a:rPr>
-              <a:t>compliance</a:t>
-            </a:r>
-            <a:endParaRPr lang="en-US" sz="700" dirty="0"/>
-          </a:p>
-        </p:txBody>
-      </p:sp>
-      <p:sp>
-        <p:nvSpPr>
-          <p:cNvPr id="17" name="Text 15"/>
-          <p:cNvSpPr/>
-          <p:nvPr/>
-        </p:nvSpPr>
-        <p:spPr>
-          <a:xfrm>
-            <a:off x="5943600" y="914400"/>
-            <a:ext cx="502920" cy="228600"/>
-          </a:xfrm>
-          <a:prstGeom prst="rect">
-            <a:avLst/>
-          </a:prstGeom>
-          <a:noFill/>
-          <a:ln/>
-        </p:spPr>
-        <p:txBody>
-          <a:bodyPr wrap="square" lIns="0" tIns="0" rIns="0" bIns="0" rtlCol="0" anchor="ctr"/>
-          <a:lstStyle/>
-          <a:p>
-            <a:pPr algn="r" indent="0" marL="0">
-              <a:buNone/>
-            </a:pPr>
-            <a:r>
-              <a:rPr lang="en-US" sz="900" b="1" dirty="0">
-                <a:solidFill>
-                  <a:srgbClr val="34D058"/>
-                </a:solidFill>
-                <a:latin typeface="Arial" pitchFamily="34" charset="0"/>
-                <a:ea typeface="Arial" pitchFamily="34" charset="-122"/>
-                <a:cs typeface="Arial" pitchFamily="34" charset="-120"/>
-              </a:rPr>
-              <a:t>+8%</a:t>
-            </a:r>
-            <a:endParaRPr lang="en-US" sz="900" dirty="0"/>
-          </a:p>
-        </p:txBody>
-      </p:sp>
-      <p:sp>
-        <p:nvSpPr>
-          <p:cNvPr id="18" name="Shape 16"/>
-          <p:cNvSpPr/>
-          <p:nvPr/>
-        </p:nvSpPr>
-        <p:spPr>
-          <a:xfrm>
-            <a:off x="6720840" y="822960"/>
-            <a:ext cx="1965960" cy="914400"/>
-          </a:xfrm>
-          <a:prstGeom prst="rect">
-            <a:avLst/>
-          </a:prstGeom>
-          <a:solidFill>
-            <a:srgbClr val="222222"/>
-          </a:solidFill>
-          <a:ln/>
-          <a:effectLst>
-            <a:outerShdw sx="100000" sy="100000" kx="0" ky="0" algn="bl" rotWithShape="0" blurRad="76200" dist="25400" dir="8100000">
-              <a:srgbClr val="000000">
-                <a:alpha val="40000"/>
-              </a:srgbClr>
-            </a:outerShdw>
-          </a:effectLst>
-        </p:spPr>
-      </p:sp>
-      <p:sp>
-        <p:nvSpPr>
-          <p:cNvPr id="19" name="Text 17"/>
-          <p:cNvSpPr/>
-          <p:nvPr/>
-        </p:nvSpPr>
-        <p:spPr>
-          <a:xfrm>
-            <a:off x="6812280" y="868680"/>
-            <a:ext cx="1280160" cy="411480"/>
-          </a:xfrm>
-          <a:prstGeom prst="rect">
-            <a:avLst/>
-          </a:prstGeom>
-          <a:noFill/>
-          <a:ln/>
-        </p:spPr>
-        <p:txBody>
-          <a:bodyPr wrap="square" lIns="0" tIns="0" rIns="0" bIns="0" rtlCol="0" anchor="ctr"/>
-          <a:lstStyle/>
-          <a:p>
-            <a:pPr indent="0" marL="0">
-              <a:buNone/>
-            </a:pPr>
-            <a:r>
-              <a:rPr lang="en-US" sz="2400" b="1" dirty="0">
-                <a:solidFill>
-                  <a:srgbClr val="FFFFFF"/>
-                </a:solidFill>
-                <a:latin typeface="Arial Black" pitchFamily="34" charset="0"/>
-                <a:ea typeface="Arial Black" pitchFamily="34" charset="-122"/>
-                <a:cs typeface="Arial Black" pitchFamily="34" charset="-120"/>
-              </a:rPr>
-              <a:t>156</a:t>
-            </a:r>
-            <a:endParaRPr lang="en-US" sz="2400" dirty="0"/>
-          </a:p>
-        </p:txBody>
-      </p:sp>
-      <p:sp>
-        <p:nvSpPr>
-          <p:cNvPr id="20" name="Text 18"/>
-          <p:cNvSpPr/>
-          <p:nvPr/>
-        </p:nvSpPr>
-        <p:spPr>
-          <a:xfrm>
-            <a:off x="6812280" y="1280160"/>
-            <a:ext cx="1097280" cy="320040"/>
-          </a:xfrm>
-          <a:prstGeom prst="rect">
-            <a:avLst/>
-          </a:prstGeom>
-          <a:noFill/>
-          <a:ln/>
-        </p:spPr>
-        <p:txBody>
-          <a:bodyPr wrap="square" lIns="0" tIns="0" rIns="0" bIns="0" rtlCol="0" anchor="ctr"/>
-          <a:lstStyle/>
-          <a:p>
-            <a:pPr indent="0" marL="0">
-              <a:lnSpc>
-                <a:spcPct val="120000"/>
-              </a:lnSpc>
-              <a:buNone/>
-            </a:pPr>
-            <a:r>
-              <a:rPr lang="en-US" sz="700" dirty="0">
-                <a:solidFill>
-                  <a:srgbClr val="888888"/>
-                </a:solidFill>
-                <a:latin typeface="Arial" pitchFamily="34" charset="0"/>
-                <a:ea typeface="Arial" pitchFamily="34" charset="-122"/>
-                <a:cs typeface="Arial" pitchFamily="34" charset="-120"/>
-              </a:rPr>
-              <a:t>Interventi</a:t>
-            </a:r>
-            <a:endParaRPr lang="en-US" sz="700" dirty="0"/>
-          </a:p>
-          <a:p>
-            <a:pPr indent="0" marL="0">
-              <a:lnSpc>
-                <a:spcPct val="120000"/>
-              </a:lnSpc>
-              <a:buNone/>
-            </a:pPr>
-            <a:r>
-              <a:rPr lang="en-US" sz="700" dirty="0">
-                <a:solidFill>
-                  <a:srgbClr val="888888"/>
-                </a:solidFill>
-                <a:latin typeface="Arial" pitchFamily="34" charset="0"/>
-                <a:ea typeface="Arial" pitchFamily="34" charset="-122"/>
-                <a:cs typeface="Arial" pitchFamily="34" charset="-120"/>
-              </a:rPr>
-              <a:t>completati</a:t>
-            </a:r>
-            <a:endParaRPr lang="en-US" sz="700" dirty="0"/>
-          </a:p>
-        </p:txBody>
-      </p:sp>
-      <p:sp>
-        <p:nvSpPr>
-          <p:cNvPr id="21" name="Text 19"/>
-          <p:cNvSpPr/>
-          <p:nvPr/>
-        </p:nvSpPr>
-        <p:spPr>
-          <a:xfrm>
-            <a:off x="8092440" y="914400"/>
-            <a:ext cx="502920" cy="228600"/>
-          </a:xfrm>
-          <a:prstGeom prst="rect">
-            <a:avLst/>
-          </a:prstGeom>
-          <a:noFill/>
-          <a:ln/>
-        </p:spPr>
-        <p:txBody>
-          <a:bodyPr wrap="square" lIns="0" tIns="0" rIns="0" bIns="0" rtlCol="0" anchor="ctr"/>
-          <a:lstStyle/>
-          <a:p>
-            <a:pPr algn="r" indent="0" marL="0">
-              <a:buNone/>
-            </a:pPr>
-            <a:r>
-              <a:rPr lang="en-US" sz="900" b="1" dirty="0">
-                <a:solidFill>
-                  <a:srgbClr val="34D058"/>
-                </a:solidFill>
-                <a:latin typeface="Arial" pitchFamily="34" charset="0"/>
-                <a:ea typeface="Arial" pitchFamily="34" charset="-122"/>
-                <a:cs typeface="Arial" pitchFamily="34" charset="-120"/>
-              </a:rPr>
-              <a:t>+22%</a:t>
-            </a:r>
-            <a:endParaRPr lang="en-US" sz="900" dirty="0"/>
-          </a:p>
-        </p:txBody>
-      </p:sp>
-      <p:sp>
-        <p:nvSpPr>
-          <p:cNvPr id="22" name="Shape 20"/>
-          <p:cNvSpPr/>
-          <p:nvPr/>
-        </p:nvSpPr>
-        <p:spPr>
-          <a:xfrm>
-            <a:off x="274320" y="1920240"/>
-            <a:ext cx="5303520" cy="2286000"/>
-          </a:xfrm>
-          <a:prstGeom prst="rect">
-            <a:avLst/>
-          </a:prstGeom>
-          <a:solidFill>
-            <a:srgbClr val="222222"/>
-          </a:solidFill>
-          <a:ln/>
-          <a:effectLst>
-            <a:outerShdw sx="100000" sy="100000" kx="0" ky="0" algn="bl" rotWithShape="0" blurRad="76200" dist="25400" dir="8100000">
-              <a:srgbClr val="000000">
-                <a:alpha val="40000"/>
-              </a:srgbClr>
-            </a:outerShdw>
-          </a:effectLst>
-        </p:spPr>
-      </p:sp>
-      <p:sp>
-        <p:nvSpPr>
-          <p:cNvPr id="23" name="Text 21"/>
-          <p:cNvSpPr/>
-          <p:nvPr/>
-        </p:nvSpPr>
-        <p:spPr>
-          <a:xfrm>
-            <a:off x="457200" y="2011680"/>
-            <a:ext cx="3657600" cy="228600"/>
-          </a:xfrm>
-          <a:prstGeom prst="rect">
-            <a:avLst/>
-          </a:prstGeom>
-          <a:noFill/>
-          <a:ln/>
-        </p:spPr>
-        <p:txBody>
-          <a:bodyPr wrap="square" lIns="0" tIns="0" rIns="0" bIns="0" rtlCol="0" anchor="ctr"/>
-          <a:lstStyle/>
-          <a:p>
-            <a:pPr indent="0" marL="0">
-              <a:buNone/>
-            </a:pPr>
-            <a:r>
-              <a:rPr lang="en-US" sz="900" b="1" dirty="0">
-                <a:solidFill>
-                  <a:srgbClr val="FFFFFF"/>
-                </a:solidFill>
-                <a:latin typeface="Arial" pitchFamily="34" charset="0"/>
-                <a:ea typeface="Arial" pitchFamily="34" charset="-122"/>
-                <a:cs typeface="Arial" pitchFamily="34" charset="-120"/>
-              </a:rPr>
-              <a:t>Trend Urgenze — Ultimi 30 giorni</a:t>
-            </a:r>
-            <a:endParaRPr lang="en-US" sz="900" dirty="0"/>
-          </a:p>
-        </p:txBody>
-      </p:sp>
-      <p:sp>
-        <p:nvSpPr>
-          <p:cNvPr id="24" name="Shape 22"/>
-          <p:cNvSpPr/>
-          <p:nvPr/>
-        </p:nvSpPr>
-        <p:spPr>
-          <a:xfrm>
-            <a:off x="640080" y="3291840"/>
-            <a:ext cx="457200" cy="18288"/>
-          </a:xfrm>
-          <a:prstGeom prst="rect">
-            <a:avLst/>
-          </a:prstGeom>
-          <a:solidFill>
-            <a:srgbClr val="3B7EF7"/>
-          </a:solidFill>
-          <a:ln/>
-        </p:spPr>
-      </p:sp>
-      <p:sp>
-        <p:nvSpPr>
-          <p:cNvPr id="25" name="Shape 23"/>
-          <p:cNvSpPr/>
-          <p:nvPr/>
-        </p:nvSpPr>
-        <p:spPr>
-          <a:xfrm>
-            <a:off x="1097280" y="3291840"/>
-            <a:ext cx="457200" cy="18288"/>
-          </a:xfrm>
-          <a:prstGeom prst="rect">
-            <a:avLst/>
-          </a:prstGeom>
-          <a:solidFill>
-            <a:srgbClr val="3B7EF7"/>
-          </a:solidFill>
-          <a:ln/>
-        </p:spPr>
-      </p:sp>
-      <p:sp>
-        <p:nvSpPr>
-          <p:cNvPr id="26" name="Shape 24"/>
-          <p:cNvSpPr/>
-          <p:nvPr/>
-        </p:nvSpPr>
-        <p:spPr>
-          <a:xfrm>
-            <a:off x="1554480" y="3017520"/>
-            <a:ext cx="457200" cy="18288"/>
-          </a:xfrm>
-          <a:prstGeom prst="rect">
-            <a:avLst/>
-          </a:prstGeom>
-          <a:solidFill>
-            <a:srgbClr val="3B7EF7"/>
-          </a:solidFill>
-          <a:ln/>
-        </p:spPr>
-      </p:sp>
-      <p:sp>
-        <p:nvSpPr>
-          <p:cNvPr id="27" name="Shape 25"/>
-          <p:cNvSpPr/>
-          <p:nvPr/>
-        </p:nvSpPr>
-        <p:spPr>
-          <a:xfrm>
-            <a:off x="2011680" y="3017520"/>
-            <a:ext cx="457200" cy="18288"/>
-          </a:xfrm>
-          <a:prstGeom prst="rect">
-            <a:avLst/>
-          </a:prstGeom>
-          <a:solidFill>
-            <a:srgbClr val="3B7EF7"/>
-          </a:solidFill>
-          <a:ln/>
-        </p:spPr>
-      </p:sp>
-      <p:sp>
-        <p:nvSpPr>
-          <p:cNvPr id="28" name="Shape 26"/>
-          <p:cNvSpPr/>
-          <p:nvPr/>
-        </p:nvSpPr>
-        <p:spPr>
-          <a:xfrm>
-            <a:off x="2468880" y="2834640"/>
-            <a:ext cx="457200" cy="18288"/>
-          </a:xfrm>
-          <a:prstGeom prst="rect">
-            <a:avLst/>
-          </a:prstGeom>
-          <a:solidFill>
-            <a:srgbClr val="3B7EF7"/>
-          </a:solidFill>
-          <a:ln/>
-        </p:spPr>
-      </p:sp>
-      <p:sp>
-        <p:nvSpPr>
-          <p:cNvPr id="29" name="Shape 27"/>
-          <p:cNvSpPr/>
-          <p:nvPr/>
-        </p:nvSpPr>
-        <p:spPr>
-          <a:xfrm>
-            <a:off x="2926080" y="2834640"/>
-            <a:ext cx="457200" cy="18288"/>
-          </a:xfrm>
-          <a:prstGeom prst="rect">
-            <a:avLst/>
-          </a:prstGeom>
-          <a:solidFill>
-            <a:srgbClr val="3B7EF7"/>
-          </a:solidFill>
-          <a:ln/>
-        </p:spPr>
-      </p:sp>
-      <p:sp>
-        <p:nvSpPr>
-          <p:cNvPr id="30" name="Shape 28"/>
-          <p:cNvSpPr/>
-          <p:nvPr/>
-        </p:nvSpPr>
-        <p:spPr>
-          <a:xfrm>
-            <a:off x="3383280" y="2651760"/>
-            <a:ext cx="457200" cy="18288"/>
-          </a:xfrm>
-          <a:prstGeom prst="rect">
-            <a:avLst/>
-          </a:prstGeom>
-          <a:solidFill>
-            <a:srgbClr val="3B7EF7"/>
-          </a:solidFill>
-          <a:ln/>
-        </p:spPr>
-      </p:sp>
-      <p:sp>
-        <p:nvSpPr>
-          <p:cNvPr id="31" name="Shape 29"/>
-          <p:cNvSpPr/>
-          <p:nvPr/>
-        </p:nvSpPr>
-        <p:spPr>
-          <a:xfrm>
-            <a:off x="3840480" y="2651760"/>
-            <a:ext cx="457200" cy="18288"/>
-          </a:xfrm>
-          <a:prstGeom prst="rect">
-            <a:avLst/>
-          </a:prstGeom>
-          <a:solidFill>
-            <a:srgbClr val="3B7EF7"/>
-          </a:solidFill>
-          <a:ln/>
-        </p:spPr>
-      </p:sp>
-      <p:sp>
-        <p:nvSpPr>
-          <p:cNvPr id="32" name="Shape 30"/>
-          <p:cNvSpPr/>
-          <p:nvPr/>
-        </p:nvSpPr>
-        <p:spPr>
-          <a:xfrm>
-            <a:off x="4297680" y="2560320"/>
-            <a:ext cx="457200" cy="18288"/>
-          </a:xfrm>
-          <a:prstGeom prst="rect">
-            <a:avLst/>
-          </a:prstGeom>
-          <a:solidFill>
-            <a:srgbClr val="3B7EF7"/>
-          </a:solidFill>
-          <a:ln/>
-        </p:spPr>
-      </p:sp>
-      <p:sp>
-        <p:nvSpPr>
-          <p:cNvPr id="33" name="Shape 31"/>
-          <p:cNvSpPr/>
-          <p:nvPr/>
-        </p:nvSpPr>
-        <p:spPr>
-          <a:xfrm>
-            <a:off x="4754880" y="2560320"/>
-            <a:ext cx="457200" cy="18288"/>
-          </a:xfrm>
-          <a:prstGeom prst="rect">
-            <a:avLst/>
-          </a:prstGeom>
-          <a:solidFill>
-            <a:srgbClr val="3B7EF7"/>
-          </a:solidFill>
-          <a:ln/>
-        </p:spPr>
-      </p:sp>
-      <p:sp>
-        <p:nvSpPr>
-          <p:cNvPr id="34" name="Shape 32"/>
-          <p:cNvSpPr/>
-          <p:nvPr/>
-        </p:nvSpPr>
-        <p:spPr>
-          <a:xfrm>
-            <a:off x="603504" y="3529584"/>
-            <a:ext cx="73152" cy="73152"/>
-          </a:xfrm>
-          <a:prstGeom prst="ellipse">
-            <a:avLst/>
-          </a:prstGeom>
-          <a:solidFill>
-            <a:srgbClr val="3B7EF7"/>
-          </a:solidFill>
-          <a:ln/>
-        </p:spPr>
-      </p:sp>
-      <p:sp>
-        <p:nvSpPr>
-          <p:cNvPr id="35" name="Shape 33"/>
-          <p:cNvSpPr/>
-          <p:nvPr/>
-        </p:nvSpPr>
-        <p:spPr>
-          <a:xfrm>
-            <a:off x="1060704" y="3255264"/>
-            <a:ext cx="73152" cy="73152"/>
-          </a:xfrm>
-          <a:prstGeom prst="ellipse">
-            <a:avLst/>
-          </a:prstGeom>
-          <a:solidFill>
-            <a:srgbClr val="3B7EF7"/>
-          </a:solidFill>
-          <a:ln/>
-        </p:spPr>
-      </p:sp>
-      <p:sp>
-        <p:nvSpPr>
-          <p:cNvPr id="36" name="Shape 34"/>
-          <p:cNvSpPr/>
-          <p:nvPr/>
-        </p:nvSpPr>
-        <p:spPr>
-          <a:xfrm>
-            <a:off x="1517904" y="3346704"/>
-            <a:ext cx="73152" cy="73152"/>
-          </a:xfrm>
-          <a:prstGeom prst="ellipse">
-            <a:avLst/>
-          </a:prstGeom>
-          <a:solidFill>
-            <a:srgbClr val="3B7EF7"/>
-          </a:solidFill>
-          <a:ln/>
-        </p:spPr>
-      </p:sp>
-      <p:sp>
-        <p:nvSpPr>
-          <p:cNvPr id="37" name="Shape 35"/>
-          <p:cNvSpPr/>
-          <p:nvPr/>
-        </p:nvSpPr>
-        <p:spPr>
-          <a:xfrm>
-            <a:off x="1975104" y="2980944"/>
-            <a:ext cx="73152" cy="73152"/>
-          </a:xfrm>
-          <a:prstGeom prst="ellipse">
-            <a:avLst/>
-          </a:prstGeom>
-          <a:solidFill>
-            <a:srgbClr val="3B7EF7"/>
-          </a:solidFill>
-          <a:ln/>
-        </p:spPr>
-      </p:sp>
-      <p:sp>
-        <p:nvSpPr>
-          <p:cNvPr id="38" name="Shape 36"/>
-          <p:cNvSpPr/>
-          <p:nvPr/>
-        </p:nvSpPr>
-        <p:spPr>
-          <a:xfrm>
-            <a:off x="2432304" y="3072384"/>
-            <a:ext cx="73152" cy="73152"/>
-          </a:xfrm>
-          <a:prstGeom prst="ellipse">
-            <a:avLst/>
-          </a:prstGeom>
-          <a:solidFill>
-            <a:srgbClr val="3B7EF7"/>
-          </a:solidFill>
-          <a:ln/>
-        </p:spPr>
-      </p:sp>
-      <p:sp>
-        <p:nvSpPr>
-          <p:cNvPr id="39" name="Shape 37"/>
-          <p:cNvSpPr/>
-          <p:nvPr/>
-        </p:nvSpPr>
-        <p:spPr>
-          <a:xfrm>
-            <a:off x="2889504" y="2798064"/>
-            <a:ext cx="73152" cy="73152"/>
-          </a:xfrm>
-          <a:prstGeom prst="ellipse">
-            <a:avLst/>
-          </a:prstGeom>
-          <a:solidFill>
-            <a:srgbClr val="3B7EF7"/>
-          </a:solidFill>
-          <a:ln/>
-        </p:spPr>
-      </p:sp>
-      <p:sp>
-        <p:nvSpPr>
-          <p:cNvPr id="40" name="Shape 38"/>
-          <p:cNvSpPr/>
-          <p:nvPr/>
-        </p:nvSpPr>
-        <p:spPr>
-          <a:xfrm>
-            <a:off x="3346704" y="2980944"/>
-            <a:ext cx="73152" cy="73152"/>
-          </a:xfrm>
-          <a:prstGeom prst="ellipse">
-            <a:avLst/>
-          </a:prstGeom>
-          <a:solidFill>
-            <a:srgbClr val="3B7EF7"/>
-          </a:solidFill>
-          <a:ln/>
-        </p:spPr>
-      </p:sp>
-      <p:sp>
-        <p:nvSpPr>
-          <p:cNvPr id="41" name="Shape 39"/>
-          <p:cNvSpPr/>
-          <p:nvPr/>
-        </p:nvSpPr>
-        <p:spPr>
-          <a:xfrm>
-            <a:off x="3803904" y="2615184"/>
-            <a:ext cx="73152" cy="73152"/>
-          </a:xfrm>
-          <a:prstGeom prst="ellipse">
-            <a:avLst/>
-          </a:prstGeom>
-          <a:solidFill>
-            <a:srgbClr val="3B7EF7"/>
-          </a:solidFill>
-          <a:ln/>
-        </p:spPr>
-      </p:sp>
-      <p:sp>
-        <p:nvSpPr>
-          <p:cNvPr id="42" name="Shape 40"/>
-          <p:cNvSpPr/>
-          <p:nvPr/>
-        </p:nvSpPr>
-        <p:spPr>
-          <a:xfrm>
-            <a:off x="4261104" y="2706624"/>
-            <a:ext cx="73152" cy="73152"/>
-          </a:xfrm>
-          <a:prstGeom prst="ellipse">
-            <a:avLst/>
-          </a:prstGeom>
-          <a:solidFill>
-            <a:srgbClr val="3B7EF7"/>
-          </a:solidFill>
-          <a:ln/>
-        </p:spPr>
-      </p:sp>
-      <p:sp>
-        <p:nvSpPr>
-          <p:cNvPr id="43" name="Shape 41"/>
-          <p:cNvSpPr/>
-          <p:nvPr/>
-        </p:nvSpPr>
-        <p:spPr>
-          <a:xfrm>
-            <a:off x="4718304" y="2523744"/>
-            <a:ext cx="73152" cy="73152"/>
-          </a:xfrm>
-          <a:prstGeom prst="ellipse">
-            <a:avLst/>
-          </a:prstGeom>
-          <a:solidFill>
-            <a:srgbClr val="3B7EF7"/>
-          </a:solidFill>
-          <a:ln/>
-        </p:spPr>
-      </p:sp>
-      <p:sp>
-        <p:nvSpPr>
-          <p:cNvPr id="44" name="Shape 42"/>
-          <p:cNvSpPr/>
-          <p:nvPr/>
-        </p:nvSpPr>
-        <p:spPr>
-          <a:xfrm>
-            <a:off x="5175504" y="2798064"/>
-            <a:ext cx="73152" cy="73152"/>
-          </a:xfrm>
-          <a:prstGeom prst="ellipse">
-            <a:avLst/>
-          </a:prstGeom>
-          <a:solidFill>
-            <a:srgbClr val="3B7EF7"/>
-          </a:solidFill>
-          <a:ln/>
-        </p:spPr>
-      </p:sp>
-      <p:sp>
-        <p:nvSpPr>
-          <p:cNvPr id="45" name="Shape 43"/>
-          <p:cNvSpPr/>
-          <p:nvPr/>
-        </p:nvSpPr>
-        <p:spPr>
-          <a:xfrm>
-            <a:off x="5760720" y="1920240"/>
-            <a:ext cx="3108960" cy="2286000"/>
-          </a:xfrm>
-          <a:prstGeom prst="rect">
-            <a:avLst/>
-          </a:prstGeom>
-          <a:solidFill>
-            <a:srgbClr val="222222"/>
-          </a:solidFill>
-          <a:ln/>
-          <a:effectLst>
-            <a:outerShdw sx="100000" sy="100000" kx="0" ky="0" algn="bl" rotWithShape="0" blurRad="76200" dist="25400" dir="8100000">
-              <a:srgbClr val="000000">
-                <a:alpha val="40000"/>
-              </a:srgbClr>
-            </a:outerShdw>
-          </a:effectLst>
-        </p:spPr>
-      </p:sp>
-      <p:sp>
-        <p:nvSpPr>
-          <p:cNvPr id="46" name="Text 44"/>
-          <p:cNvSpPr/>
-          <p:nvPr/>
-        </p:nvSpPr>
-        <p:spPr>
-          <a:xfrm>
-            <a:off x="5943600" y="2011680"/>
-            <a:ext cx="2743200" cy="228600"/>
-          </a:xfrm>
-          <a:prstGeom prst="rect">
-            <a:avLst/>
-          </a:prstGeom>
-          <a:noFill/>
-          <a:ln/>
-        </p:spPr>
-        <p:txBody>
-          <a:bodyPr wrap="square" lIns="0" tIns="0" rIns="0" bIns="0" rtlCol="0" anchor="ctr"/>
-          <a:lstStyle/>
-          <a:p>
-            <a:pPr indent="0" marL="0">
-              <a:buNone/>
-            </a:pPr>
-            <a:r>
-              <a:rPr lang="en-US" sz="900" b="1" dirty="0">
-                <a:solidFill>
-                  <a:srgbClr val="FFFFFF"/>
-                </a:solidFill>
-                <a:latin typeface="Arial" pitchFamily="34" charset="0"/>
-                <a:ea typeface="Arial" pitchFamily="34" charset="-122"/>
-                <a:cs typeface="Arial" pitchFamily="34" charset="-120"/>
-              </a:rPr>
-              <a:t>Performance Tecnici</a:t>
-            </a:r>
-            <a:endParaRPr lang="en-US" sz="900" dirty="0"/>
-          </a:p>
-        </p:txBody>
-      </p:sp>
-      <p:sp>
-        <p:nvSpPr>
-          <p:cNvPr id="47" name="Text 45"/>
-          <p:cNvSpPr/>
-          <p:nvPr/>
-        </p:nvSpPr>
-        <p:spPr>
-          <a:xfrm>
-            <a:off x="5943600" y="2377440"/>
-            <a:ext cx="914400" cy="274320"/>
-          </a:xfrm>
-          <a:prstGeom prst="rect">
-            <a:avLst/>
-          </a:prstGeom>
-          <a:noFill/>
-          <a:ln/>
-        </p:spPr>
-        <p:txBody>
-          <a:bodyPr wrap="square" lIns="0" tIns="0" rIns="0" bIns="0" rtlCol="0" anchor="ctr"/>
-          <a:lstStyle/>
-          <a:p>
-            <a:pPr indent="0" marL="0">
-              <a:buNone/>
-            </a:pPr>
-            <a:r>
-              <a:rPr lang="en-US" sz="800" dirty="0">
-                <a:solidFill>
-                  <a:srgbClr val="CCCCCC"/>
-                </a:solidFill>
-                <a:latin typeface="Arial" pitchFamily="34" charset="0"/>
-                <a:ea typeface="Arial" pitchFamily="34" charset="-122"/>
-                <a:cs typeface="Arial" pitchFamily="34" charset="-120"/>
-              </a:rPr>
-              <a:t>Jacopo</a:t>
-            </a:r>
-            <a:endParaRPr lang="en-US" sz="800" dirty="0"/>
-          </a:p>
-        </p:txBody>
-      </p:sp>
-      <p:sp>
-        <p:nvSpPr>
-          <p:cNvPr id="48" name="Shape 46"/>
-          <p:cNvSpPr/>
-          <p:nvPr/>
-        </p:nvSpPr>
-        <p:spPr>
-          <a:xfrm>
-            <a:off x="6858000" y="2432304"/>
-            <a:ext cx="1613002" cy="137160"/>
-          </a:xfrm>
-          <a:prstGeom prst="rect">
-            <a:avLst/>
-          </a:prstGeom>
-          <a:solidFill>
-            <a:srgbClr val="34D058"/>
-          </a:solidFill>
-          <a:ln/>
-        </p:spPr>
-      </p:sp>
-      <p:sp>
-        <p:nvSpPr>
-          <p:cNvPr id="49" name="Text 47"/>
-          <p:cNvSpPr/>
-          <p:nvPr/>
-        </p:nvSpPr>
-        <p:spPr>
-          <a:xfrm>
-            <a:off x="8516722" y="2377440"/>
-            <a:ext cx="457200" cy="274320"/>
-          </a:xfrm>
-          <a:prstGeom prst="rect">
-            <a:avLst/>
-          </a:prstGeom>
-          <a:noFill/>
-          <a:ln/>
-        </p:spPr>
-        <p:txBody>
-          <a:bodyPr wrap="square" lIns="0" tIns="0" rIns="0" bIns="0" rtlCol="0" anchor="ctr"/>
-          <a:lstStyle/>
-          <a:p>
-            <a:pPr indent="0" marL="0">
-              <a:buNone/>
-            </a:pPr>
-            <a:r>
-              <a:rPr lang="en-US" sz="700" b="1" dirty="0">
-                <a:solidFill>
-                  <a:srgbClr val="34D058"/>
-                </a:solidFill>
-                <a:latin typeface="Arial" pitchFamily="34" charset="0"/>
-                <a:ea typeface="Arial" pitchFamily="34" charset="-122"/>
-                <a:cs typeface="Arial" pitchFamily="34" charset="-120"/>
-              </a:rPr>
-              <a:t>98%</a:t>
-            </a:r>
-            <a:endParaRPr lang="en-US" sz="700" dirty="0"/>
-          </a:p>
-        </p:txBody>
-      </p:sp>
-      <p:sp>
-        <p:nvSpPr>
-          <p:cNvPr id="50" name="Text 48"/>
-          <p:cNvSpPr/>
-          <p:nvPr/>
-        </p:nvSpPr>
-        <p:spPr>
-          <a:xfrm>
-            <a:off x="5943600" y="2724912"/>
-            <a:ext cx="914400" cy="274320"/>
-          </a:xfrm>
-          <a:prstGeom prst="rect">
-            <a:avLst/>
-          </a:prstGeom>
-          <a:noFill/>
-          <a:ln/>
-        </p:spPr>
-        <p:txBody>
-          <a:bodyPr wrap="square" lIns="0" tIns="0" rIns="0" bIns="0" rtlCol="0" anchor="ctr"/>
-          <a:lstStyle/>
-          <a:p>
-            <a:pPr indent="0" marL="0">
-              <a:buNone/>
-            </a:pPr>
-            <a:r>
-              <a:rPr lang="en-US" sz="800" dirty="0">
-                <a:solidFill>
-                  <a:srgbClr val="CCCCCC"/>
-                </a:solidFill>
-                <a:latin typeface="Arial" pitchFamily="34" charset="0"/>
-                <a:ea typeface="Arial" pitchFamily="34" charset="-122"/>
-                <a:cs typeface="Arial" pitchFamily="34" charset="-120"/>
-              </a:rPr>
-              <a:t>Anton</a:t>
-            </a:r>
-            <a:endParaRPr lang="en-US" sz="800" dirty="0"/>
-          </a:p>
-        </p:txBody>
-      </p:sp>
-      <p:sp>
-        <p:nvSpPr>
-          <p:cNvPr id="51" name="Shape 49"/>
-          <p:cNvSpPr/>
-          <p:nvPr/>
-        </p:nvSpPr>
-        <p:spPr>
-          <a:xfrm>
-            <a:off x="6858000" y="2779776"/>
-            <a:ext cx="1563624" cy="137160"/>
-          </a:xfrm>
-          <a:prstGeom prst="rect">
-            <a:avLst/>
-          </a:prstGeom>
-          <a:solidFill>
-            <a:srgbClr val="34D058"/>
-          </a:solidFill>
-          <a:ln/>
-        </p:spPr>
-      </p:sp>
-      <p:sp>
-        <p:nvSpPr>
-          <p:cNvPr id="52" name="Text 50"/>
-          <p:cNvSpPr/>
-          <p:nvPr/>
-        </p:nvSpPr>
-        <p:spPr>
-          <a:xfrm>
-            <a:off x="8467344" y="2724912"/>
-            <a:ext cx="457200" cy="274320"/>
-          </a:xfrm>
-          <a:prstGeom prst="rect">
-            <a:avLst/>
-          </a:prstGeom>
-          <a:noFill/>
-          <a:ln/>
-        </p:spPr>
-        <p:txBody>
-          <a:bodyPr wrap="square" lIns="0" tIns="0" rIns="0" bIns="0" rtlCol="0" anchor="ctr"/>
-          <a:lstStyle/>
-          <a:p>
-            <a:pPr indent="0" marL="0">
-              <a:buNone/>
-            </a:pPr>
-            <a:r>
-              <a:rPr lang="en-US" sz="700" b="1" dirty="0">
-                <a:solidFill>
-                  <a:srgbClr val="34D058"/>
-                </a:solidFill>
-                <a:latin typeface="Arial" pitchFamily="34" charset="0"/>
-                <a:ea typeface="Arial" pitchFamily="34" charset="-122"/>
-                <a:cs typeface="Arial" pitchFamily="34" charset="-120"/>
-              </a:rPr>
-              <a:t>95%</a:t>
-            </a:r>
-            <a:endParaRPr lang="en-US" sz="700" dirty="0"/>
-          </a:p>
-        </p:txBody>
-      </p:sp>
-      <p:sp>
-        <p:nvSpPr>
-          <p:cNvPr id="53" name="Text 51"/>
-          <p:cNvSpPr/>
-          <p:nvPr/>
-        </p:nvSpPr>
-        <p:spPr>
-          <a:xfrm>
-            <a:off x="5943600" y="3072384"/>
-            <a:ext cx="914400" cy="274320"/>
-          </a:xfrm>
-          <a:prstGeom prst="rect">
-            <a:avLst/>
-          </a:prstGeom>
-          <a:noFill/>
-          <a:ln/>
-        </p:spPr>
-        <p:txBody>
-          <a:bodyPr wrap="square" lIns="0" tIns="0" rIns="0" bIns="0" rtlCol="0" anchor="ctr"/>
-          <a:lstStyle/>
-          <a:p>
-            <a:pPr indent="0" marL="0">
-              <a:buNone/>
-            </a:pPr>
-            <a:r>
-              <a:rPr lang="en-US" sz="800" dirty="0">
-                <a:solidFill>
-                  <a:srgbClr val="CCCCCC"/>
-                </a:solidFill>
-                <a:latin typeface="Arial" pitchFamily="34" charset="0"/>
-                <a:ea typeface="Arial" pitchFamily="34" charset="-122"/>
-                <a:cs typeface="Arial" pitchFamily="34" charset="-120"/>
-              </a:rPr>
-              <a:t>Giovanni</a:t>
-            </a:r>
-            <a:endParaRPr lang="en-US" sz="800" dirty="0"/>
-          </a:p>
-        </p:txBody>
-      </p:sp>
-      <p:sp>
-        <p:nvSpPr>
-          <p:cNvPr id="54" name="Shape 52"/>
-          <p:cNvSpPr/>
-          <p:nvPr/>
-        </p:nvSpPr>
-        <p:spPr>
-          <a:xfrm>
-            <a:off x="6858000" y="3127248"/>
-            <a:ext cx="1514246" cy="137160"/>
-          </a:xfrm>
-          <a:prstGeom prst="rect">
-            <a:avLst/>
-          </a:prstGeom>
-          <a:solidFill>
-            <a:srgbClr val="34D058"/>
-          </a:solidFill>
-          <a:ln/>
-        </p:spPr>
-      </p:sp>
-      <p:sp>
-        <p:nvSpPr>
-          <p:cNvPr id="55" name="Text 53"/>
-          <p:cNvSpPr/>
-          <p:nvPr/>
-        </p:nvSpPr>
-        <p:spPr>
-          <a:xfrm>
-            <a:off x="8417966" y="3072384"/>
-            <a:ext cx="457200" cy="274320"/>
-          </a:xfrm>
-          <a:prstGeom prst="rect">
-            <a:avLst/>
-          </a:prstGeom>
-          <a:noFill/>
-          <a:ln/>
-        </p:spPr>
-        <p:txBody>
-          <a:bodyPr wrap="square" lIns="0" tIns="0" rIns="0" bIns="0" rtlCol="0" anchor="ctr"/>
-          <a:lstStyle/>
-          <a:p>
-            <a:pPr indent="0" marL="0">
-              <a:buNone/>
-            </a:pPr>
-            <a:r>
-              <a:rPr lang="en-US" sz="700" b="1" dirty="0">
-                <a:solidFill>
-                  <a:srgbClr val="34D058"/>
-                </a:solidFill>
-                <a:latin typeface="Arial" pitchFamily="34" charset="0"/>
-                <a:ea typeface="Arial" pitchFamily="34" charset="-122"/>
-                <a:cs typeface="Arial" pitchFamily="34" charset="-120"/>
-              </a:rPr>
-              <a:t>92%</a:t>
-            </a:r>
-            <a:endParaRPr lang="en-US" sz="700" dirty="0"/>
-          </a:p>
-        </p:txBody>
-      </p:sp>
-      <p:sp>
-        <p:nvSpPr>
-          <p:cNvPr id="56" name="Text 54"/>
-          <p:cNvSpPr/>
-          <p:nvPr/>
-        </p:nvSpPr>
-        <p:spPr>
-          <a:xfrm>
-            <a:off x="5943600" y="3419856"/>
-            <a:ext cx="914400" cy="274320"/>
-          </a:xfrm>
-          <a:prstGeom prst="rect">
-            <a:avLst/>
-          </a:prstGeom>
-          <a:noFill/>
-          <a:ln/>
-        </p:spPr>
-        <p:txBody>
-          <a:bodyPr wrap="square" lIns="0" tIns="0" rIns="0" bIns="0" rtlCol="0" anchor="ctr"/>
-          <a:lstStyle/>
-          <a:p>
-            <a:pPr indent="0" marL="0">
-              <a:buNone/>
-            </a:pPr>
-            <a:r>
-              <a:rPr lang="en-US" sz="800" dirty="0">
-                <a:solidFill>
-                  <a:srgbClr val="CCCCCC"/>
-                </a:solidFill>
-                <a:latin typeface="Arial" pitchFamily="34" charset="0"/>
-                <a:ea typeface="Arial" pitchFamily="34" charset="-122"/>
-                <a:cs typeface="Arial" pitchFamily="34" charset="-120"/>
-              </a:rPr>
-              <a:t>Fabio</a:t>
-            </a:r>
-            <a:endParaRPr lang="en-US" sz="800" dirty="0"/>
-          </a:p>
-        </p:txBody>
-      </p:sp>
-      <p:sp>
-        <p:nvSpPr>
-          <p:cNvPr id="57" name="Shape 55"/>
-          <p:cNvSpPr/>
-          <p:nvPr/>
-        </p:nvSpPr>
-        <p:spPr>
-          <a:xfrm>
-            <a:off x="6858000" y="3474720"/>
-            <a:ext cx="1448410" cy="137160"/>
-          </a:xfrm>
-          <a:prstGeom prst="rect">
-            <a:avLst/>
-          </a:prstGeom>
-          <a:solidFill>
-            <a:srgbClr val="3B7EF7"/>
-          </a:solidFill>
-          <a:ln/>
-        </p:spPr>
-      </p:sp>
-      <p:sp>
-        <p:nvSpPr>
-          <p:cNvPr id="58" name="Text 56"/>
-          <p:cNvSpPr/>
-          <p:nvPr/>
-        </p:nvSpPr>
-        <p:spPr>
-          <a:xfrm>
-            <a:off x="8352130" y="3419856"/>
-            <a:ext cx="457200" cy="274320"/>
-          </a:xfrm>
-          <a:prstGeom prst="rect">
-            <a:avLst/>
-          </a:prstGeom>
-          <a:noFill/>
-          <a:ln/>
-        </p:spPr>
-        <p:txBody>
-          <a:bodyPr wrap="square" lIns="0" tIns="0" rIns="0" bIns="0" rtlCol="0" anchor="ctr"/>
-          <a:lstStyle/>
-          <a:p>
-            <a:pPr indent="0" marL="0">
-              <a:buNone/>
-            </a:pPr>
-            <a:r>
-              <a:rPr lang="en-US" sz="700" b="1" dirty="0">
-                <a:solidFill>
-                  <a:srgbClr val="3B7EF7"/>
-                </a:solidFill>
-                <a:latin typeface="Arial" pitchFamily="34" charset="0"/>
-                <a:ea typeface="Arial" pitchFamily="34" charset="-122"/>
-                <a:cs typeface="Arial" pitchFamily="34" charset="-120"/>
-              </a:rPr>
-              <a:t>88%</a:t>
-            </a:r>
-            <a:endParaRPr lang="en-US" sz="700" dirty="0"/>
-          </a:p>
-        </p:txBody>
-      </p:sp>
-      <p:sp>
-        <p:nvSpPr>
-          <p:cNvPr id="59" name="Text 57"/>
-          <p:cNvSpPr/>
-          <p:nvPr/>
-        </p:nvSpPr>
-        <p:spPr>
-          <a:xfrm>
-            <a:off x="5943600" y="3767328"/>
-            <a:ext cx="914400" cy="274320"/>
-          </a:xfrm>
-          <a:prstGeom prst="rect">
-            <a:avLst/>
-          </a:prstGeom>
-          <a:noFill/>
-          <a:ln/>
-        </p:spPr>
-        <p:txBody>
-          <a:bodyPr wrap="square" lIns="0" tIns="0" rIns="0" bIns="0" rtlCol="0" anchor="ctr"/>
-          <a:lstStyle/>
-          <a:p>
-            <a:pPr indent="0" marL="0">
-              <a:buNone/>
-            </a:pPr>
-            <a:r>
-              <a:rPr lang="en-US" sz="800" dirty="0">
-                <a:solidFill>
-                  <a:srgbClr val="CCCCCC"/>
-                </a:solidFill>
-                <a:latin typeface="Arial" pitchFamily="34" charset="0"/>
-                <a:ea typeface="Arial" pitchFamily="34" charset="-122"/>
-                <a:cs typeface="Arial" pitchFamily="34" charset="-120"/>
-              </a:rPr>
-              <a:t>Giuseppe</a:t>
-            </a:r>
-            <a:endParaRPr lang="en-US" sz="800" dirty="0"/>
-          </a:p>
-        </p:txBody>
-      </p:sp>
-      <p:sp>
-        <p:nvSpPr>
-          <p:cNvPr id="60" name="Shape 58"/>
-          <p:cNvSpPr/>
-          <p:nvPr/>
-        </p:nvSpPr>
-        <p:spPr>
-          <a:xfrm>
-            <a:off x="6858000" y="3822192"/>
-            <a:ext cx="1399032" cy="137160"/>
-          </a:xfrm>
-          <a:prstGeom prst="rect">
-            <a:avLst/>
-          </a:prstGeom>
-          <a:solidFill>
-            <a:srgbClr val="3B7EF7"/>
-          </a:solidFill>
-          <a:ln/>
-        </p:spPr>
-      </p:sp>
-      <p:sp>
-        <p:nvSpPr>
-          <p:cNvPr id="61" name="Text 59"/>
-          <p:cNvSpPr/>
-          <p:nvPr/>
-        </p:nvSpPr>
-        <p:spPr>
-          <a:xfrm>
-            <a:off x="8302752" y="3767328"/>
-            <a:ext cx="457200" cy="274320"/>
-          </a:xfrm>
-          <a:prstGeom prst="rect">
-            <a:avLst/>
-          </a:prstGeom>
-          <a:noFill/>
-          <a:ln/>
-        </p:spPr>
-        <p:txBody>
-          <a:bodyPr wrap="square" lIns="0" tIns="0" rIns="0" bIns="0" rtlCol="0" anchor="ctr"/>
-          <a:lstStyle/>
-          <a:p>
-            <a:pPr indent="0" marL="0">
-              <a:buNone/>
-            </a:pPr>
-            <a:r>
-              <a:rPr lang="en-US" sz="700" b="1" dirty="0">
-                <a:solidFill>
-                  <a:srgbClr val="3B7EF7"/>
-                </a:solidFill>
-                <a:latin typeface="Arial" pitchFamily="34" charset="0"/>
-                <a:ea typeface="Arial" pitchFamily="34" charset="-122"/>
-                <a:cs typeface="Arial" pitchFamily="34" charset="-120"/>
-              </a:rPr>
-              <a:t>85%</a:t>
-            </a:r>
-            <a:endParaRPr lang="en-US" sz="700" dirty="0"/>
-          </a:p>
-        </p:txBody>
-      </p:sp>
-      <p:sp>
-        <p:nvSpPr>
-          <p:cNvPr id="62" name="Shape 60"/>
-          <p:cNvSpPr/>
-          <p:nvPr/>
-        </p:nvSpPr>
-        <p:spPr>
-          <a:xfrm>
-            <a:off x="274320" y="4389120"/>
-            <a:ext cx="8595360" cy="411480"/>
-          </a:xfrm>
-          <a:prstGeom prst="rect">
-            <a:avLst/>
-          </a:prstGeom>
-          <a:solidFill>
-            <a:srgbClr val="222222"/>
-          </a:solidFill>
-          <a:ln/>
-          <a:effectLst>
-            <a:outerShdw sx="100000" sy="100000" kx="0" ky="0" algn="bl" rotWithShape="0" blurRad="76200" dist="25400" dir="8100000">
-              <a:srgbClr val="000000">
-                <a:alpha val="40000"/>
-              </a:srgbClr>
-            </a:outerShdw>
-          </a:effectLst>
-        </p:spPr>
-      </p:sp>
-      <p:sp>
-        <p:nvSpPr>
-          <p:cNvPr id="63" name="Shape 61"/>
+          <p:cNvPr id="8" name="Shape 5"/>
           <p:cNvSpPr/>
           <p:nvPr/>
         </p:nvSpPr>
@@ -29069,7 +23452,7 @@
       </p:sp>
       <p:sp>
         <p:nvSpPr>
-          <p:cNvPr id="64" name="Text 62"/>
+          <p:cNvPr id="9" name="Text 6"/>
           <p:cNvSpPr/>
           <p:nvPr/>
         </p:nvSpPr>
@@ -29108,7 +23491,7 @@
       </p:sp>
       <p:sp>
         <p:nvSpPr>
-          <p:cNvPr id="65" name="Text 63"/>
+          <p:cNvPr id="10" name="Text 7"/>
           <p:cNvSpPr/>
           <p:nvPr/>
         </p:nvSpPr>
